--- a/assets/decks/episodio-07-governanca-como-codigo.pptx
+++ b/assets/decks/episodio-07-governanca-como-codigo.pptx
@@ -2,33 +2,33 @@
 <file path=ppt/presentation.xml><?xml version="1.0" encoding="utf-8"?>
 <p:presentation xmlns:p="http://schemas.openxmlformats.org/presentationml/2006/main">
   <p:sldMasterIdLst>
-    <p:sldMasterId xmlns:r="http://schemas.openxmlformats.org/officeDocument/2006/relationships" id="2147483648" r:id="R3416e1666cbb4b58"/>
-    <p:sldMasterId xmlns:r="http://schemas.openxmlformats.org/officeDocument/2006/relationships" id="2147483650" r:id="R3320386e66af4ea1"/>
+    <p:sldMasterId xmlns:r="http://schemas.openxmlformats.org/officeDocument/2006/relationships" id="2147483648" r:id="R5f97504616144c79"/>
+    <p:sldMasterId xmlns:r="http://schemas.openxmlformats.org/officeDocument/2006/relationships" id="2147483650" r:id="R010407b00b2646cb"/>
   </p:sldMasterIdLst>
   <p:notesMasterIdLst>
-    <p:notesMasterId xmlns:r="http://schemas.openxmlformats.org/officeDocument/2006/relationships" r:id="R4c278fe60fae4bd0"/>
+    <p:notesMasterId xmlns:r="http://schemas.openxmlformats.org/officeDocument/2006/relationships" r:id="Rf941f39cf33543c7"/>
   </p:notesMasterIdLst>
   <p:sldIdLst>
-    <p:sldId xmlns:r="http://schemas.openxmlformats.org/officeDocument/2006/relationships" id="256" r:id="Raf60729c1e234c98"/>
-    <p:sldId xmlns:r="http://schemas.openxmlformats.org/officeDocument/2006/relationships" id="257" r:id="R782ef3e7c1074a55"/>
-    <p:sldId xmlns:r="http://schemas.openxmlformats.org/officeDocument/2006/relationships" id="258" r:id="Rcc53bf85bb414c81"/>
-    <p:sldId xmlns:r="http://schemas.openxmlformats.org/officeDocument/2006/relationships" id="259" r:id="Rb469255399cf4beb"/>
-    <p:sldId xmlns:r="http://schemas.openxmlformats.org/officeDocument/2006/relationships" id="260" r:id="Rd304ea282f0f4277"/>
-    <p:sldId xmlns:r="http://schemas.openxmlformats.org/officeDocument/2006/relationships" id="261" r:id="R0162ea2848d34daf"/>
-    <p:sldId xmlns:r="http://schemas.openxmlformats.org/officeDocument/2006/relationships" id="262" r:id="Rfbf18af6e4a84927"/>
-    <p:sldId xmlns:r="http://schemas.openxmlformats.org/officeDocument/2006/relationships" id="263" r:id="R049bd46100954ab9"/>
-    <p:sldId xmlns:r="http://schemas.openxmlformats.org/officeDocument/2006/relationships" id="264" r:id="Rbcdca3a09a204759"/>
-    <p:sldId xmlns:r="http://schemas.openxmlformats.org/officeDocument/2006/relationships" id="265" r:id="R8f197f2983d04e39"/>
-    <p:sldId xmlns:r="http://schemas.openxmlformats.org/officeDocument/2006/relationships" id="266" r:id="R9660bde931464d33"/>
-    <p:sldId xmlns:r="http://schemas.openxmlformats.org/officeDocument/2006/relationships" id="267" r:id="R7ed2ee8b619f4c0e"/>
-    <p:sldId xmlns:r="http://schemas.openxmlformats.org/officeDocument/2006/relationships" id="268" r:id="R7aab564d93ab4011"/>
-    <p:sldId xmlns:r="http://schemas.openxmlformats.org/officeDocument/2006/relationships" id="269" r:id="R725880167349462e"/>
-    <p:sldId xmlns:r="http://schemas.openxmlformats.org/officeDocument/2006/relationships" id="270" r:id="R000f15a26690425f"/>
-    <p:sldId xmlns:r="http://schemas.openxmlformats.org/officeDocument/2006/relationships" id="271" r:id="R167d602a804247dc"/>
-    <p:sldId xmlns:r="http://schemas.openxmlformats.org/officeDocument/2006/relationships" id="272" r:id="R52531c1c287f483c"/>
-    <p:sldId xmlns:r="http://schemas.openxmlformats.org/officeDocument/2006/relationships" id="273" r:id="R0ab802ec260a4e21"/>
-    <p:sldId xmlns:r="http://schemas.openxmlformats.org/officeDocument/2006/relationships" id="274" r:id="R9b42dd53cf3d4a8c"/>
-    <p:sldId xmlns:r="http://schemas.openxmlformats.org/officeDocument/2006/relationships" id="275" r:id="R928f0a8127014f7c"/>
+    <p:sldId xmlns:r="http://schemas.openxmlformats.org/officeDocument/2006/relationships" id="256" r:id="Re2a50d45552745aa"/>
+    <p:sldId xmlns:r="http://schemas.openxmlformats.org/officeDocument/2006/relationships" id="257" r:id="R5d603fe022f448b6"/>
+    <p:sldId xmlns:r="http://schemas.openxmlformats.org/officeDocument/2006/relationships" id="258" r:id="R2c2000249904478a"/>
+    <p:sldId xmlns:r="http://schemas.openxmlformats.org/officeDocument/2006/relationships" id="259" r:id="Rfc140d186b75496a"/>
+    <p:sldId xmlns:r="http://schemas.openxmlformats.org/officeDocument/2006/relationships" id="260" r:id="Rf0cfde24a1b845bb"/>
+    <p:sldId xmlns:r="http://schemas.openxmlformats.org/officeDocument/2006/relationships" id="261" r:id="Ra7199f378c5a4719"/>
+    <p:sldId xmlns:r="http://schemas.openxmlformats.org/officeDocument/2006/relationships" id="262" r:id="R352626ab1ee74e92"/>
+    <p:sldId xmlns:r="http://schemas.openxmlformats.org/officeDocument/2006/relationships" id="263" r:id="R338f21bdcc424f9d"/>
+    <p:sldId xmlns:r="http://schemas.openxmlformats.org/officeDocument/2006/relationships" id="264" r:id="Rf85aea4f56f04fe2"/>
+    <p:sldId xmlns:r="http://schemas.openxmlformats.org/officeDocument/2006/relationships" id="265" r:id="R070b8d076e72491d"/>
+    <p:sldId xmlns:r="http://schemas.openxmlformats.org/officeDocument/2006/relationships" id="266" r:id="R8ab47913b9794117"/>
+    <p:sldId xmlns:r="http://schemas.openxmlformats.org/officeDocument/2006/relationships" id="267" r:id="Rf2195c67dfb94477"/>
+    <p:sldId xmlns:r="http://schemas.openxmlformats.org/officeDocument/2006/relationships" id="268" r:id="Ra1947bb7ee3f473e"/>
+    <p:sldId xmlns:r="http://schemas.openxmlformats.org/officeDocument/2006/relationships" id="269" r:id="Rc6ac486625b04ba3"/>
+    <p:sldId xmlns:r="http://schemas.openxmlformats.org/officeDocument/2006/relationships" id="270" r:id="Rc0c2a381b99f41b5"/>
+    <p:sldId xmlns:r="http://schemas.openxmlformats.org/officeDocument/2006/relationships" id="271" r:id="Rd2699720d09d4c14"/>
+    <p:sldId xmlns:r="http://schemas.openxmlformats.org/officeDocument/2006/relationships" id="272" r:id="R4f2fc043c49645f6"/>
+    <p:sldId xmlns:r="http://schemas.openxmlformats.org/officeDocument/2006/relationships" id="273" r:id="R7fe88bb8452a4154"/>
+    <p:sldId xmlns:r="http://schemas.openxmlformats.org/officeDocument/2006/relationships" id="274" r:id="R3919d4c580ad422c"/>
+    <p:sldId xmlns:r="http://schemas.openxmlformats.org/officeDocument/2006/relationships" id="275" r:id="R3fe4eab8aed54ae5"/>
   </p:sldIdLst>
   <p:sldSz cx="12192000" cy="6858000"/>
   <p:notesSz cx="6858000" cy="9144000"/>
@@ -462,7 +462,57 @@
           <a:lstStyle xmlns:a="http://schemas.openxmlformats.org/drawingml/2006/main"/>
           <a:p xmlns:a="http://schemas.openxmlformats.org/drawingml/2006/main">
             <a:r>
-              <a:t>Apresente o objetivo do EPISÓDIO 7 e conecte-o ao checkpoint executável. Owner sem alerta e tag sem seleção são apenas decoração no YAML.</a:t>
+              <a:t>[Roteiro recomendado]</a:t>
+            </a:r>
+          </a:p>
+          <a:p xmlns:a="http://schemas.openxmlformats.org/drawingml/2006/main">
+            <a:r>
+              <a:t>[Tempo sugerido: 00:45]</a:t>
+            </a:r>
+          </a:p>
+          <a:p xmlns:a="http://schemas.openxmlformats.org/drawingml/2006/main">
+            <a:r>
+              <a:t/>
+            </a:r>
+          </a:p>
+          <a:p xmlns:a="http://schemas.openxmlformats.org/drawingml/2006/main">
+            <a:r>
+              <a:t>Fala sugerida:</a:t>
+            </a:r>
+          </a:p>
+          <a:p xmlns:a="http://schemas.openxmlformats.org/drawingml/2006/main">
+            <a:r>
+              <a:t>Bem-vindo ao episódio 7 do dbt Moderno na Prática. Hoje vamos trabalhar o tema “Governança como código”. Metadado útil produz uma ação verificável. O objetivo não é apenas conhecer o conceito: vamos conectá-lo ao laboratório e terminar com uma evidência que você consegue reproduzir no seu próprio ambiente. Ao longo da aula, separe sempre o que é recurso aberto e estável daquilo que aparecerá apenas no Radar.</a:t>
+            </a:r>
+          </a:p>
+          <a:p xmlns:a="http://schemas.openxmlformats.org/drawingml/2006/main">
+            <a:r>
+              <a:t/>
+            </a:r>
+          </a:p>
+          <a:p xmlns:a="http://schemas.openxmlformats.org/drawingml/2006/main">
+            <a:r>
+              <a:t>O que destacar:</a:t>
+            </a:r>
+          </a:p>
+          <a:p xmlns:a="http://schemas.openxmlformats.org/drawingml/2006/main">
+            <a:r>
+              <a:t>- Apresente o título, situe o checkpoint 07 e deixe claro que a aula faz parte da trilha open/stable.</a:t>
+            </a:r>
+          </a:p>
+          <a:p xmlns:a="http://schemas.openxmlformats.org/drawingml/2006/main">
+            <a:r>
+              <a:t/>
+            </a:r>
+          </a:p>
+          <a:p xmlns:a="http://schemas.openxmlformats.org/drawingml/2006/main">
+            <a:r>
+              <a:t>Transição:</a:t>
+            </a:r>
+          </a:p>
+          <a:p xmlns:a="http://schemas.openxmlformats.org/drawingml/2006/main">
+            <a:r>
+              <a:t>Com esse ponto estabelecido, avance para “Owner sem alerta e tag sem seleção são apenas decoração no YAML.”.</a:t>
             </a:r>
           </a:p>
           <a:p xmlns:a="http://schemas.openxmlformats.org/drawingml/2006/main">
@@ -577,7 +627,57 @@
           <a:lstStyle xmlns:a="http://schemas.openxmlformats.org/drawingml/2006/main"/>
           <a:p xmlns:a="http://schemas.openxmlformats.org/drawingml/2006/main">
             <a:r>
-              <a:t>Use a composição para explicar visualmente: Dashboard e agente deixam de ser dependências invisíveis. Owner Maturidade URL descritiva Modelos dependentes</a:t>
+              <a:t>[Roteiro recomendado]</a:t>
+            </a:r>
+          </a:p>
+          <a:p xmlns:a="http://schemas.openxmlformats.org/drawingml/2006/main">
+            <a:r>
+              <a:t>[Tempo sugerido: 00:55]</a:t>
+            </a:r>
+          </a:p>
+          <a:p xmlns:a="http://schemas.openxmlformats.org/drawingml/2006/main">
+            <a:r>
+              <a:t/>
+            </a:r>
+          </a:p>
+          <a:p xmlns:a="http://schemas.openxmlformats.org/drawingml/2006/main">
+            <a:r>
+              <a:t>Fala sugerida:</a:t>
+            </a:r>
+          </a:p>
+          <a:p xmlns:a="http://schemas.openxmlformats.org/drawingml/2006/main">
+            <a:r>
+              <a:t>Agora vamos ler a ideia visualmente. Dashboard e agente deixam de ser dependências invisíveis. Siga a composição na ordem mostrada e conecte os elementos principais. A imagem ou o fluxo não cria uma regra nova; ele torna visível a relação que acabamos de explicar. A figura é identificada como figura oficial da documentação dbt — Apache 2.0</a:t>
+            </a:r>
+          </a:p>
+          <a:p xmlns:a="http://schemas.openxmlformats.org/drawingml/2006/main">
+            <a:r>
+              <a:t/>
+            </a:r>
+          </a:p>
+          <a:p xmlns:a="http://schemas.openxmlformats.org/drawingml/2006/main">
+            <a:r>
+              <a:t>O que destacar:</a:t>
+            </a:r>
+          </a:p>
+          <a:p xmlns:a="http://schemas.openxmlformats.org/drawingml/2006/main">
+            <a:r>
+              <a:t>- Aponte a legenda e deixe explícito quando a figura é oficial; as anotações do curso ficam fora da imagem.</a:t>
+            </a:r>
+          </a:p>
+          <a:p xmlns:a="http://schemas.openxmlformats.org/drawingml/2006/main">
+            <a:r>
+              <a:t/>
+            </a:r>
+          </a:p>
+          <a:p xmlns:a="http://schemas.openxmlformats.org/drawingml/2006/main">
+            <a:r>
+              <a:t>Transição:</a:t>
+            </a:r>
+          </a:p>
+          <a:p xmlns:a="http://schemas.openxmlformats.org/drawingml/2006/main">
+            <a:r>
+              <a:t>Com esse ponto estabelecido, avance para “Project Evaluator transforma convenção em teste”.</a:t>
             </a:r>
           </a:p>
           <a:p xmlns:a="http://schemas.openxmlformats.org/drawingml/2006/main">
@@ -697,7 +797,57 @@
           <a:lstStyle xmlns:a="http://schemas.openxmlformats.org/drawingml/2006/main"/>
           <a:p xmlns:a="http://schemas.openxmlformats.org/drawingml/2006/main">
             <a:r>
-              <a:t>Regras de estrutura podem ser avaliadas como parte da CI. Desenvolva os pontos: Governance tests; Padrões compartilhados; Exceções conscientes.</a:t>
+              <a:t>[Roteiro recomendado]</a:t>
+            </a:r>
+          </a:p>
+          <a:p xmlns:a="http://schemas.openxmlformats.org/drawingml/2006/main">
+            <a:r>
+              <a:t>[Tempo sugerido: 01:10]</a:t>
+            </a:r>
+          </a:p>
+          <a:p xmlns:a="http://schemas.openxmlformats.org/drawingml/2006/main">
+            <a:r>
+              <a:t/>
+            </a:r>
+          </a:p>
+          <a:p xmlns:a="http://schemas.openxmlformats.org/drawingml/2006/main">
+            <a:r>
+              <a:t>Fala sugerida:</a:t>
+            </a:r>
+          </a:p>
+          <a:p xmlns:a="http://schemas.openxmlformats.org/drawingml/2006/main">
+            <a:r>
+              <a:t>A mensagem principal deste slide é: Regras de estrutura podem ser avaliadas como parte da CI. Para tornar isso concreto, observe governance tests, Padrões compartilhados e Exceções conscientes. Esses pontos devem ser entendidos em conjunto; não são funcionalidades isoladas. No projeto, essa combinação transforma uma convenção informal em algo que pode ser revisado, testado ou consumido de maneira consistente.</a:t>
+            </a:r>
+          </a:p>
+          <a:p xmlns:a="http://schemas.openxmlformats.org/drawingml/2006/main">
+            <a:r>
+              <a:t/>
+            </a:r>
+          </a:p>
+          <a:p xmlns:a="http://schemas.openxmlformats.org/drawingml/2006/main">
+            <a:r>
+              <a:t>O que destacar:</a:t>
+            </a:r>
+          </a:p>
+          <a:p xmlns:a="http://schemas.openxmlformats.org/drawingml/2006/main">
+            <a:r>
+              <a:t>- Comece pelo título, leia a afirmação abaixo dele e depois desenvolva os itens sem repetir o texto palavra por palavra.</a:t>
+            </a:r>
+          </a:p>
+          <a:p xmlns:a="http://schemas.openxmlformats.org/drawingml/2006/main">
+            <a:r>
+              <a:t/>
+            </a:r>
+          </a:p>
+          <a:p xmlns:a="http://schemas.openxmlformats.org/drawingml/2006/main">
+            <a:r>
+              <a:t>Transição:</a:t>
+            </a:r>
+          </a:p>
+          <a:p xmlns:a="http://schemas.openxmlformats.org/drawingml/2006/main">
+            <a:r>
+              <a:t>Com esse ponto estabelecido, avance para “Project Evaluator transforma convenção em teste”.</a:t>
             </a:r>
           </a:p>
           <a:p xmlns:a="http://schemas.openxmlformats.org/drawingml/2006/main">
@@ -812,7 +962,57 @@
           <a:lstStyle xmlns:a="http://schemas.openxmlformats.org/drawingml/2006/main"/>
           <a:p xmlns:a="http://schemas.openxmlformats.org/drawingml/2006/main">
             <a:r>
-              <a:t>Use a composição para explicar visualmente: Regras de estrutura podem ser avaliadas como parte da CI. Governance tests Padrões compartilhados Exceções conscientes</a:t>
+              <a:t>[Roteiro recomendado]</a:t>
+            </a:r>
+          </a:p>
+          <a:p xmlns:a="http://schemas.openxmlformats.org/drawingml/2006/main">
+            <a:r>
+              <a:t>[Tempo sugerido: 00:55]</a:t>
+            </a:r>
+          </a:p>
+          <a:p xmlns:a="http://schemas.openxmlformats.org/drawingml/2006/main">
+            <a:r>
+              <a:t/>
+            </a:r>
+          </a:p>
+          <a:p xmlns:a="http://schemas.openxmlformats.org/drawingml/2006/main">
+            <a:r>
+              <a:t>Fala sugerida:</a:t>
+            </a:r>
+          </a:p>
+          <a:p xmlns:a="http://schemas.openxmlformats.org/drawingml/2006/main">
+            <a:r>
+              <a:t>Agora vamos ler a ideia visualmente. Regras de estrutura podem ser avaliadas como parte da CI. Siga a composição na ordem mostrada e conecte projeto, Evaluator, Finding e Ação. A imagem ou o fluxo não cria uma regra nova; ele torna visível a relação que acabamos de explicar. Use a disposição dos elementos para reforçar causa, dependência ou comparação.</a:t>
+            </a:r>
+          </a:p>
+          <a:p xmlns:a="http://schemas.openxmlformats.org/drawingml/2006/main">
+            <a:r>
+              <a:t/>
+            </a:r>
+          </a:p>
+          <a:p xmlns:a="http://schemas.openxmlformats.org/drawingml/2006/main">
+            <a:r>
+              <a:t>O que destacar:</a:t>
+            </a:r>
+          </a:p>
+          <a:p xmlns:a="http://schemas.openxmlformats.org/drawingml/2006/main">
+            <a:r>
+              <a:t>- Acompanhe o fluxo ou a comparação com o cursor e preserve a ordem de leitura do slide.</a:t>
+            </a:r>
+          </a:p>
+          <a:p xmlns:a="http://schemas.openxmlformats.org/drawingml/2006/main">
+            <a:r>
+              <a:t/>
+            </a:r>
+          </a:p>
+          <a:p xmlns:a="http://schemas.openxmlformats.org/drawingml/2006/main">
+            <a:r>
+              <a:t>Transição:</a:t>
+            </a:r>
+          </a:p>
+          <a:p xmlns:a="http://schemas.openxmlformats.org/drawingml/2006/main">
+            <a:r>
+              <a:t>Com esse ponto estabelecido, avance para “Demonstração — execute”.</a:t>
             </a:r>
           </a:p>
           <a:p xmlns:a="http://schemas.openxmlformats.org/drawingml/2006/main">
@@ -927,7 +1127,57 @@
           <a:lstStyle xmlns:a="http://schemas.openxmlformats.org/drawingml/2006/main"/>
           <a:p xmlns:a="http://schemas.openxmlformats.org/drawingml/2006/main">
             <a:r>
-              <a:t>Execute python course.py checkpoint 07. Pause para o aluno acompanhar o terminal.</a:t>
+              <a:t>[Roteiro recomendado]</a:t>
+            </a:r>
+          </a:p>
+          <a:p xmlns:a="http://schemas.openxmlformats.org/drawingml/2006/main">
+            <a:r>
+              <a:t>[Tempo sugerido: 01:20]</a:t>
+            </a:r>
+          </a:p>
+          <a:p xmlns:a="http://schemas.openxmlformats.org/drawingml/2006/main">
+            <a:r>
+              <a:t/>
+            </a:r>
+          </a:p>
+          <a:p xmlns:a="http://schemas.openxmlformats.org/drawingml/2006/main">
+            <a:r>
+              <a:t>Fala sugerida:</a:t>
+            </a:r>
+          </a:p>
+          <a:p xmlns:a="http://schemas.openxmlformats.org/drawingml/2006/main">
+            <a:r>
+              <a:t>Agora vamos sair da explicação e comprovar o comportamento. Execute os comandos exatamente como aparecem: python course.py checkpoint 07. Não é necessário ativar o ambiente virtual manualmente; o launcher do curso seleciona o ambiente correto. Antes de avançar, confirme que o comando iniciou sem erro e dê tempo para o aluno acompanhar a mesma etapa.</a:t>
+            </a:r>
+          </a:p>
+          <a:p xmlns:a="http://schemas.openxmlformats.org/drawingml/2006/main">
+            <a:r>
+              <a:t/>
+            </a:r>
+          </a:p>
+          <a:p xmlns:a="http://schemas.openxmlformats.org/drawingml/2006/main">
+            <a:r>
+              <a:t>O que destacar:</a:t>
+            </a:r>
+          </a:p>
+          <a:p xmlns:a="http://schemas.openxmlformats.org/drawingml/2006/main">
+            <a:r>
+              <a:t>- Mostre o comando completo, execute uma linha por vez quando houver mais de uma e mantenha o terminal visível.</a:t>
+            </a:r>
+          </a:p>
+          <a:p xmlns:a="http://schemas.openxmlformats.org/drawingml/2006/main">
+            <a:r>
+              <a:t/>
+            </a:r>
+          </a:p>
+          <a:p xmlns:a="http://schemas.openxmlformats.org/drawingml/2006/main">
+            <a:r>
+              <a:t>Transição:</a:t>
+            </a:r>
+          </a:p>
+          <a:p xmlns:a="http://schemas.openxmlformats.org/drawingml/2006/main">
+            <a:r>
+              <a:t>Com esse ponto estabelecido, avance para “Demonstração — observe”.</a:t>
             </a:r>
           </a:p>
           <a:p xmlns:a="http://schemas.openxmlformats.org/drawingml/2006/main">
@@ -1042,7 +1292,57 @@
           <a:lstStyle xmlns:a="http://schemas.openxmlformats.org/drawingml/2006/main"/>
           <a:p xmlns:a="http://schemas.openxmlformats.org/drawingml/2006/main">
             <a:r>
-              <a:t>Durante a execução, destaque: Groups e owners; Access público/privado; Exposure de dashboard e agente.</a:t>
+              <a:t>[Roteiro recomendado]</a:t>
+            </a:r>
+          </a:p>
+          <a:p xmlns:a="http://schemas.openxmlformats.org/drawingml/2006/main">
+            <a:r>
+              <a:t>[Tempo sugerido: 01:10]</a:t>
+            </a:r>
+          </a:p>
+          <a:p xmlns:a="http://schemas.openxmlformats.org/drawingml/2006/main">
+            <a:r>
+              <a:t/>
+            </a:r>
+          </a:p>
+          <a:p xmlns:a="http://schemas.openxmlformats.org/drawingml/2006/main">
+            <a:r>
+              <a:t>Fala sugerida:</a:t>
+            </a:r>
+          </a:p>
+          <a:p xmlns:a="http://schemas.openxmlformats.org/drawingml/2006/main">
+            <a:r>
+              <a:t>Enquanto a execução acontece, não olhe apenas para a mensagem final. Observe groups e owners, Access público/privado e Exposure de dashboard e agente. Cada sinal responde a uma pergunta diferente sobre o pipeline. Se um deles divergir, interrompa a demonstração e investigue; o objetivo do hands-on é produzir evidência, não apenas chegar rapidamente a uma tela verde.</a:t>
+            </a:r>
+          </a:p>
+          <a:p xmlns:a="http://schemas.openxmlformats.org/drawingml/2006/main">
+            <a:r>
+              <a:t/>
+            </a:r>
+          </a:p>
+          <a:p xmlns:a="http://schemas.openxmlformats.org/drawingml/2006/main">
+            <a:r>
+              <a:t>O que destacar:</a:t>
+            </a:r>
+          </a:p>
+          <a:p xmlns:a="http://schemas.openxmlformats.org/drawingml/2006/main">
+            <a:r>
+              <a:t>- Marque cada observação quando ela aparecer no terminal ou no artifact correspondente.</a:t>
+            </a:r>
+          </a:p>
+          <a:p xmlns:a="http://schemas.openxmlformats.org/drawingml/2006/main">
+            <a:r>
+              <a:t/>
+            </a:r>
+          </a:p>
+          <a:p xmlns:a="http://schemas.openxmlformats.org/drawingml/2006/main">
+            <a:r>
+              <a:t>Transição:</a:t>
+            </a:r>
+          </a:p>
+          <a:p xmlns:a="http://schemas.openxmlformats.org/drawingml/2006/main">
+            <a:r>
+              <a:t>Com esse ponto estabelecido, avance para “RESULTADO ESPERADO”.</a:t>
             </a:r>
           </a:p>
           <a:p xmlns:a="http://schemas.openxmlformats.org/drawingml/2006/main">
@@ -1157,7 +1457,57 @@
           <a:lstStyle xmlns:a="http://schemas.openxmlformats.org/drawingml/2006/main"/>
           <a:p xmlns:a="http://schemas.openxmlformats.org/drawingml/2006/main">
             <a:r>
-              <a:t>Confirme o resultado esperado: Metadados governados no manifest. Se o valor divergir, não avance sem investigar.</a:t>
+              <a:t>[Roteiro recomendado]</a:t>
+            </a:r>
+          </a:p>
+          <a:p xmlns:a="http://schemas.openxmlformats.org/drawingml/2006/main">
+            <a:r>
+              <a:t>[Tempo sugerido: 00:45]</a:t>
+            </a:r>
+          </a:p>
+          <a:p xmlns:a="http://schemas.openxmlformats.org/drawingml/2006/main">
+            <a:r>
+              <a:t/>
+            </a:r>
+          </a:p>
+          <a:p xmlns:a="http://schemas.openxmlformats.org/drawingml/2006/main">
+            <a:r>
+              <a:t>Fala sugerida:</a:t>
+            </a:r>
+          </a:p>
+          <a:p xmlns:a="http://schemas.openxmlformats.org/drawingml/2006/main">
+            <a:r>
+              <a:t>Este é o ponto de parada da demonstração: Metadados governados no manifest. Esse resultado confirma que a etapa executada produziu a evidência esperada para o checkpoint 07. Se o valor, o status ou o artifact estiver diferente, não trate a divergência como detalhe de ambiente. Use o diagnóstico do curso e só avance quando a causa estiver compreendida.</a:t>
+            </a:r>
+          </a:p>
+          <a:p xmlns:a="http://schemas.openxmlformats.org/drawingml/2006/main">
+            <a:r>
+              <a:t/>
+            </a:r>
+          </a:p>
+          <a:p xmlns:a="http://schemas.openxmlformats.org/drawingml/2006/main">
+            <a:r>
+              <a:t>O que destacar:</a:t>
+            </a:r>
+          </a:p>
+          <a:p xmlns:a="http://schemas.openxmlformats.org/drawingml/2006/main">
+            <a:r>
+              <a:t>- Compare o resultado do terminal com a frase central do slide e registre a evidência antes de continuar.</a:t>
+            </a:r>
+          </a:p>
+          <a:p xmlns:a="http://schemas.openxmlformats.org/drawingml/2006/main">
+            <a:r>
+              <a:t/>
+            </a:r>
+          </a:p>
+          <a:p xmlns:a="http://schemas.openxmlformats.org/drawingml/2006/main">
+            <a:r>
+              <a:t>Transição:</a:t>
+            </a:r>
+          </a:p>
+          <a:p xmlns:a="http://schemas.openxmlformats.org/drawingml/2006/main">
+            <a:r>
+              <a:t>Com esse ponto estabelecido, avance para “O mesmo recurso afeta três decisões”.</a:t>
             </a:r>
           </a:p>
           <a:p xmlns:a="http://schemas.openxmlformats.org/drawingml/2006/main">
@@ -1272,7 +1622,57 @@
           <a:lstStyle xmlns:a="http://schemas.openxmlformats.org/drawingml/2006/main"/>
           <a:p xmlns:a="http://schemas.openxmlformats.org/drawingml/2006/main">
             <a:r>
-              <a:t>Conecte a técnica aos efeitos: Governança: ação e owner; FinOps: seleção por tag; IA: escopo de leitura. Não prometa economia sem medição.</a:t>
+              <a:t>[Roteiro recomendado]</a:t>
+            </a:r>
+          </a:p>
+          <a:p xmlns:a="http://schemas.openxmlformats.org/drawingml/2006/main">
+            <a:r>
+              <a:t>[Tempo sugerido: 01:00]</a:t>
+            </a:r>
+          </a:p>
+          <a:p xmlns:a="http://schemas.openxmlformats.org/drawingml/2006/main">
+            <a:r>
+              <a:t/>
+            </a:r>
+          </a:p>
+          <a:p xmlns:a="http://schemas.openxmlformats.org/drawingml/2006/main">
+            <a:r>
+              <a:t>Fala sugerida:</a:t>
+            </a:r>
+          </a:p>
+          <a:p xmlns:a="http://schemas.openxmlformats.org/drawingml/2006/main">
+            <a:r>
+              <a:t>Antes de seguir, conecte a técnica às decisões que ela afeta: Governança: ação e owner, FinOps: seleção por tag e IA: escopo de leitura. Governança define responsabilidade e consistência; FinOps pergunta quanto trabalho estamos repetindo; e IA depende do contexto que decidimos expor. A mesma implementação pode melhorar os três eixos, mas os ganhos devem ser medidos separadamente.</a:t>
+            </a:r>
+          </a:p>
+          <a:p xmlns:a="http://schemas.openxmlformats.org/drawingml/2006/main">
+            <a:r>
+              <a:t/>
+            </a:r>
+          </a:p>
+          <a:p xmlns:a="http://schemas.openxmlformats.org/drawingml/2006/main">
+            <a:r>
+              <a:t>O que destacar:</a:t>
+            </a:r>
+          </a:p>
+          <a:p xmlns:a="http://schemas.openxmlformats.org/drawingml/2006/main">
+            <a:r>
+              <a:t>- Percorra os três eixos e evite apresentar economia ou acurácia como consequência automática.</a:t>
+            </a:r>
+          </a:p>
+          <a:p xmlns:a="http://schemas.openxmlformats.org/drawingml/2006/main">
+            <a:r>
+              <a:t/>
+            </a:r>
+          </a:p>
+          <a:p xmlns:a="http://schemas.openxmlformats.org/drawingml/2006/main">
+            <a:r>
+              <a:t>Transição:</a:t>
+            </a:r>
+          </a:p>
+          <a:p xmlns:a="http://schemas.openxmlformats.org/drawingml/2006/main">
+            <a:r>
+              <a:t>Com esse ponto estabelecido, avance para “2 exposures”.</a:t>
             </a:r>
           </a:p>
           <a:p xmlns:a="http://schemas.openxmlformats.org/drawingml/2006/main">
@@ -1387,7 +1787,57 @@
           <a:lstStyle xmlns:a="http://schemas.openxmlformats.org/drawingml/2006/main"/>
           <a:p xmlns:a="http://schemas.openxmlformats.org/drawingml/2006/main">
             <a:r>
-              <a:t>2 exposures: dashboard e agente no grafo. Evidência do laboratório, sem recurso Enterprise.</a:t>
+              <a:t>[Roteiro recomendado]</a:t>
+            </a:r>
+          </a:p>
+          <a:p xmlns:a="http://schemas.openxmlformats.org/drawingml/2006/main">
+            <a:r>
+              <a:t>[Tempo sugerido: 00:55]</a:t>
+            </a:r>
+          </a:p>
+          <a:p xmlns:a="http://schemas.openxmlformats.org/drawingml/2006/main">
+            <a:r>
+              <a:t/>
+            </a:r>
+          </a:p>
+          <a:p xmlns:a="http://schemas.openxmlformats.org/drawingml/2006/main">
+            <a:r>
+              <a:t>Fala sugerida:</a:t>
+            </a:r>
+          </a:p>
+          <a:p xmlns:a="http://schemas.openxmlformats.org/drawingml/2006/main">
+            <a:r>
+              <a:t>Aqui temos 2 exposures: dashboard e agente no grafo. O número ajuda a dimensionar o exemplo, mas precisa ser lido com a ressalva correta. Evidência do laboratório, sem recurso Enterprise. Use o case como evidência contextual e não como promessa de que outro projeto repetirá o mesmo resultado sem as mesmas condições.</a:t>
+            </a:r>
+          </a:p>
+          <a:p xmlns:a="http://schemas.openxmlformats.org/drawingml/2006/main">
+            <a:r>
+              <a:t/>
+            </a:r>
+          </a:p>
+          <a:p xmlns:a="http://schemas.openxmlformats.org/drawingml/2006/main">
+            <a:r>
+              <a:t>O que destacar:</a:t>
+            </a:r>
+          </a:p>
+          <a:p xmlns:a="http://schemas.openxmlformats.org/drawingml/2006/main">
+            <a:r>
+              <a:t>- Apresente primeiro o número, depois a definição e termine obrigatoriamente com a ressalva.</a:t>
+            </a:r>
+          </a:p>
+          <a:p xmlns:a="http://schemas.openxmlformats.org/drawingml/2006/main">
+            <a:r>
+              <a:t/>
+            </a:r>
+          </a:p>
+          <a:p xmlns:a="http://schemas.openxmlformats.org/drawingml/2006/main">
+            <a:r>
+              <a:t>Transição:</a:t>
+            </a:r>
+          </a:p>
+          <a:p xmlns:a="http://schemas.openxmlformats.org/drawingml/2006/main">
+            <a:r>
+              <a:t>Com esse ponto estabelecido, avance para “Limitações que precisam permanecer visíveis”.</a:t>
             </a:r>
           </a:p>
           <a:p xmlns:a="http://schemas.openxmlformats.org/drawingml/2006/main">
@@ -1502,7 +1952,57 @@
           <a:lstStyle xmlns:a="http://schemas.openxmlformats.org/drawingml/2006/main"/>
           <a:p xmlns:a="http://schemas.openxmlformats.org/drawingml/2006/main">
             <a:r>
-              <a:t>Apresente os limites sem minimizá-los: Meta não aplica segurança física; Tag sem processo não governa; Owner precisa de canal operacional.</a:t>
+              <a:t>[Roteiro recomendado]</a:t>
+            </a:r>
+          </a:p>
+          <a:p xmlns:a="http://schemas.openxmlformats.org/drawingml/2006/main">
+            <a:r>
+              <a:t>[Tempo sugerido: 01:00]</a:t>
+            </a:r>
+          </a:p>
+          <a:p xmlns:a="http://schemas.openxmlformats.org/drawingml/2006/main">
+            <a:r>
+              <a:t/>
+            </a:r>
+          </a:p>
+          <a:p xmlns:a="http://schemas.openxmlformats.org/drawingml/2006/main">
+            <a:r>
+              <a:t>Fala sugerida:</a:t>
+            </a:r>
+          </a:p>
+          <a:p xmlns:a="http://schemas.openxmlformats.org/drawingml/2006/main">
+            <a:r>
+              <a:t>Também precisamos declarar os limites da recomendação. Neste cenário, considere meta não aplica segurança física, Tag sem processo não governa e Owner precisa de canal operacional. Esses pontos não anulam a técnica; eles delimitam onde a demonstração é válida e quais condições precisam ser verificadas antes de levar o padrão para produção. Tratar limites como parte do design evita transformar uma boa prática em regra universal.</a:t>
+            </a:r>
+          </a:p>
+          <a:p xmlns:a="http://schemas.openxmlformats.org/drawingml/2006/main">
+            <a:r>
+              <a:t/>
+            </a:r>
+          </a:p>
+          <a:p xmlns:a="http://schemas.openxmlformats.org/drawingml/2006/main">
+            <a:r>
+              <a:t>O que destacar:</a:t>
+            </a:r>
+          </a:p>
+          <a:p xmlns:a="http://schemas.openxmlformats.org/drawingml/2006/main">
+            <a:r>
+              <a:t>- Leia os limites com o mesmo peso dado aos benefícios e diferencie restrição do laboratório de restrição do produto.</a:t>
+            </a:r>
+          </a:p>
+          <a:p xmlns:a="http://schemas.openxmlformats.org/drawingml/2006/main">
+            <a:r>
+              <a:t/>
+            </a:r>
+          </a:p>
+          <a:p xmlns:a="http://schemas.openxmlformats.org/drawingml/2006/main">
+            <a:r>
+              <a:t>Transição:</a:t>
+            </a:r>
+          </a:p>
+          <a:p xmlns:a="http://schemas.openxmlformats.org/drawingml/2006/main">
+            <a:r>
+              <a:t>Com esse ponto estabelecido, avance para “RADAR”.</a:t>
             </a:r>
           </a:p>
           <a:p xmlns:a="http://schemas.openxmlformats.org/drawingml/2006/main">
@@ -1617,7 +2117,57 @@
           <a:lstStyle xmlns:a="http://schemas.openxmlformats.org/drawingml/2006/main"/>
           <a:p xmlns:a="http://schemas.openxmlformats.org/drawingml/2006/main">
             <a:r>
-              <a:t>Catálogo avançado amplia experiência, mas o contrato open já é executável. Reforce que beta e preview não fazem parte da aceitação.</a:t>
+              <a:t>[Roteiro recomendado]</a:t>
+            </a:r>
+          </a:p>
+          <a:p xmlns:a="http://schemas.openxmlformats.org/drawingml/2006/main">
+            <a:r>
+              <a:t>[Tempo sugerido: 00:55]</a:t>
+            </a:r>
+          </a:p>
+          <a:p xmlns:a="http://schemas.openxmlformats.org/drawingml/2006/main">
+            <a:r>
+              <a:t/>
+            </a:r>
+          </a:p>
+          <a:p xmlns:a="http://schemas.openxmlformats.org/drawingml/2006/main">
+            <a:r>
+              <a:t>Fala sugerida:</a:t>
+            </a:r>
+          </a:p>
+          <a:p xmlns:a="http://schemas.openxmlformats.org/drawingml/2006/main">
+            <a:r>
+              <a:t>Este é o nosso Radar: Catálogo avançado amplia experiência, mas o contrato open já é executável. A intenção é mostrar a direção da ferramenta sem misturar preview com o caminho suportado da aula. Novidade observada não é recomendação de produção. Para adotar qualquer recurso futuro, confirme maturidade, adaptador, documentação e impacto sobre o projeto antes de alterar o baseline estável.</a:t>
+            </a:r>
+          </a:p>
+          <a:p xmlns:a="http://schemas.openxmlformats.org/drawingml/2006/main">
+            <a:r>
+              <a:t/>
+            </a:r>
+          </a:p>
+          <a:p xmlns:a="http://schemas.openxmlformats.org/drawingml/2006/main">
+            <a:r>
+              <a:t>O que destacar:</a:t>
+            </a:r>
+          </a:p>
+          <a:p xmlns:a="http://schemas.openxmlformats.org/drawingml/2006/main">
+            <a:r>
+              <a:t>- Reforce visualmente a regra do rodapé e não execute comandos beta ou preview como parte obrigatória da aula.</a:t>
+            </a:r>
+          </a:p>
+          <a:p xmlns:a="http://schemas.openxmlformats.org/drawingml/2006/main">
+            <a:r>
+              <a:t/>
+            </a:r>
+          </a:p>
+          <a:p xmlns:a="http://schemas.openxmlformats.org/drawingml/2006/main">
+            <a:r>
+              <a:t>Transição:</a:t>
+            </a:r>
+          </a:p>
+          <a:p xmlns:a="http://schemas.openxmlformats.org/drawingml/2006/main">
+            <a:r>
+              <a:t>Com esse ponto estabelecido, avance para “PRÓXIMO PASSO”.</a:t>
             </a:r>
           </a:p>
           <a:p xmlns:a="http://schemas.openxmlformats.org/drawingml/2006/main">
@@ -1732,7 +2282,57 @@
           <a:lstStyle xmlns:a="http://schemas.openxmlformats.org/drawingml/2006/main"/>
           <a:p xmlns:a="http://schemas.openxmlformats.org/drawingml/2006/main">
             <a:r>
-              <a:t>Owner sem alerta e tag sem seleção são apenas decoração no YAML. Use o diagrama para antecipar o problema que será comprovado no laboratório.</a:t>
+              <a:t>[Roteiro recomendado]</a:t>
+            </a:r>
+          </a:p>
+          <a:p xmlns:a="http://schemas.openxmlformats.org/drawingml/2006/main">
+            <a:r>
+              <a:t>[Tempo sugerido: 01:00]</a:t>
+            </a:r>
+          </a:p>
+          <a:p xmlns:a="http://schemas.openxmlformats.org/drawingml/2006/main">
+            <a:r>
+              <a:t/>
+            </a:r>
+          </a:p>
+          <a:p xmlns:a="http://schemas.openxmlformats.org/drawingml/2006/main">
+            <a:r>
+              <a:t>Fala sugerida:</a:t>
+            </a:r>
+          </a:p>
+          <a:p xmlns:a="http://schemas.openxmlformats.org/drawingml/2006/main">
+            <a:r>
+              <a:t>Quero começar com uma provocação: Owner sem alerta e tag sem seleção são apenas decoração no YAML. Essa pergunta orienta toda a aula. Em vez de aceitar uma afirmação porque ela parece correta, vamos procurar uma definição verificável e uma demonstração executável. Guarde essa tensão, porque voltaremos a ela quando compararmos o conceito com o resultado do laboratório.</a:t>
+            </a:r>
+          </a:p>
+          <a:p xmlns:a="http://schemas.openxmlformats.org/drawingml/2006/main">
+            <a:r>
+              <a:t/>
+            </a:r>
+          </a:p>
+          <a:p xmlns:a="http://schemas.openxmlformats.org/drawingml/2006/main">
+            <a:r>
+              <a:t>O que destacar:</a:t>
+            </a:r>
+          </a:p>
+          <a:p xmlns:a="http://schemas.openxmlformats.org/drawingml/2006/main">
+            <a:r>
+              <a:t>- Dê uma pausa depois da provocação e use o diagrama como mapa do problema, sem explicar todas as etapas ainda.</a:t>
+            </a:r>
+          </a:p>
+          <a:p xmlns:a="http://schemas.openxmlformats.org/drawingml/2006/main">
+            <a:r>
+              <a:t/>
+            </a:r>
+          </a:p>
+          <a:p xmlns:a="http://schemas.openxmlformats.org/drawingml/2006/main">
+            <a:r>
+              <a:t>Transição:</a:t>
+            </a:r>
+          </a:p>
+          <a:p xmlns:a="http://schemas.openxmlformats.org/drawingml/2006/main">
+            <a:r>
+              <a:t>Com esse ponto estabelecido, avance para “Ao final, você consegue...”.</a:t>
             </a:r>
           </a:p>
           <a:p xmlns:a="http://schemas.openxmlformats.org/drawingml/2006/main">
@@ -1847,7 +2447,57 @@
           <a:lstStyle xmlns:a="http://schemas.openxmlformats.org/drawingml/2006/main"/>
           <a:p xmlns:a="http://schemas.openxmlformats.org/drawingml/2006/main">
             <a:r>
-              <a:t>Escolha um produto Gold e declare owner, group, access e exposure. Encerre conectando a aula ao próximo checkpoint.</a:t>
+              <a:t>[Roteiro recomendado]</a:t>
+            </a:r>
+          </a:p>
+          <a:p xmlns:a="http://schemas.openxmlformats.org/drawingml/2006/main">
+            <a:r>
+              <a:t>[Tempo sugerido: 00:40]</a:t>
+            </a:r>
+          </a:p>
+          <a:p xmlns:a="http://schemas.openxmlformats.org/drawingml/2006/main">
+            <a:r>
+              <a:t/>
+            </a:r>
+          </a:p>
+          <a:p xmlns:a="http://schemas.openxmlformats.org/drawingml/2006/main">
+            <a:r>
+              <a:t>Fala sugerida:</a:t>
+            </a:r>
+          </a:p>
+          <a:p xmlns:a="http://schemas.openxmlformats.org/drawingml/2006/main">
+            <a:r>
+              <a:t>Escolha um produto Gold e declare owner, group, access e exposure. Faça essa etapa antes de seguir para o próximo episódio, porque o curso é cumulativo e o checkpoint atual se torna a base da aula seguinte. Se houver divergência, use o relatório de suporte e registre o que foi observado. O objetivo é avançar com um estado conhecido e reproduzível, não apenas assistir ao conteúdo.</a:t>
+            </a:r>
+          </a:p>
+          <a:p xmlns:a="http://schemas.openxmlformats.org/drawingml/2006/main">
+            <a:r>
+              <a:t/>
+            </a:r>
+          </a:p>
+          <a:p xmlns:a="http://schemas.openxmlformats.org/drawingml/2006/main">
+            <a:r>
+              <a:t>O que destacar:</a:t>
+            </a:r>
+          </a:p>
+          <a:p xmlns:a="http://schemas.openxmlformats.org/drawingml/2006/main">
+            <a:r>
+              <a:t>- Mostre o checkpoint e indique no repositório onde ficam o roteiro, os comandos e as referências da aula.</a:t>
+            </a:r>
+          </a:p>
+          <a:p xmlns:a="http://schemas.openxmlformats.org/drawingml/2006/main">
+            <a:r>
+              <a:t/>
+            </a:r>
+          </a:p>
+          <a:p xmlns:a="http://schemas.openxmlformats.org/drawingml/2006/main">
+            <a:r>
+              <a:t>Transição:</a:t>
+            </a:r>
+          </a:p>
+          <a:p xmlns:a="http://schemas.openxmlformats.org/drawingml/2006/main">
+            <a:r>
+              <a:t>Encerre retomando a pergunta inicial e confirme que o aluno sabe qual ação executar depois do episódio 7.</a:t>
             </a:r>
           </a:p>
           <a:p xmlns:a="http://schemas.openxmlformats.org/drawingml/2006/main">
@@ -1962,7 +2612,57 @@
           <a:lstStyle xmlns:a="http://schemas.openxmlformats.org/drawingml/2006/main"/>
           <a:p xmlns:a="http://schemas.openxmlformats.org/drawingml/2006/main">
             <a:r>
-              <a:t>Explique os três resultados observáveis da aula: Definir responsabilidade; Controlar acesso lógico; Expor dashboards e agentes.</a:t>
+              <a:t>[Roteiro recomendado]</a:t>
+            </a:r>
+          </a:p>
+          <a:p xmlns:a="http://schemas.openxmlformats.org/drawingml/2006/main">
+            <a:r>
+              <a:t>[Tempo sugerido: 01:00]</a:t>
+            </a:r>
+          </a:p>
+          <a:p xmlns:a="http://schemas.openxmlformats.org/drawingml/2006/main">
+            <a:r>
+              <a:t/>
+            </a:r>
+          </a:p>
+          <a:p xmlns:a="http://schemas.openxmlformats.org/drawingml/2006/main">
+            <a:r>
+              <a:t>Fala sugerida:</a:t>
+            </a:r>
+          </a:p>
+          <a:p xmlns:a="http://schemas.openxmlformats.org/drawingml/2006/main">
+            <a:r>
+              <a:t>Ao final desta aula, você deverá conseguir definir responsabilidade, Controlar acesso lógico e Expor dashboards e agentes. Esses resultados formam uma sequência: primeiro entendemos a regra, depois observamos sua representação no projeto e, por fim, comprovamos o comportamento no checkpoint. Se alguma dessas três partes não estiver clara, volte ao slide correspondente antes de executar a demonstração.</a:t>
+            </a:r>
+          </a:p>
+          <a:p xmlns:a="http://schemas.openxmlformats.org/drawingml/2006/main">
+            <a:r>
+              <a:t/>
+            </a:r>
+          </a:p>
+          <a:p xmlns:a="http://schemas.openxmlformats.org/drawingml/2006/main">
+            <a:r>
+              <a:t>O que destacar:</a:t>
+            </a:r>
+          </a:p>
+          <a:p xmlns:a="http://schemas.openxmlformats.org/drawingml/2006/main">
+            <a:r>
+              <a:t>- Percorra os objetivos da esquerda para a direita e apresente-os como resultados observáveis, não como uma agenda abstrata.</a:t>
+            </a:r>
+          </a:p>
+          <a:p xmlns:a="http://schemas.openxmlformats.org/drawingml/2006/main">
+            <a:r>
+              <a:t/>
+            </a:r>
+          </a:p>
+          <a:p xmlns:a="http://schemas.openxmlformats.org/drawingml/2006/main">
+            <a:r>
+              <a:t>Transição:</a:t>
+            </a:r>
+          </a:p>
+          <a:p xmlns:a="http://schemas.openxmlformats.org/drawingml/2006/main">
+            <a:r>
+              <a:t>Com esse ponto estabelecido, avance para “Todo metadado precisa produzir uma ação”.</a:t>
             </a:r>
           </a:p>
           <a:p xmlns:a="http://schemas.openxmlformats.org/drawingml/2006/main">
@@ -2077,7 +2777,57 @@
           <a:lstStyle xmlns:a="http://schemas.openxmlformats.org/drawingml/2006/main"/>
           <a:p xmlns:a="http://schemas.openxmlformats.org/drawingml/2006/main">
             <a:r>
-              <a:t>Owner roteia alerta; access bloqueia ref; exposure revela impacto. Desenvolva os pontos: owner → resposta; access → compilação; tag → seleção; exposure → impacto.</a:t>
+              <a:t>[Roteiro recomendado]</a:t>
+            </a:r>
+          </a:p>
+          <a:p xmlns:a="http://schemas.openxmlformats.org/drawingml/2006/main">
+            <a:r>
+              <a:t>[Tempo sugerido: 01:10]</a:t>
+            </a:r>
+          </a:p>
+          <a:p xmlns:a="http://schemas.openxmlformats.org/drawingml/2006/main">
+            <a:r>
+              <a:t/>
+            </a:r>
+          </a:p>
+          <a:p xmlns:a="http://schemas.openxmlformats.org/drawingml/2006/main">
+            <a:r>
+              <a:t>Fala sugerida:</a:t>
+            </a:r>
+          </a:p>
+          <a:p xmlns:a="http://schemas.openxmlformats.org/drawingml/2006/main">
+            <a:r>
+              <a:t>A mensagem principal deste slide é: Owner roteia alerta; access bloqueia ref; exposure revela impacto. Para tornar isso concreto, observe owner → resposta, access → compilação, tag → seleção e exposure → impacto. Esses pontos devem ser entendidos em conjunto; não são funcionalidades isoladas. No projeto, essa combinação transforma uma convenção informal em algo que pode ser revisado, testado ou consumido de maneira consistente.</a:t>
+            </a:r>
+          </a:p>
+          <a:p xmlns:a="http://schemas.openxmlformats.org/drawingml/2006/main">
+            <a:r>
+              <a:t/>
+            </a:r>
+          </a:p>
+          <a:p xmlns:a="http://schemas.openxmlformats.org/drawingml/2006/main">
+            <a:r>
+              <a:t>O que destacar:</a:t>
+            </a:r>
+          </a:p>
+          <a:p xmlns:a="http://schemas.openxmlformats.org/drawingml/2006/main">
+            <a:r>
+              <a:t>- Comece pelo título, leia a afirmação abaixo dele e depois desenvolva os itens sem repetir o texto palavra por palavra.</a:t>
+            </a:r>
+          </a:p>
+          <a:p xmlns:a="http://schemas.openxmlformats.org/drawingml/2006/main">
+            <a:r>
+              <a:t/>
+            </a:r>
+          </a:p>
+          <a:p xmlns:a="http://schemas.openxmlformats.org/drawingml/2006/main">
+            <a:r>
+              <a:t>Transição:</a:t>
+            </a:r>
+          </a:p>
+          <a:p xmlns:a="http://schemas.openxmlformats.org/drawingml/2006/main">
+            <a:r>
+              <a:t>Com esse ponto estabelecido, avance para “Group e access criam uma fronteira”.</a:t>
             </a:r>
           </a:p>
           <a:p xmlns:a="http://schemas.openxmlformats.org/drawingml/2006/main">
@@ -2192,7 +2942,57 @@
           <a:lstStyle xmlns:a="http://schemas.openxmlformats.org/drawingml/2006/main"/>
           <a:p xmlns:a="http://schemas.openxmlformats.org/drawingml/2006/main">
             <a:r>
-              <a:t>Modelos privados evoluem dentro do domínio; públicos viram interface. Desenvolva os pontos: private; protected; public.</a:t>
+              <a:t>[Roteiro recomendado]</a:t>
+            </a:r>
+          </a:p>
+          <a:p xmlns:a="http://schemas.openxmlformats.org/drawingml/2006/main">
+            <a:r>
+              <a:t>[Tempo sugerido: 01:10]</a:t>
+            </a:r>
+          </a:p>
+          <a:p xmlns:a="http://schemas.openxmlformats.org/drawingml/2006/main">
+            <a:r>
+              <a:t/>
+            </a:r>
+          </a:p>
+          <a:p xmlns:a="http://schemas.openxmlformats.org/drawingml/2006/main">
+            <a:r>
+              <a:t>Fala sugerida:</a:t>
+            </a:r>
+          </a:p>
+          <a:p xmlns:a="http://schemas.openxmlformats.org/drawingml/2006/main">
+            <a:r>
+              <a:t>A mensagem principal deste slide é: Modelos privados evoluem dentro do domínio; públicos viram interface. Para tornar isso concreto, observe private, protected e public. Esses pontos devem ser entendidos em conjunto; não são funcionalidades isoladas. No projeto, essa combinação transforma uma convenção informal em algo que pode ser revisado, testado ou consumido de maneira consistente.</a:t>
+            </a:r>
+          </a:p>
+          <a:p xmlns:a="http://schemas.openxmlformats.org/drawingml/2006/main">
+            <a:r>
+              <a:t/>
+            </a:r>
+          </a:p>
+          <a:p xmlns:a="http://schemas.openxmlformats.org/drawingml/2006/main">
+            <a:r>
+              <a:t>O que destacar:</a:t>
+            </a:r>
+          </a:p>
+          <a:p xmlns:a="http://schemas.openxmlformats.org/drawingml/2006/main">
+            <a:r>
+              <a:t>- Comece pelo título, leia a afirmação abaixo dele e depois desenvolva os itens sem repetir o texto palavra por palavra.</a:t>
+            </a:r>
+          </a:p>
+          <a:p xmlns:a="http://schemas.openxmlformats.org/drawingml/2006/main">
+            <a:r>
+              <a:t/>
+            </a:r>
+          </a:p>
+          <a:p xmlns:a="http://schemas.openxmlformats.org/drawingml/2006/main">
+            <a:r>
+              <a:t>Transição:</a:t>
+            </a:r>
+          </a:p>
+          <a:p xmlns:a="http://schemas.openxmlformats.org/drawingml/2006/main">
+            <a:r>
+              <a:t>Com esse ponto estabelecido, avance para “Group e access criam uma fronteira”.</a:t>
             </a:r>
           </a:p>
           <a:p xmlns:a="http://schemas.openxmlformats.org/drawingml/2006/main">
@@ -2307,7 +3107,57 @@
           <a:lstStyle xmlns:a="http://schemas.openxmlformats.org/drawingml/2006/main"/>
           <a:p xmlns:a="http://schemas.openxmlformats.org/drawingml/2006/main">
             <a:r>
-              <a:t>Use a composição para explicar visualmente: Modelos privados evoluem dentro do domínio; públicos viram interface. private protected public</a:t>
+              <a:t>[Roteiro recomendado]</a:t>
+            </a:r>
+          </a:p>
+          <a:p xmlns:a="http://schemas.openxmlformats.org/drawingml/2006/main">
+            <a:r>
+              <a:t>[Tempo sugerido: 00:55]</a:t>
+            </a:r>
+          </a:p>
+          <a:p xmlns:a="http://schemas.openxmlformats.org/drawingml/2006/main">
+            <a:r>
+              <a:t/>
+            </a:r>
+          </a:p>
+          <a:p xmlns:a="http://schemas.openxmlformats.org/drawingml/2006/main">
+            <a:r>
+              <a:t>Fala sugerida:</a:t>
+            </a:r>
+          </a:p>
+          <a:p xmlns:a="http://schemas.openxmlformats.org/drawingml/2006/main">
+            <a:r>
+              <a:t>Agora vamos ler a ideia visualmente. Modelos privados evoluem dentro do domínio; públicos viram interface. Siga a composição na ordem mostrada e conecte os elementos principais. A imagem ou o fluxo não cria uma regra nova; ele torna visível a relação que acabamos de explicar. Use a disposição dos elementos para reforçar causa, dependência ou comparação.</a:t>
+            </a:r>
+          </a:p>
+          <a:p xmlns:a="http://schemas.openxmlformats.org/drawingml/2006/main">
+            <a:r>
+              <a:t/>
+            </a:r>
+          </a:p>
+          <a:p xmlns:a="http://schemas.openxmlformats.org/drawingml/2006/main">
+            <a:r>
+              <a:t>O que destacar:</a:t>
+            </a:r>
+          </a:p>
+          <a:p xmlns:a="http://schemas.openxmlformats.org/drawingml/2006/main">
+            <a:r>
+              <a:t>- Acompanhe o fluxo ou a comparação com o cursor e preserve a ordem de leitura do slide.</a:t>
+            </a:r>
+          </a:p>
+          <a:p xmlns:a="http://schemas.openxmlformats.org/drawingml/2006/main">
+            <a:r>
+              <a:t/>
+            </a:r>
+          </a:p>
+          <a:p xmlns:a="http://schemas.openxmlformats.org/drawingml/2006/main">
+            <a:r>
+              <a:t>Transição:</a:t>
+            </a:r>
+          </a:p>
+          <a:p xmlns:a="http://schemas.openxmlformats.org/drawingml/2006/main">
+            <a:r>
+              <a:t>Com esse ponto estabelecido, avance para “Tags e meta carregam política”.</a:t>
             </a:r>
           </a:p>
           <a:p xmlns:a="http://schemas.openxmlformats.org/drawingml/2006/main">
@@ -2422,7 +3272,57 @@
           <a:lstStyle xmlns:a="http://schemas.openxmlformats.org/drawingml/2006/main"/>
           <a:p xmlns:a="http://schemas.openxmlformats.org/drawingml/2006/main">
             <a:r>
-              <a:t>Classificação só é útil quando seleção e validação a consomem. Desenvolva os pontos: pii; critical; gold; agent_readable.</a:t>
+              <a:t>[Roteiro recomendado]</a:t>
+            </a:r>
+          </a:p>
+          <a:p xmlns:a="http://schemas.openxmlformats.org/drawingml/2006/main">
+            <a:r>
+              <a:t>[Tempo sugerido: 01:10]</a:t>
+            </a:r>
+          </a:p>
+          <a:p xmlns:a="http://schemas.openxmlformats.org/drawingml/2006/main">
+            <a:r>
+              <a:t/>
+            </a:r>
+          </a:p>
+          <a:p xmlns:a="http://schemas.openxmlformats.org/drawingml/2006/main">
+            <a:r>
+              <a:t>Fala sugerida:</a:t>
+            </a:r>
+          </a:p>
+          <a:p xmlns:a="http://schemas.openxmlformats.org/drawingml/2006/main">
+            <a:r>
+              <a:t>A mensagem principal deste slide é: Classificação só é útil quando seleção e validação a consomem. Para tornar isso concreto, observe pii, critical, gold e agent_readable. Esses pontos devem ser entendidos em conjunto; não são funcionalidades isoladas. No projeto, essa combinação transforma uma convenção informal em algo que pode ser revisado, testado ou consumido de maneira consistente.</a:t>
+            </a:r>
+          </a:p>
+          <a:p xmlns:a="http://schemas.openxmlformats.org/drawingml/2006/main">
+            <a:r>
+              <a:t/>
+            </a:r>
+          </a:p>
+          <a:p xmlns:a="http://schemas.openxmlformats.org/drawingml/2006/main">
+            <a:r>
+              <a:t>O que destacar:</a:t>
+            </a:r>
+          </a:p>
+          <a:p xmlns:a="http://schemas.openxmlformats.org/drawingml/2006/main">
+            <a:r>
+              <a:t>- Comece pelo título, leia a afirmação abaixo dele e depois desenvolva os itens sem repetir o texto palavra por palavra.</a:t>
+            </a:r>
+          </a:p>
+          <a:p xmlns:a="http://schemas.openxmlformats.org/drawingml/2006/main">
+            <a:r>
+              <a:t/>
+            </a:r>
+          </a:p>
+          <a:p xmlns:a="http://schemas.openxmlformats.org/drawingml/2006/main">
+            <a:r>
+              <a:t>Transição:</a:t>
+            </a:r>
+          </a:p>
+          <a:p xmlns:a="http://schemas.openxmlformats.org/drawingml/2006/main">
+            <a:r>
+              <a:t>Com esse ponto estabelecido, avance para “Tags e meta carregam política”.</a:t>
             </a:r>
           </a:p>
           <a:p xmlns:a="http://schemas.openxmlformats.org/drawingml/2006/main">
@@ -2537,7 +3437,57 @@
           <a:lstStyle xmlns:a="http://schemas.openxmlformats.org/drawingml/2006/main"/>
           <a:p xmlns:a="http://schemas.openxmlformats.org/drawingml/2006/main">
             <a:r>
-              <a:t>Use a composição para explicar visualmente: Classificação só é útil quando seleção e validação a consomem. pii critical gold agent_readable</a:t>
+              <a:t>[Roteiro recomendado]</a:t>
+            </a:r>
+          </a:p>
+          <a:p xmlns:a="http://schemas.openxmlformats.org/drawingml/2006/main">
+            <a:r>
+              <a:t>[Tempo sugerido: 00:55]</a:t>
+            </a:r>
+          </a:p>
+          <a:p xmlns:a="http://schemas.openxmlformats.org/drawingml/2006/main">
+            <a:r>
+              <a:t/>
+            </a:r>
+          </a:p>
+          <a:p xmlns:a="http://schemas.openxmlformats.org/drawingml/2006/main">
+            <a:r>
+              <a:t>Fala sugerida:</a:t>
+            </a:r>
+          </a:p>
+          <a:p xmlns:a="http://schemas.openxmlformats.org/drawingml/2006/main">
+            <a:r>
+              <a:t>Agora vamos ler a ideia visualmente. Classificação só é útil quando seleção e validação a consomem. Siga a composição na ordem mostrada e conecte classificar, Selecionar e Validar. A imagem ou o fluxo não cria uma regra nova; ele torna visível a relação que acabamos de explicar. Use a disposição dos elementos para reforçar causa, dependência ou comparação.</a:t>
+            </a:r>
+          </a:p>
+          <a:p xmlns:a="http://schemas.openxmlformats.org/drawingml/2006/main">
+            <a:r>
+              <a:t/>
+            </a:r>
+          </a:p>
+          <a:p xmlns:a="http://schemas.openxmlformats.org/drawingml/2006/main">
+            <a:r>
+              <a:t>O que destacar:</a:t>
+            </a:r>
+          </a:p>
+          <a:p xmlns:a="http://schemas.openxmlformats.org/drawingml/2006/main">
+            <a:r>
+              <a:t>- Acompanhe o fluxo ou a comparação com o cursor e preserve a ordem de leitura do slide.</a:t>
+            </a:r>
+          </a:p>
+          <a:p xmlns:a="http://schemas.openxmlformats.org/drawingml/2006/main">
+            <a:r>
+              <a:t/>
+            </a:r>
+          </a:p>
+          <a:p xmlns:a="http://schemas.openxmlformats.org/drawingml/2006/main">
+            <a:r>
+              <a:t>Transição:</a:t>
+            </a:r>
+          </a:p>
+          <a:p xmlns:a="http://schemas.openxmlformats.org/drawingml/2006/main">
+            <a:r>
+              <a:t>Com esse ponto estabelecido, avance para “Exposure coloca o consumidor no grafo”.</a:t>
             </a:r>
           </a:p>
           <a:p xmlns:a="http://schemas.openxmlformats.org/drawingml/2006/main">
@@ -2652,7 +3602,57 @@
           <a:lstStyle xmlns:a="http://schemas.openxmlformats.org/drawingml/2006/main"/>
           <a:p xmlns:a="http://schemas.openxmlformats.org/drawingml/2006/main">
             <a:r>
-              <a:t>Dashboard e agente deixam de ser dependências invisíveis. Desenvolva os pontos: Owner; Maturidade; URL descritiva; Modelos dependentes.</a:t>
+              <a:t>[Roteiro recomendado]</a:t>
+            </a:r>
+          </a:p>
+          <a:p xmlns:a="http://schemas.openxmlformats.org/drawingml/2006/main">
+            <a:r>
+              <a:t>[Tempo sugerido: 01:10]</a:t>
+            </a:r>
+          </a:p>
+          <a:p xmlns:a="http://schemas.openxmlformats.org/drawingml/2006/main">
+            <a:r>
+              <a:t/>
+            </a:r>
+          </a:p>
+          <a:p xmlns:a="http://schemas.openxmlformats.org/drawingml/2006/main">
+            <a:r>
+              <a:t>Fala sugerida:</a:t>
+            </a:r>
+          </a:p>
+          <a:p xmlns:a="http://schemas.openxmlformats.org/drawingml/2006/main">
+            <a:r>
+              <a:t>A mensagem principal deste slide é: Dashboard e agente deixam de ser dependências invisíveis. Para tornar isso concreto, observe owner, Maturidade, URL descritiva e Modelos dependentes. Esses pontos devem ser entendidos em conjunto; não são funcionalidades isoladas. No projeto, essa combinação transforma uma convenção informal em algo que pode ser revisado, testado ou consumido de maneira consistente.</a:t>
+            </a:r>
+          </a:p>
+          <a:p xmlns:a="http://schemas.openxmlformats.org/drawingml/2006/main">
+            <a:r>
+              <a:t/>
+            </a:r>
+          </a:p>
+          <a:p xmlns:a="http://schemas.openxmlformats.org/drawingml/2006/main">
+            <a:r>
+              <a:t>O que destacar:</a:t>
+            </a:r>
+          </a:p>
+          <a:p xmlns:a="http://schemas.openxmlformats.org/drawingml/2006/main">
+            <a:r>
+              <a:t>- Comece pelo título, leia a afirmação abaixo dele e depois desenvolva os itens sem repetir o texto palavra por palavra.</a:t>
+            </a:r>
+          </a:p>
+          <a:p xmlns:a="http://schemas.openxmlformats.org/drawingml/2006/main">
+            <a:r>
+              <a:t/>
+            </a:r>
+          </a:p>
+          <a:p xmlns:a="http://schemas.openxmlformats.org/drawingml/2006/main">
+            <a:r>
+              <a:t>Transição:</a:t>
+            </a:r>
+          </a:p>
+          <a:p xmlns:a="http://schemas.openxmlformats.org/drawingml/2006/main">
+            <a:r>
+              <a:t>Com esse ponto estabelecido, avance para “Exposure coloca o consumidor no grafo”.</a:t>
             </a:r>
           </a:p>
           <a:p xmlns:a="http://schemas.openxmlformats.org/drawingml/2006/main">
@@ -2799,7 +3799,7 @@
   </p:cSld>
   <p:clrMap bg1="lt1" tx1="dk1" bg2="lt2" tx2="dk2" accent1="accent1" accent2="accent2" accent3="accent3" accent4="accent4" accent5="accent5" accent6="accent6" hlink="hlink" folHlink="folHlink"/>
   <p:sldLayoutIdLst>
-    <p:sldLayoutId xmlns:r="http://schemas.openxmlformats.org/officeDocument/2006/relationships" id="2147483649" r:id="R016d95c636544376"/>
+    <p:sldLayoutId xmlns:r="http://schemas.openxmlformats.org/officeDocument/2006/relationships" id="2147483649" r:id="R63acb38ddfa04e93"/>
   </p:sldLayoutIdLst>
   <p:txStyles>
     <p:titleStyle>
@@ -3097,8 +4097,8 @@
   </p:cSld>
   <p:clrMap bg1="lt1" tx1="dk1" bg2="lt2" tx2="dk2" accent1="accent1" accent2="accent2" accent3="accent3" accent4="accent4" accent5="accent5" accent6="accent6" hlink="hlink" folHlink="folHlink"/>
   <p:sldLayoutIdLst>
-    <p:sldLayoutId xmlns:r="http://schemas.openxmlformats.org/officeDocument/2006/relationships" id="2147483651" r:id="R1f6a9339046a45a5"/>
-    <p:sldLayoutId xmlns:r="http://schemas.openxmlformats.org/officeDocument/2006/relationships" id="2147483652" r:id="R4d35be2af3d74f8c"/>
+    <p:sldLayoutId xmlns:r="http://schemas.openxmlformats.org/officeDocument/2006/relationships" id="2147483651" r:id="R8f1f11c5a80b4925"/>
+    <p:sldLayoutId xmlns:r="http://schemas.openxmlformats.org/officeDocument/2006/relationships" id="2147483652" r:id="Rad72c22fddab46a6"/>
   </p:sldLayoutIdLst>
 </p:sldMaster>
 </file>
@@ -3622,14 +4622,14 @@
       </p:grpSpPr>
       <p:pic>
         <p:nvPicPr>
-          <p:cNvPr id="9" name="" descr="Ilustração conceitual autoral da capa: EPISÓDIO 7 — Governança como código."/>
+          <p:cNvPr id="10" name="" descr="Ilustração conceitual autoral da capa: EPISÓDIO 7 — Governança como código."/>
           <p:cNvPicPr>
             <a:picLocks xmlns:a="http://schemas.openxmlformats.org/drawingml/2006/main" noChangeAspect="1"/>
           </p:cNvPicPr>
           <p:nvPr/>
         </p:nvPicPr>
         <p:blipFill>
-          <a:blip xmlns:r="http://schemas.openxmlformats.org/officeDocument/2006/relationships" xmlns:a="http://schemas.openxmlformats.org/drawingml/2006/main" r:embed="R7b42d9b920e44d78"/>
+          <a:blip xmlns:r="http://schemas.openxmlformats.org/officeDocument/2006/relationships" xmlns:a="http://schemas.openxmlformats.org/drawingml/2006/main" r:embed="Rbaa0ed888c804ace"/>
           <a:srcRect xmlns:a="http://schemas.openxmlformats.org/drawingml/2006/main" l="19785" t="0" r="19785" b="0"/>
           <a:stretch xmlns:a="http://schemas.openxmlformats.org/drawingml/2006/main">
             <a:fillRect l="0" t="0" r="0" b="0"/>
@@ -3742,6 +4742,7 @@
           <a:lstStyle xmlns:a="http://schemas.openxmlformats.org/drawingml/2006/main"/>
           <a:p xmlns:a="http://schemas.openxmlformats.org/drawingml/2006/main">
             <a:pPr>
+              <a:buNone/>
               <a:defRPr sz="1350" b="1">
                 <a:solidFill>
                   <a:srgbClr val="1EC5FF"/>
@@ -3792,6 +4793,7 @@
           <a:lstStyle xmlns:a="http://schemas.openxmlformats.org/drawingml/2006/main"/>
           <a:p xmlns:a="http://schemas.openxmlformats.org/drawingml/2006/main">
             <a:pPr>
+              <a:buNone/>
               <a:defRPr sz="3225" b="1">
                 <a:solidFill>
                   <a:srgbClr val="FFFFFF"/>
@@ -3842,6 +4844,7 @@
           <a:lstStyle xmlns:a="http://schemas.openxmlformats.org/drawingml/2006/main"/>
           <a:p xmlns:a="http://schemas.openxmlformats.org/drawingml/2006/main">
             <a:pPr>
+              <a:buNone/>
               <a:defRPr sz="1800">
                 <a:solidFill>
                   <a:srgbClr val="E2F2FF"/>
@@ -3923,6 +4926,7 @@
           <a:lstStyle xmlns:a="http://schemas.openxmlformats.org/drawingml/2006/main"/>
           <a:p xmlns:a="http://schemas.openxmlformats.org/drawingml/2006/main">
             <a:pPr>
+              <a:buNone/>
               <a:defRPr sz="1200" b="1">
                 <a:solidFill>
                   <a:srgbClr val="FFFFFF">
@@ -4014,6 +5018,7 @@
           <a:lstStyle xmlns:a="http://schemas.openxmlformats.org/drawingml/2006/main"/>
           <a:p xmlns:a="http://schemas.openxmlformats.org/drawingml/2006/main">
             <a:pPr>
+              <a:buNone/>
               <a:defRPr sz="2925" b="1">
                 <a:solidFill>
                   <a:srgbClr val="FFFFFF"/>
@@ -4064,6 +5069,7 @@
           <a:lstStyle xmlns:a="http://schemas.openxmlformats.org/drawingml/2006/main"/>
           <a:p xmlns:a="http://schemas.openxmlformats.org/drawingml/2006/main">
             <a:pPr>
+              <a:buNone/>
               <a:defRPr sz="1950" b="1">
                 <a:solidFill>
                   <a:srgbClr val="FFFFFF"/>
@@ -4120,14 +5126,14 @@
       </p:sp>
       <p:pic>
         <p:nvPicPr>
-          <p:cNvPr id="13" name="" descr="Figura oficial da documentação dbt usada para explicar: Exposure coloca o consumidor no grafo — Dashboard e agente deixam de ser dependências invisíveis.."/>
+          <p:cNvPr id="15" name="" descr="Figura oficial da documentação dbt usada para explicar: Exposure coloca o consumidor no grafo — Dashboard e agente deixam de ser dependências invisíveis.."/>
           <p:cNvPicPr>
             <a:picLocks xmlns:a="http://schemas.openxmlformats.org/drawingml/2006/main" noChangeAspect="1"/>
           </p:cNvPicPr>
           <p:nvPr/>
         </p:nvPicPr>
         <p:blipFill>
-          <a:blip xmlns:r="http://schemas.openxmlformats.org/officeDocument/2006/relationships" xmlns:a="http://schemas.openxmlformats.org/drawingml/2006/main" r:embed="R07f0696bb88c43fa"/>
+          <a:blip xmlns:r="http://schemas.openxmlformats.org/officeDocument/2006/relationships" xmlns:a="http://schemas.openxmlformats.org/drawingml/2006/main" r:embed="R0acee4bd685442b8"/>
           <a:stretch xmlns:a="http://schemas.openxmlformats.org/drawingml/2006/main"/>
         </p:blipFill>
         <p:spPr>
@@ -4173,6 +5179,7 @@
           <a:lstStyle xmlns:a="http://schemas.openxmlformats.org/drawingml/2006/main"/>
           <a:p xmlns:a="http://schemas.openxmlformats.org/drawingml/2006/main">
             <a:pPr>
+              <a:buNone/>
               <a:defRPr sz="900" i="1">
                 <a:solidFill>
                   <a:srgbClr val="5C6F86"/>
@@ -4223,6 +5230,7 @@
           <a:lstStyle xmlns:a="http://schemas.openxmlformats.org/drawingml/2006/main"/>
           <a:p xmlns:a="http://schemas.openxmlformats.org/drawingml/2006/main">
             <a:pPr>
+              <a:buNone/>
               <a:defRPr sz="1050" b="1">
                 <a:solidFill>
                   <a:srgbClr val="1EC5FF"/>
@@ -4306,6 +5314,7 @@
           <a:lstStyle xmlns:a="http://schemas.openxmlformats.org/drawingml/2006/main"/>
           <a:p xmlns:a="http://schemas.openxmlformats.org/drawingml/2006/main">
             <a:pPr>
+              <a:buNone/>
               <a:defRPr sz="825">
                 <a:solidFill>
                   <a:srgbClr val="FFFFFF">
@@ -4360,6 +5369,7 @@
           <a:lstStyle xmlns:a="http://schemas.openxmlformats.org/drawingml/2006/main"/>
           <a:p xmlns:a="http://schemas.openxmlformats.org/drawingml/2006/main">
             <a:pPr algn="r">
+              <a:buNone/>
               <a:defRPr sz="825" b="1">
                 <a:solidFill>
                   <a:srgbClr val="FFFFFF">
@@ -4451,6 +5461,7 @@
           <a:lstStyle xmlns:a="http://schemas.openxmlformats.org/drawingml/2006/main"/>
           <a:p xmlns:a="http://schemas.openxmlformats.org/drawingml/2006/main">
             <a:pPr>
+              <a:buNone/>
               <a:defRPr sz="2925" b="1">
                 <a:solidFill>
                   <a:srgbClr val="FFFFFF"/>
@@ -4501,6 +5512,7 @@
           <a:lstStyle xmlns:a="http://schemas.openxmlformats.org/drawingml/2006/main"/>
           <a:p xmlns:a="http://schemas.openxmlformats.org/drawingml/2006/main">
             <a:pPr>
+              <a:buNone/>
               <a:defRPr sz="1650">
                 <a:solidFill>
                   <a:srgbClr val="E2F2FF"/>
@@ -4551,6 +5563,7 @@
           <a:lstStyle xmlns:a="http://schemas.openxmlformats.org/drawingml/2006/main"/>
           <a:p xmlns:a="http://schemas.openxmlformats.org/drawingml/2006/main">
             <a:pPr>
+              <a:buNone/>
               <a:defRPr sz="1800">
                 <a:solidFill>
                   <a:srgbClr val="FFFFFF"/>
@@ -4568,6 +5581,7 @@
           </a:p>
           <a:p xmlns:a="http://schemas.openxmlformats.org/drawingml/2006/main">
             <a:pPr>
+              <a:buNone/>
               <a:defRPr sz="1800">
                 <a:solidFill>
                   <a:srgbClr val="FFFFFF"/>
@@ -4585,6 +5599,7 @@
           </a:p>
           <a:p xmlns:a="http://schemas.openxmlformats.org/drawingml/2006/main">
             <a:pPr>
+              <a:buNone/>
               <a:defRPr sz="1800">
                 <a:solidFill>
                   <a:srgbClr val="FFFFFF"/>
@@ -4709,6 +5724,7 @@
           <a:lstStyle xmlns:a="http://schemas.openxmlformats.org/drawingml/2006/main"/>
           <a:p xmlns:a="http://schemas.openxmlformats.org/drawingml/2006/main">
             <a:pPr algn="ctr">
+              <a:buNone/>
               <a:defRPr sz="4650" b="1">
                 <a:solidFill>
                   <a:srgbClr val="1EC5FF"/>
@@ -4759,6 +5775,7 @@
           <a:lstStyle xmlns:a="http://schemas.openxmlformats.org/drawingml/2006/main"/>
           <a:p xmlns:a="http://schemas.openxmlformats.org/drawingml/2006/main">
             <a:pPr>
+              <a:buNone/>
               <a:defRPr sz="1050" b="1">
                 <a:solidFill>
                   <a:srgbClr val="1EC5FF"/>
@@ -4842,6 +5859,7 @@
           <a:lstStyle xmlns:a="http://schemas.openxmlformats.org/drawingml/2006/main"/>
           <a:p xmlns:a="http://schemas.openxmlformats.org/drawingml/2006/main">
             <a:pPr>
+              <a:buNone/>
               <a:defRPr sz="825">
                 <a:solidFill>
                   <a:srgbClr val="FFFFFF">
@@ -4896,6 +5914,7 @@
           <a:lstStyle xmlns:a="http://schemas.openxmlformats.org/drawingml/2006/main"/>
           <a:p xmlns:a="http://schemas.openxmlformats.org/drawingml/2006/main">
             <a:pPr algn="r">
+              <a:buNone/>
               <a:defRPr sz="825" b="1">
                 <a:solidFill>
                   <a:srgbClr val="FFFFFF">
@@ -4979,6 +5998,7 @@
           <a:lstStyle xmlns:a="http://schemas.openxmlformats.org/drawingml/2006/main"/>
           <a:p xmlns:a="http://schemas.openxmlformats.org/drawingml/2006/main">
             <a:pPr>
+              <a:buNone/>
               <a:defRPr sz="2925" b="1">
                 <a:solidFill>
                   <a:srgbClr val="0B1F3A"/>
@@ -5035,6 +6055,7 @@
           <a:lstStyle xmlns:a="http://schemas.openxmlformats.org/drawingml/2006/main"/>
           <a:p xmlns:a="http://schemas.openxmlformats.org/drawingml/2006/main">
             <a:pPr algn="ctr">
+              <a:buNone/>
               <a:defRPr sz="1575" b="1">
                 <a:solidFill>
                   <a:srgbClr val="0B1F3A"/>
@@ -5091,6 +6112,7 @@
           <a:lstStyle xmlns:a="http://schemas.openxmlformats.org/drawingml/2006/main"/>
           <a:p xmlns:a="http://schemas.openxmlformats.org/drawingml/2006/main">
             <a:pPr algn="ctr">
+              <a:buNone/>
               <a:defRPr sz="1575" b="1">
                 <a:solidFill>
                   <a:srgbClr val="0B1F3A"/>
@@ -5147,6 +6169,7 @@
           <a:lstStyle xmlns:a="http://schemas.openxmlformats.org/drawingml/2006/main"/>
           <a:p xmlns:a="http://schemas.openxmlformats.org/drawingml/2006/main">
             <a:pPr algn="ctr">
+              <a:buNone/>
               <a:defRPr sz="1575" b="1">
                 <a:solidFill>
                   <a:srgbClr val="0B1F3A"/>
@@ -5203,6 +6226,7 @@
           <a:lstStyle xmlns:a="http://schemas.openxmlformats.org/drawingml/2006/main"/>
           <a:p xmlns:a="http://schemas.openxmlformats.org/drawingml/2006/main">
             <a:pPr algn="ctr">
+              <a:buNone/>
               <a:defRPr sz="1575" b="1">
                 <a:solidFill>
                   <a:srgbClr val="0B1F3A"/>
@@ -5222,7 +6246,7 @@
       </p:sp>
       <p:cxnSp>
         <p:nvCxnSpPr>
-          <p:cNvPr id="18" name=""/>
+          <p:cNvPr id="26" name=""/>
           <p:cNvCxnSpPr>
             <a:stCxn xmlns:a="http://schemas.openxmlformats.org/drawingml/2006/main" id="2" idx="3"/>
             <a:endCxn xmlns:a="http://schemas.openxmlformats.org/drawingml/2006/main" id="3" idx="1"/>
@@ -5248,7 +6272,7 @@
       </p:cxnSp>
       <p:cxnSp>
         <p:nvCxnSpPr>
-          <p:cNvPr id="19" name=""/>
+          <p:cNvPr id="27" name=""/>
           <p:cNvCxnSpPr>
             <a:stCxn xmlns:a="http://schemas.openxmlformats.org/drawingml/2006/main" id="3" idx="3"/>
             <a:endCxn xmlns:a="http://schemas.openxmlformats.org/drawingml/2006/main" id="4" idx="1"/>
@@ -5274,7 +6298,7 @@
       </p:cxnSp>
       <p:cxnSp>
         <p:nvCxnSpPr>
-          <p:cNvPr id="20" name=""/>
+          <p:cNvPr id="28" name=""/>
           <p:cNvCxnSpPr>
             <a:stCxn xmlns:a="http://schemas.openxmlformats.org/drawingml/2006/main" id="4" idx="3"/>
             <a:endCxn xmlns:a="http://schemas.openxmlformats.org/drawingml/2006/main" id="5" idx="1"/>
@@ -5331,6 +6355,7 @@
           <a:lstStyle xmlns:a="http://schemas.openxmlformats.org/drawingml/2006/main"/>
           <a:p xmlns:a="http://schemas.openxmlformats.org/drawingml/2006/main">
             <a:pPr>
+              <a:buNone/>
               <a:defRPr sz="1050" b="1">
                 <a:solidFill>
                   <a:srgbClr val="1565C0"/>
@@ -5414,6 +6439,7 @@
           <a:lstStyle xmlns:a="http://schemas.openxmlformats.org/drawingml/2006/main"/>
           <a:p xmlns:a="http://schemas.openxmlformats.org/drawingml/2006/main">
             <a:pPr>
+              <a:buNone/>
               <a:defRPr sz="825">
                 <a:solidFill>
                   <a:srgbClr val="0B1F3A">
@@ -5468,6 +6494,7 @@
           <a:lstStyle xmlns:a="http://schemas.openxmlformats.org/drawingml/2006/main"/>
           <a:p xmlns:a="http://schemas.openxmlformats.org/drawingml/2006/main">
             <a:pPr algn="r">
+              <a:buNone/>
               <a:defRPr sz="825" b="1">
                 <a:solidFill>
                   <a:srgbClr val="0B1F3A">
@@ -5559,6 +6586,7 @@
           <a:lstStyle xmlns:a="http://schemas.openxmlformats.org/drawingml/2006/main"/>
           <a:p xmlns:a="http://schemas.openxmlformats.org/drawingml/2006/main">
             <a:pPr>
+              <a:buNone/>
               <a:defRPr sz="2925" b="1">
                 <a:solidFill>
                   <a:srgbClr val="FFFFFF"/>
@@ -5644,6 +6672,7 @@
           <a:lstStyle xmlns:a="http://schemas.openxmlformats.org/drawingml/2006/main"/>
           <a:p xmlns:a="http://schemas.openxmlformats.org/drawingml/2006/main">
             <a:pPr>
+              <a:buNone/>
               <a:defRPr sz="1875" b="1">
                 <a:solidFill>
                   <a:srgbClr val="1EC5FF"/>
@@ -5694,6 +6723,7 @@
           <a:lstStyle xmlns:a="http://schemas.openxmlformats.org/drawingml/2006/main"/>
           <a:p xmlns:a="http://schemas.openxmlformats.org/drawingml/2006/main">
             <a:pPr>
+              <a:buNone/>
               <a:defRPr sz="1425">
                 <a:solidFill>
                   <a:srgbClr val="E2F2FF"/>
@@ -5744,6 +6774,7 @@
           <a:lstStyle xmlns:a="http://schemas.openxmlformats.org/drawingml/2006/main"/>
           <a:p xmlns:a="http://schemas.openxmlformats.org/drawingml/2006/main">
             <a:pPr>
+              <a:buNone/>
               <a:defRPr sz="1050" b="1">
                 <a:solidFill>
                   <a:srgbClr val="1EC5FF"/>
@@ -5827,6 +6858,7 @@
           <a:lstStyle xmlns:a="http://schemas.openxmlformats.org/drawingml/2006/main"/>
           <a:p xmlns:a="http://schemas.openxmlformats.org/drawingml/2006/main">
             <a:pPr>
+              <a:buNone/>
               <a:defRPr sz="825">
                 <a:solidFill>
                   <a:srgbClr val="FFFFFF">
@@ -5881,6 +6913,7 @@
           <a:lstStyle xmlns:a="http://schemas.openxmlformats.org/drawingml/2006/main"/>
           <a:p xmlns:a="http://schemas.openxmlformats.org/drawingml/2006/main">
             <a:pPr algn="r">
+              <a:buNone/>
               <a:defRPr sz="825" b="1">
                 <a:solidFill>
                   <a:srgbClr val="FFFFFF">
@@ -5964,6 +6997,7 @@
           <a:lstStyle xmlns:a="http://schemas.openxmlformats.org/drawingml/2006/main"/>
           <a:p xmlns:a="http://schemas.openxmlformats.org/drawingml/2006/main">
             <a:pPr>
+              <a:buNone/>
               <a:defRPr sz="2925" b="1">
                 <a:solidFill>
                   <a:srgbClr val="0B1F3A"/>
@@ -6014,6 +7048,7 @@
           <a:lstStyle xmlns:a="http://schemas.openxmlformats.org/drawingml/2006/main"/>
           <a:p xmlns:a="http://schemas.openxmlformats.org/drawingml/2006/main">
             <a:pPr>
+              <a:buNone/>
               <a:defRPr sz="3450" b="1">
                 <a:solidFill>
                   <a:srgbClr val="1565C0"/>
@@ -6064,6 +7099,7 @@
           <a:lstStyle xmlns:a="http://schemas.openxmlformats.org/drawingml/2006/main"/>
           <a:p xmlns:a="http://schemas.openxmlformats.org/drawingml/2006/main">
             <a:pPr>
+              <a:buNone/>
               <a:defRPr sz="1575" b="1">
                 <a:solidFill>
                   <a:srgbClr val="0B1F3A"/>
@@ -6145,6 +7181,7 @@
           <a:lstStyle xmlns:a="http://schemas.openxmlformats.org/drawingml/2006/main"/>
           <a:p xmlns:a="http://schemas.openxmlformats.org/drawingml/2006/main">
             <a:pPr>
+              <a:buNone/>
               <a:defRPr sz="3450" b="1">
                 <a:solidFill>
                   <a:srgbClr val="1565C0"/>
@@ -6195,6 +7232,7 @@
           <a:lstStyle xmlns:a="http://schemas.openxmlformats.org/drawingml/2006/main"/>
           <a:p xmlns:a="http://schemas.openxmlformats.org/drawingml/2006/main">
             <a:pPr>
+              <a:buNone/>
               <a:defRPr sz="1575" b="1">
                 <a:solidFill>
                   <a:srgbClr val="0B1F3A"/>
@@ -6276,6 +7314,7 @@
           <a:lstStyle xmlns:a="http://schemas.openxmlformats.org/drawingml/2006/main"/>
           <a:p xmlns:a="http://schemas.openxmlformats.org/drawingml/2006/main">
             <a:pPr>
+              <a:buNone/>
               <a:defRPr sz="3450" b="1">
                 <a:solidFill>
                   <a:srgbClr val="1565C0"/>
@@ -6326,6 +7365,7 @@
           <a:lstStyle xmlns:a="http://schemas.openxmlformats.org/drawingml/2006/main"/>
           <a:p xmlns:a="http://schemas.openxmlformats.org/drawingml/2006/main">
             <a:pPr>
+              <a:buNone/>
               <a:defRPr sz="1575" b="1">
                 <a:solidFill>
                   <a:srgbClr val="0B1F3A"/>
@@ -6376,6 +7416,7 @@
           <a:lstStyle xmlns:a="http://schemas.openxmlformats.org/drawingml/2006/main"/>
           <a:p xmlns:a="http://schemas.openxmlformats.org/drawingml/2006/main">
             <a:pPr>
+              <a:buNone/>
               <a:defRPr sz="1050" b="1">
                 <a:solidFill>
                   <a:srgbClr val="1565C0"/>
@@ -6459,6 +7500,7 @@
           <a:lstStyle xmlns:a="http://schemas.openxmlformats.org/drawingml/2006/main"/>
           <a:p xmlns:a="http://schemas.openxmlformats.org/drawingml/2006/main">
             <a:pPr>
+              <a:buNone/>
               <a:defRPr sz="825">
                 <a:solidFill>
                   <a:srgbClr val="0B1F3A">
@@ -6513,6 +7555,7 @@
           <a:lstStyle xmlns:a="http://schemas.openxmlformats.org/drawingml/2006/main"/>
           <a:p xmlns:a="http://schemas.openxmlformats.org/drawingml/2006/main">
             <a:pPr algn="r">
+              <a:buNone/>
               <a:defRPr sz="825" b="1">
                 <a:solidFill>
                   <a:srgbClr val="0B1F3A">
@@ -6604,6 +7647,7 @@
           <a:lstStyle xmlns:a="http://schemas.openxmlformats.org/drawingml/2006/main"/>
           <a:p xmlns:a="http://schemas.openxmlformats.org/drawingml/2006/main">
             <a:pPr>
+              <a:buNone/>
               <a:defRPr sz="1350" b="1">
                 <a:solidFill>
                   <a:srgbClr val="1EC5FF"/>
@@ -6654,6 +7698,7 @@
           <a:lstStyle xmlns:a="http://schemas.openxmlformats.org/drawingml/2006/main"/>
           <a:p xmlns:a="http://schemas.openxmlformats.org/drawingml/2006/main">
             <a:pPr>
+              <a:buNone/>
               <a:defRPr sz="3450" b="1">
                 <a:solidFill>
                   <a:srgbClr val="FFFFFF"/>
@@ -6704,6 +7749,7 @@
           <a:lstStyle xmlns:a="http://schemas.openxmlformats.org/drawingml/2006/main"/>
           <a:p xmlns:a="http://schemas.openxmlformats.org/drawingml/2006/main">
             <a:pPr>
+              <a:buNone/>
               <a:defRPr sz="1650">
                 <a:solidFill>
                   <a:srgbClr val="E2F2FF"/>
@@ -6828,6 +7874,7 @@
           <a:lstStyle xmlns:a="http://schemas.openxmlformats.org/drawingml/2006/main"/>
           <a:p xmlns:a="http://schemas.openxmlformats.org/drawingml/2006/main">
             <a:pPr>
+              <a:buNone/>
               <a:defRPr sz="1050" b="1">
                 <a:solidFill>
                   <a:srgbClr val="1EC5FF"/>
@@ -6911,6 +7958,7 @@
           <a:lstStyle xmlns:a="http://schemas.openxmlformats.org/drawingml/2006/main"/>
           <a:p xmlns:a="http://schemas.openxmlformats.org/drawingml/2006/main">
             <a:pPr>
+              <a:buNone/>
               <a:defRPr sz="825">
                 <a:solidFill>
                   <a:srgbClr val="FFFFFF">
@@ -6965,6 +8013,7 @@
           <a:lstStyle xmlns:a="http://schemas.openxmlformats.org/drawingml/2006/main"/>
           <a:p xmlns:a="http://schemas.openxmlformats.org/drawingml/2006/main">
             <a:pPr algn="r">
+              <a:buNone/>
               <a:defRPr sz="825" b="1">
                 <a:solidFill>
                   <a:srgbClr val="FFFFFF">
@@ -7048,6 +8097,7 @@
           <a:lstStyle xmlns:a="http://schemas.openxmlformats.org/drawingml/2006/main"/>
           <a:p xmlns:a="http://schemas.openxmlformats.org/drawingml/2006/main">
             <a:pPr>
+              <a:buNone/>
               <a:defRPr sz="2925" b="1">
                 <a:solidFill>
                   <a:srgbClr val="0B1F3A"/>
@@ -7098,6 +8148,7 @@
           <a:lstStyle xmlns:a="http://schemas.openxmlformats.org/drawingml/2006/main"/>
           <a:p xmlns:a="http://schemas.openxmlformats.org/drawingml/2006/main">
             <a:pPr>
+              <a:buNone/>
               <a:defRPr sz="3450" b="1">
                 <a:solidFill>
                   <a:srgbClr val="1565C0"/>
@@ -7148,6 +8199,7 @@
           <a:lstStyle xmlns:a="http://schemas.openxmlformats.org/drawingml/2006/main"/>
           <a:p xmlns:a="http://schemas.openxmlformats.org/drawingml/2006/main">
             <a:pPr>
+              <a:buNone/>
               <a:defRPr sz="1575" b="1">
                 <a:solidFill>
                   <a:srgbClr val="0B1F3A"/>
@@ -7229,6 +8281,7 @@
           <a:lstStyle xmlns:a="http://schemas.openxmlformats.org/drawingml/2006/main"/>
           <a:p xmlns:a="http://schemas.openxmlformats.org/drawingml/2006/main">
             <a:pPr>
+              <a:buNone/>
               <a:defRPr sz="3450" b="1">
                 <a:solidFill>
                   <a:srgbClr val="1565C0"/>
@@ -7279,6 +8332,7 @@
           <a:lstStyle xmlns:a="http://schemas.openxmlformats.org/drawingml/2006/main"/>
           <a:p xmlns:a="http://schemas.openxmlformats.org/drawingml/2006/main">
             <a:pPr>
+              <a:buNone/>
               <a:defRPr sz="1575" b="1">
                 <a:solidFill>
                   <a:srgbClr val="0B1F3A"/>
@@ -7360,6 +8414,7 @@
           <a:lstStyle xmlns:a="http://schemas.openxmlformats.org/drawingml/2006/main"/>
           <a:p xmlns:a="http://schemas.openxmlformats.org/drawingml/2006/main">
             <a:pPr>
+              <a:buNone/>
               <a:defRPr sz="3450" b="1">
                 <a:solidFill>
                   <a:srgbClr val="1565C0"/>
@@ -7410,6 +8465,7 @@
           <a:lstStyle xmlns:a="http://schemas.openxmlformats.org/drawingml/2006/main"/>
           <a:p xmlns:a="http://schemas.openxmlformats.org/drawingml/2006/main">
             <a:pPr>
+              <a:buNone/>
               <a:defRPr sz="1575" b="1">
                 <a:solidFill>
                   <a:srgbClr val="0B1F3A"/>
@@ -7460,6 +8516,7 @@
           <a:lstStyle xmlns:a="http://schemas.openxmlformats.org/drawingml/2006/main"/>
           <a:p xmlns:a="http://schemas.openxmlformats.org/drawingml/2006/main">
             <a:pPr>
+              <a:buNone/>
               <a:defRPr sz="1050" b="1">
                 <a:solidFill>
                   <a:srgbClr val="1565C0"/>
@@ -7543,6 +8600,7 @@
           <a:lstStyle xmlns:a="http://schemas.openxmlformats.org/drawingml/2006/main"/>
           <a:p xmlns:a="http://schemas.openxmlformats.org/drawingml/2006/main">
             <a:pPr>
+              <a:buNone/>
               <a:defRPr sz="825">
                 <a:solidFill>
                   <a:srgbClr val="0B1F3A">
@@ -7597,6 +8655,7 @@
           <a:lstStyle xmlns:a="http://schemas.openxmlformats.org/drawingml/2006/main"/>
           <a:p xmlns:a="http://schemas.openxmlformats.org/drawingml/2006/main">
             <a:pPr algn="r">
+              <a:buNone/>
               <a:defRPr sz="825" b="1">
                 <a:solidFill>
                   <a:srgbClr val="0B1F3A">
@@ -7688,6 +8747,7 @@
           <a:lstStyle xmlns:a="http://schemas.openxmlformats.org/drawingml/2006/main"/>
           <a:p xmlns:a="http://schemas.openxmlformats.org/drawingml/2006/main">
             <a:pPr>
+              <a:buNone/>
               <a:defRPr sz="5550" b="1">
                 <a:solidFill>
                   <a:srgbClr val="1EC5FF"/>
@@ -7738,6 +8798,7 @@
           <a:lstStyle xmlns:a="http://schemas.openxmlformats.org/drawingml/2006/main"/>
           <a:p xmlns:a="http://schemas.openxmlformats.org/drawingml/2006/main">
             <a:pPr>
+              <a:buNone/>
               <a:defRPr sz="2250" b="1">
                 <a:solidFill>
                   <a:srgbClr val="FFFFFF"/>
@@ -7821,6 +8882,7 @@
           <a:lstStyle xmlns:a="http://schemas.openxmlformats.org/drawingml/2006/main"/>
           <a:p xmlns:a="http://schemas.openxmlformats.org/drawingml/2006/main">
             <a:pPr>
+              <a:buNone/>
               <a:defRPr sz="1800">
                 <a:solidFill>
                   <a:srgbClr val="E2F2FF"/>
@@ -7871,6 +8933,7 @@
           <a:lstStyle xmlns:a="http://schemas.openxmlformats.org/drawingml/2006/main"/>
           <a:p xmlns:a="http://schemas.openxmlformats.org/drawingml/2006/main">
             <a:pPr>
+              <a:buNone/>
               <a:defRPr sz="1050" b="1">
                 <a:solidFill>
                   <a:srgbClr val="1EC5FF"/>
@@ -7954,6 +9017,7 @@
           <a:lstStyle xmlns:a="http://schemas.openxmlformats.org/drawingml/2006/main"/>
           <a:p xmlns:a="http://schemas.openxmlformats.org/drawingml/2006/main">
             <a:pPr>
+              <a:buNone/>
               <a:defRPr sz="825">
                 <a:solidFill>
                   <a:srgbClr val="FFFFFF">
@@ -8008,6 +9072,7 @@
           <a:lstStyle xmlns:a="http://schemas.openxmlformats.org/drawingml/2006/main"/>
           <a:p xmlns:a="http://schemas.openxmlformats.org/drawingml/2006/main">
             <a:pPr algn="r">
+              <a:buNone/>
               <a:defRPr sz="825" b="1">
                 <a:solidFill>
                   <a:srgbClr val="FFFFFF">
@@ -8091,6 +9156,7 @@
           <a:lstStyle xmlns:a="http://schemas.openxmlformats.org/drawingml/2006/main"/>
           <a:p xmlns:a="http://schemas.openxmlformats.org/drawingml/2006/main">
             <a:pPr>
+              <a:buNone/>
               <a:defRPr sz="2925" b="1">
                 <a:solidFill>
                   <a:srgbClr val="0B1F3A"/>
@@ -8141,6 +9207,7 @@
           <a:lstStyle xmlns:a="http://schemas.openxmlformats.org/drawingml/2006/main"/>
           <a:p xmlns:a="http://schemas.openxmlformats.org/drawingml/2006/main">
             <a:pPr>
+              <a:buNone/>
               <a:defRPr sz="1950">
                 <a:solidFill>
                   <a:srgbClr val="0B1F3A"/>
@@ -8158,6 +9225,7 @@
           </a:p>
           <a:p xmlns:a="http://schemas.openxmlformats.org/drawingml/2006/main">
             <a:pPr>
+              <a:buNone/>
               <a:defRPr sz="1950">
                 <a:solidFill>
                   <a:srgbClr val="0B1F3A"/>
@@ -8175,6 +9243,7 @@
           </a:p>
           <a:p xmlns:a="http://schemas.openxmlformats.org/drawingml/2006/main">
             <a:pPr>
+              <a:buNone/>
               <a:defRPr sz="1950">
                 <a:solidFill>
                   <a:srgbClr val="0B1F3A"/>
@@ -8225,6 +9294,7 @@
           <a:lstStyle xmlns:a="http://schemas.openxmlformats.org/drawingml/2006/main"/>
           <a:p xmlns:a="http://schemas.openxmlformats.org/drawingml/2006/main">
             <a:pPr>
+              <a:buNone/>
               <a:defRPr sz="1050" b="1">
                 <a:solidFill>
                   <a:srgbClr val="1565C0"/>
@@ -8308,6 +9378,7 @@
           <a:lstStyle xmlns:a="http://schemas.openxmlformats.org/drawingml/2006/main"/>
           <a:p xmlns:a="http://schemas.openxmlformats.org/drawingml/2006/main">
             <a:pPr>
+              <a:buNone/>
               <a:defRPr sz="825">
                 <a:solidFill>
                   <a:srgbClr val="0B1F3A">
@@ -8362,6 +9433,7 @@
           <a:lstStyle xmlns:a="http://schemas.openxmlformats.org/drawingml/2006/main"/>
           <a:p xmlns:a="http://schemas.openxmlformats.org/drawingml/2006/main">
             <a:pPr algn="r">
+              <a:buNone/>
               <a:defRPr sz="825" b="1">
                 <a:solidFill>
                   <a:srgbClr val="0B1F3A">
@@ -8453,6 +9525,7 @@
           <a:lstStyle xmlns:a="http://schemas.openxmlformats.org/drawingml/2006/main"/>
           <a:p xmlns:a="http://schemas.openxmlformats.org/drawingml/2006/main">
             <a:pPr>
+              <a:buNone/>
               <a:defRPr sz="1500" b="1">
                 <a:solidFill>
                   <a:srgbClr val="1EC5FF"/>
@@ -8503,6 +9576,7 @@
           <a:lstStyle xmlns:a="http://schemas.openxmlformats.org/drawingml/2006/main"/>
           <a:p xmlns:a="http://schemas.openxmlformats.org/drawingml/2006/main">
             <a:pPr>
+              <a:buNone/>
               <a:defRPr sz="2850" b="1">
                 <a:solidFill>
                   <a:srgbClr val="FFFFFF"/>
@@ -8553,6 +9627,7 @@
           <a:lstStyle xmlns:a="http://schemas.openxmlformats.org/drawingml/2006/main"/>
           <a:p xmlns:a="http://schemas.openxmlformats.org/drawingml/2006/main">
             <a:pPr>
+              <a:buNone/>
               <a:defRPr sz="1500">
                 <a:solidFill>
                   <a:srgbClr val="E2F2FF"/>
@@ -8677,6 +9752,7 @@
           <a:lstStyle xmlns:a="http://schemas.openxmlformats.org/drawingml/2006/main"/>
           <a:p xmlns:a="http://schemas.openxmlformats.org/drawingml/2006/main">
             <a:pPr>
+              <a:buNone/>
               <a:defRPr sz="1050" b="1">
                 <a:solidFill>
                   <a:srgbClr val="1EC5FF"/>
@@ -8760,6 +9836,7 @@
           <a:lstStyle xmlns:a="http://schemas.openxmlformats.org/drawingml/2006/main"/>
           <a:p xmlns:a="http://schemas.openxmlformats.org/drawingml/2006/main">
             <a:pPr>
+              <a:buNone/>
               <a:defRPr sz="825">
                 <a:solidFill>
                   <a:srgbClr val="FFFFFF">
@@ -8814,6 +9891,7 @@
           <a:lstStyle xmlns:a="http://schemas.openxmlformats.org/drawingml/2006/main"/>
           <a:p xmlns:a="http://schemas.openxmlformats.org/drawingml/2006/main">
             <a:pPr algn="r">
+              <a:buNone/>
               <a:defRPr sz="825" b="1">
                 <a:solidFill>
                   <a:srgbClr val="FFFFFF">
@@ -8897,6 +9975,7 @@
           <a:lstStyle xmlns:a="http://schemas.openxmlformats.org/drawingml/2006/main"/>
           <a:p xmlns:a="http://schemas.openxmlformats.org/drawingml/2006/main">
             <a:pPr>
+              <a:buNone/>
               <a:defRPr sz="2850" b="1">
                 <a:solidFill>
                   <a:srgbClr val="0B1F3A"/>
@@ -8978,6 +10057,7 @@
           <a:lstStyle xmlns:a="http://schemas.openxmlformats.org/drawingml/2006/main"/>
           <a:p xmlns:a="http://schemas.openxmlformats.org/drawingml/2006/main">
             <a:pPr>
+              <a:buNone/>
               <a:defRPr sz="1425" b="1">
                 <a:solidFill>
                   <a:srgbClr val="1565C0"/>
@@ -9032,14 +10112,14 @@
       </p:sp>
       <p:pic>
         <p:nvPicPr>
-          <p:cNvPr id="14" name="" descr="Diagrama didático autoral que apresenta: Owner sem alerta e tag sem seleção são apenas decoração no YAML. — A pergunta que guia a aula."/>
+          <p:cNvPr id="16" name="" descr="Diagrama didático autoral que apresenta: Owner sem alerta e tag sem seleção são apenas decoração no YAML. — A pergunta que guia a aula."/>
           <p:cNvPicPr>
             <a:picLocks xmlns:a="http://schemas.openxmlformats.org/drawingml/2006/main" noChangeAspect="1"/>
           </p:cNvPicPr>
           <p:nvPr/>
         </p:nvPicPr>
         <p:blipFill>
-          <a:blip xmlns:r="http://schemas.openxmlformats.org/officeDocument/2006/relationships" xmlns:a="http://schemas.openxmlformats.org/drawingml/2006/main" r:embed="Rc5ae433afc134fcc"/>
+          <a:blip xmlns:r="http://schemas.openxmlformats.org/officeDocument/2006/relationships" xmlns:a="http://schemas.openxmlformats.org/drawingml/2006/main" r:embed="Ra3a4ce14934a4732"/>
           <a:stretch xmlns:a="http://schemas.openxmlformats.org/drawingml/2006/main"/>
         </p:blipFill>
         <p:spPr>
@@ -9085,6 +10165,7 @@
           <a:lstStyle xmlns:a="http://schemas.openxmlformats.org/drawingml/2006/main"/>
           <a:p xmlns:a="http://schemas.openxmlformats.org/drawingml/2006/main">
             <a:pPr>
+              <a:buNone/>
               <a:defRPr sz="1050" b="1">
                 <a:solidFill>
                   <a:srgbClr val="1565C0"/>
@@ -9168,6 +10249,7 @@
           <a:lstStyle xmlns:a="http://schemas.openxmlformats.org/drawingml/2006/main"/>
           <a:p xmlns:a="http://schemas.openxmlformats.org/drawingml/2006/main">
             <a:pPr>
+              <a:buNone/>
               <a:defRPr sz="825">
                 <a:solidFill>
                   <a:srgbClr val="0B1F3A">
@@ -9222,6 +10304,7 @@
           <a:lstStyle xmlns:a="http://schemas.openxmlformats.org/drawingml/2006/main"/>
           <a:p xmlns:a="http://schemas.openxmlformats.org/drawingml/2006/main">
             <a:pPr algn="r">
+              <a:buNone/>
               <a:defRPr sz="825" b="1">
                 <a:solidFill>
                   <a:srgbClr val="0B1F3A">
@@ -9305,6 +10388,7 @@
           <a:lstStyle xmlns:a="http://schemas.openxmlformats.org/drawingml/2006/main"/>
           <a:p xmlns:a="http://schemas.openxmlformats.org/drawingml/2006/main">
             <a:pPr>
+              <a:buNone/>
               <a:defRPr sz="1350" b="1">
                 <a:solidFill>
                   <a:srgbClr val="1565C0"/>
@@ -9355,6 +10439,7 @@
           <a:lstStyle xmlns:a="http://schemas.openxmlformats.org/drawingml/2006/main"/>
           <a:p xmlns:a="http://schemas.openxmlformats.org/drawingml/2006/main">
             <a:pPr>
+              <a:buNone/>
               <a:defRPr sz="3300" b="1">
                 <a:solidFill>
                   <a:srgbClr val="0B1F3A"/>
@@ -9405,6 +10490,7 @@
           <a:lstStyle xmlns:a="http://schemas.openxmlformats.org/drawingml/2006/main"/>
           <a:p xmlns:a="http://schemas.openxmlformats.org/drawingml/2006/main">
             <a:pPr>
+              <a:buNone/>
               <a:defRPr sz="1500">
                 <a:solidFill>
                   <a:srgbClr val="5C6F86"/>
@@ -9455,6 +10541,7 @@
           <a:lstStyle xmlns:a="http://schemas.openxmlformats.org/drawingml/2006/main"/>
           <a:p xmlns:a="http://schemas.openxmlformats.org/drawingml/2006/main">
             <a:pPr>
+              <a:buNone/>
               <a:defRPr sz="1050" b="1">
                 <a:solidFill>
                   <a:srgbClr val="1565C0"/>
@@ -9538,6 +10625,7 @@
           <a:lstStyle xmlns:a="http://schemas.openxmlformats.org/drawingml/2006/main"/>
           <a:p xmlns:a="http://schemas.openxmlformats.org/drawingml/2006/main">
             <a:pPr>
+              <a:buNone/>
               <a:defRPr sz="825">
                 <a:solidFill>
                   <a:srgbClr val="0B1F3A">
@@ -9592,6 +10680,7 @@
           <a:lstStyle xmlns:a="http://schemas.openxmlformats.org/drawingml/2006/main"/>
           <a:p xmlns:a="http://schemas.openxmlformats.org/drawingml/2006/main">
             <a:pPr algn="r">
+              <a:buNone/>
               <a:defRPr sz="825" b="1">
                 <a:solidFill>
                   <a:srgbClr val="0B1F3A">
@@ -9683,6 +10772,7 @@
           <a:lstStyle xmlns:a="http://schemas.openxmlformats.org/drawingml/2006/main"/>
           <a:p xmlns:a="http://schemas.openxmlformats.org/drawingml/2006/main">
             <a:pPr>
+              <a:buNone/>
               <a:defRPr sz="2925" b="1">
                 <a:solidFill>
                   <a:srgbClr val="FFFFFF"/>
@@ -9733,6 +10823,7 @@
           <a:lstStyle xmlns:a="http://schemas.openxmlformats.org/drawingml/2006/main"/>
           <a:p xmlns:a="http://schemas.openxmlformats.org/drawingml/2006/main">
             <a:pPr>
+              <a:buNone/>
               <a:defRPr sz="3450" b="1">
                 <a:solidFill>
                   <a:srgbClr val="1EC5FF"/>
@@ -9783,6 +10874,7 @@
           <a:lstStyle xmlns:a="http://schemas.openxmlformats.org/drawingml/2006/main"/>
           <a:p xmlns:a="http://schemas.openxmlformats.org/drawingml/2006/main">
             <a:pPr>
+              <a:buNone/>
               <a:defRPr sz="1575" b="1">
                 <a:solidFill>
                   <a:srgbClr val="FFFFFF"/>
@@ -9864,6 +10956,7 @@
           <a:lstStyle xmlns:a="http://schemas.openxmlformats.org/drawingml/2006/main"/>
           <a:p xmlns:a="http://schemas.openxmlformats.org/drawingml/2006/main">
             <a:pPr>
+              <a:buNone/>
               <a:defRPr sz="3450" b="1">
                 <a:solidFill>
                   <a:srgbClr val="1EC5FF"/>
@@ -9914,6 +11007,7 @@
           <a:lstStyle xmlns:a="http://schemas.openxmlformats.org/drawingml/2006/main"/>
           <a:p xmlns:a="http://schemas.openxmlformats.org/drawingml/2006/main">
             <a:pPr>
+              <a:buNone/>
               <a:defRPr sz="1575" b="1">
                 <a:solidFill>
                   <a:srgbClr val="FFFFFF"/>
@@ -9995,6 +11089,7 @@
           <a:lstStyle xmlns:a="http://schemas.openxmlformats.org/drawingml/2006/main"/>
           <a:p xmlns:a="http://schemas.openxmlformats.org/drawingml/2006/main">
             <a:pPr>
+              <a:buNone/>
               <a:defRPr sz="3450" b="1">
                 <a:solidFill>
                   <a:srgbClr val="1EC5FF"/>
@@ -10045,6 +11140,7 @@
           <a:lstStyle xmlns:a="http://schemas.openxmlformats.org/drawingml/2006/main"/>
           <a:p xmlns:a="http://schemas.openxmlformats.org/drawingml/2006/main">
             <a:pPr>
+              <a:buNone/>
               <a:defRPr sz="1575" b="1">
                 <a:solidFill>
                   <a:srgbClr val="FFFFFF"/>
@@ -10095,6 +11191,7 @@
           <a:lstStyle xmlns:a="http://schemas.openxmlformats.org/drawingml/2006/main"/>
           <a:p xmlns:a="http://schemas.openxmlformats.org/drawingml/2006/main">
             <a:pPr>
+              <a:buNone/>
               <a:defRPr sz="1050" b="1">
                 <a:solidFill>
                   <a:srgbClr val="1EC5FF"/>
@@ -10178,6 +11275,7 @@
           <a:lstStyle xmlns:a="http://schemas.openxmlformats.org/drawingml/2006/main"/>
           <a:p xmlns:a="http://schemas.openxmlformats.org/drawingml/2006/main">
             <a:pPr>
+              <a:buNone/>
               <a:defRPr sz="825">
                 <a:solidFill>
                   <a:srgbClr val="FFFFFF">
@@ -10232,6 +11330,7 @@
           <a:lstStyle xmlns:a="http://schemas.openxmlformats.org/drawingml/2006/main"/>
           <a:p xmlns:a="http://schemas.openxmlformats.org/drawingml/2006/main">
             <a:pPr algn="r">
+              <a:buNone/>
               <a:defRPr sz="825" b="1">
                 <a:solidFill>
                   <a:srgbClr val="FFFFFF">
@@ -10323,6 +11422,7 @@
           <a:lstStyle xmlns:a="http://schemas.openxmlformats.org/drawingml/2006/main"/>
           <a:p xmlns:a="http://schemas.openxmlformats.org/drawingml/2006/main">
             <a:pPr>
+              <a:buNone/>
               <a:defRPr sz="2925" b="1">
                 <a:solidFill>
                   <a:srgbClr val="FFFFFF"/>
@@ -10373,6 +11473,7 @@
           <a:lstStyle xmlns:a="http://schemas.openxmlformats.org/drawingml/2006/main"/>
           <a:p xmlns:a="http://schemas.openxmlformats.org/drawingml/2006/main">
             <a:pPr>
+              <a:buNone/>
               <a:defRPr sz="1650">
                 <a:solidFill>
                   <a:srgbClr val="E2F2FF"/>
@@ -10423,6 +11524,7 @@
           <a:lstStyle xmlns:a="http://schemas.openxmlformats.org/drawingml/2006/main"/>
           <a:p xmlns:a="http://schemas.openxmlformats.org/drawingml/2006/main">
             <a:pPr>
+              <a:buNone/>
               <a:defRPr sz="1800">
                 <a:solidFill>
                   <a:srgbClr val="FFFFFF"/>
@@ -10440,6 +11542,7 @@
           </a:p>
           <a:p xmlns:a="http://schemas.openxmlformats.org/drawingml/2006/main">
             <a:pPr>
+              <a:buNone/>
               <a:defRPr sz="1800">
                 <a:solidFill>
                   <a:srgbClr val="FFFFFF"/>
@@ -10457,6 +11560,7 @@
           </a:p>
           <a:p xmlns:a="http://schemas.openxmlformats.org/drawingml/2006/main">
             <a:pPr>
+              <a:buNone/>
               <a:defRPr sz="1800">
                 <a:solidFill>
                   <a:srgbClr val="FFFFFF"/>
@@ -10474,6 +11578,7 @@
           </a:p>
           <a:p xmlns:a="http://schemas.openxmlformats.org/drawingml/2006/main">
             <a:pPr>
+              <a:buNone/>
               <a:defRPr sz="1800">
                 <a:solidFill>
                   <a:srgbClr val="FFFFFF"/>
@@ -10598,6 +11703,7 @@
           <a:lstStyle xmlns:a="http://schemas.openxmlformats.org/drawingml/2006/main"/>
           <a:p xmlns:a="http://schemas.openxmlformats.org/drawingml/2006/main">
             <a:pPr algn="ctr">
+              <a:buNone/>
               <a:defRPr sz="4650" b="1">
                 <a:solidFill>
                   <a:srgbClr val="1EC5FF"/>
@@ -10648,6 +11754,7 @@
           <a:lstStyle xmlns:a="http://schemas.openxmlformats.org/drawingml/2006/main"/>
           <a:p xmlns:a="http://schemas.openxmlformats.org/drawingml/2006/main">
             <a:pPr>
+              <a:buNone/>
               <a:defRPr sz="1050" b="1">
                 <a:solidFill>
                   <a:srgbClr val="1EC5FF"/>
@@ -10731,6 +11838,7 @@
           <a:lstStyle xmlns:a="http://schemas.openxmlformats.org/drawingml/2006/main"/>
           <a:p xmlns:a="http://schemas.openxmlformats.org/drawingml/2006/main">
             <a:pPr>
+              <a:buNone/>
               <a:defRPr sz="825">
                 <a:solidFill>
                   <a:srgbClr val="FFFFFF">
@@ -10785,6 +11893,7 @@
           <a:lstStyle xmlns:a="http://schemas.openxmlformats.org/drawingml/2006/main"/>
           <a:p xmlns:a="http://schemas.openxmlformats.org/drawingml/2006/main">
             <a:pPr algn="r">
+              <a:buNone/>
               <a:defRPr sz="825" b="1">
                 <a:solidFill>
                   <a:srgbClr val="FFFFFF">
@@ -10868,6 +11977,7 @@
           <a:lstStyle xmlns:a="http://schemas.openxmlformats.org/drawingml/2006/main"/>
           <a:p xmlns:a="http://schemas.openxmlformats.org/drawingml/2006/main">
             <a:pPr>
+              <a:buNone/>
               <a:defRPr sz="2925" b="1">
                 <a:solidFill>
                   <a:srgbClr val="0B1F3A"/>
@@ -10918,6 +12028,7 @@
           <a:lstStyle xmlns:a="http://schemas.openxmlformats.org/drawingml/2006/main"/>
           <a:p xmlns:a="http://schemas.openxmlformats.org/drawingml/2006/main">
             <a:pPr>
+              <a:buNone/>
               <a:defRPr sz="1650">
                 <a:solidFill>
                   <a:srgbClr val="5C6F86"/>
@@ -10968,6 +12079,7 @@
           <a:lstStyle xmlns:a="http://schemas.openxmlformats.org/drawingml/2006/main"/>
           <a:p xmlns:a="http://schemas.openxmlformats.org/drawingml/2006/main">
             <a:pPr>
+              <a:buNone/>
               <a:defRPr sz="1800">
                 <a:solidFill>
                   <a:srgbClr val="0B1F3A"/>
@@ -10985,6 +12097,7 @@
           </a:p>
           <a:p xmlns:a="http://schemas.openxmlformats.org/drawingml/2006/main">
             <a:pPr>
+              <a:buNone/>
               <a:defRPr sz="1800">
                 <a:solidFill>
                   <a:srgbClr val="0B1F3A"/>
@@ -11002,6 +12115,7 @@
           </a:p>
           <a:p xmlns:a="http://schemas.openxmlformats.org/drawingml/2006/main">
             <a:pPr>
+              <a:buNone/>
               <a:defRPr sz="1800">
                 <a:solidFill>
                   <a:srgbClr val="0B1F3A"/>
@@ -11126,6 +12240,7 @@
           <a:lstStyle xmlns:a="http://schemas.openxmlformats.org/drawingml/2006/main"/>
           <a:p xmlns:a="http://schemas.openxmlformats.org/drawingml/2006/main">
             <a:pPr algn="ctr">
+              <a:buNone/>
               <a:defRPr sz="4650" b="1">
                 <a:solidFill>
                   <a:srgbClr val="1565C0"/>
@@ -11176,6 +12291,7 @@
           <a:lstStyle xmlns:a="http://schemas.openxmlformats.org/drawingml/2006/main"/>
           <a:p xmlns:a="http://schemas.openxmlformats.org/drawingml/2006/main">
             <a:pPr>
+              <a:buNone/>
               <a:defRPr sz="1050" b="1">
                 <a:solidFill>
                   <a:srgbClr val="1565C0"/>
@@ -11259,6 +12375,7 @@
           <a:lstStyle xmlns:a="http://schemas.openxmlformats.org/drawingml/2006/main"/>
           <a:p xmlns:a="http://schemas.openxmlformats.org/drawingml/2006/main">
             <a:pPr>
+              <a:buNone/>
               <a:defRPr sz="825">
                 <a:solidFill>
                   <a:srgbClr val="0B1F3A">
@@ -11313,6 +12430,7 @@
           <a:lstStyle xmlns:a="http://schemas.openxmlformats.org/drawingml/2006/main"/>
           <a:p xmlns:a="http://schemas.openxmlformats.org/drawingml/2006/main">
             <a:pPr algn="r">
+              <a:buNone/>
               <a:defRPr sz="825" b="1">
                 <a:solidFill>
                   <a:srgbClr val="0B1F3A">
@@ -11404,6 +12522,7 @@
           <a:lstStyle xmlns:a="http://schemas.openxmlformats.org/drawingml/2006/main"/>
           <a:p xmlns:a="http://schemas.openxmlformats.org/drawingml/2006/main">
             <a:pPr>
+              <a:buNone/>
               <a:defRPr sz="2925" b="1">
                 <a:solidFill>
                   <a:srgbClr val="FFFFFF"/>
@@ -11462,6 +12581,7 @@
           <a:lstStyle xmlns:a="http://schemas.openxmlformats.org/drawingml/2006/main"/>
           <a:p xmlns:a="http://schemas.openxmlformats.org/drawingml/2006/main">
             <a:pPr algn="ctr">
+              <a:buNone/>
               <a:defRPr sz="1500" b="1">
                 <a:solidFill>
                   <a:srgbClr val="FFFFFF"/>
@@ -11520,6 +12640,7 @@
           <a:lstStyle xmlns:a="http://schemas.openxmlformats.org/drawingml/2006/main"/>
           <a:p xmlns:a="http://schemas.openxmlformats.org/drawingml/2006/main">
             <a:pPr algn="ctr">
+              <a:buNone/>
               <a:defRPr sz="1500" b="1">
                 <a:solidFill>
                   <a:srgbClr val="FFFFFF"/>
@@ -11578,6 +12699,7 @@
           <a:lstStyle xmlns:a="http://schemas.openxmlformats.org/drawingml/2006/main"/>
           <a:p xmlns:a="http://schemas.openxmlformats.org/drawingml/2006/main">
             <a:pPr algn="ctr">
+              <a:buNone/>
               <a:defRPr sz="1500" b="1">
                 <a:solidFill>
                   <a:srgbClr val="FFFFFF"/>
@@ -11628,6 +12750,7 @@
           <a:lstStyle xmlns:a="http://schemas.openxmlformats.org/drawingml/2006/main"/>
           <a:p xmlns:a="http://schemas.openxmlformats.org/drawingml/2006/main">
             <a:pPr>
+              <a:buNone/>
               <a:defRPr sz="1050" b="1">
                 <a:solidFill>
                   <a:srgbClr val="1EC5FF"/>
@@ -11711,6 +12834,7 @@
           <a:lstStyle xmlns:a="http://schemas.openxmlformats.org/drawingml/2006/main"/>
           <a:p xmlns:a="http://schemas.openxmlformats.org/drawingml/2006/main">
             <a:pPr>
+              <a:buNone/>
               <a:defRPr sz="825">
                 <a:solidFill>
                   <a:srgbClr val="FFFFFF">
@@ -11765,6 +12889,7 @@
           <a:lstStyle xmlns:a="http://schemas.openxmlformats.org/drawingml/2006/main"/>
           <a:p xmlns:a="http://schemas.openxmlformats.org/drawingml/2006/main">
             <a:pPr algn="r">
+              <a:buNone/>
               <a:defRPr sz="825" b="1">
                 <a:solidFill>
                   <a:srgbClr val="FFFFFF">
@@ -11856,6 +12981,7 @@
           <a:lstStyle xmlns:a="http://schemas.openxmlformats.org/drawingml/2006/main"/>
           <a:p xmlns:a="http://schemas.openxmlformats.org/drawingml/2006/main">
             <a:pPr>
+              <a:buNone/>
               <a:defRPr sz="2925" b="1">
                 <a:solidFill>
                   <a:srgbClr val="FFFFFF"/>
@@ -11906,6 +13032,7 @@
           <a:lstStyle xmlns:a="http://schemas.openxmlformats.org/drawingml/2006/main"/>
           <a:p xmlns:a="http://schemas.openxmlformats.org/drawingml/2006/main">
             <a:pPr>
+              <a:buNone/>
               <a:defRPr sz="1650">
                 <a:solidFill>
                   <a:srgbClr val="E2F2FF"/>
@@ -11956,6 +13083,7 @@
           <a:lstStyle xmlns:a="http://schemas.openxmlformats.org/drawingml/2006/main"/>
           <a:p xmlns:a="http://schemas.openxmlformats.org/drawingml/2006/main">
             <a:pPr>
+              <a:buNone/>
               <a:defRPr sz="1800">
                 <a:solidFill>
                   <a:srgbClr val="FFFFFF"/>
@@ -11973,6 +13101,7 @@
           </a:p>
           <a:p xmlns:a="http://schemas.openxmlformats.org/drawingml/2006/main">
             <a:pPr>
+              <a:buNone/>
               <a:defRPr sz="1800">
                 <a:solidFill>
                   <a:srgbClr val="FFFFFF"/>
@@ -11990,6 +13119,7 @@
           </a:p>
           <a:p xmlns:a="http://schemas.openxmlformats.org/drawingml/2006/main">
             <a:pPr>
+              <a:buNone/>
               <a:defRPr sz="1800">
                 <a:solidFill>
                   <a:srgbClr val="FFFFFF"/>
@@ -12007,6 +13137,7 @@
           </a:p>
           <a:p xmlns:a="http://schemas.openxmlformats.org/drawingml/2006/main">
             <a:pPr>
+              <a:buNone/>
               <a:defRPr sz="1800">
                 <a:solidFill>
                   <a:srgbClr val="FFFFFF"/>
@@ -12131,6 +13262,7 @@
           <a:lstStyle xmlns:a="http://schemas.openxmlformats.org/drawingml/2006/main"/>
           <a:p xmlns:a="http://schemas.openxmlformats.org/drawingml/2006/main">
             <a:pPr algn="ctr">
+              <a:buNone/>
               <a:defRPr sz="4650" b="1">
                 <a:solidFill>
                   <a:srgbClr val="1EC5FF"/>
@@ -12181,6 +13313,7 @@
           <a:lstStyle xmlns:a="http://schemas.openxmlformats.org/drawingml/2006/main"/>
           <a:p xmlns:a="http://schemas.openxmlformats.org/drawingml/2006/main">
             <a:pPr>
+              <a:buNone/>
               <a:defRPr sz="1050" b="1">
                 <a:solidFill>
                   <a:srgbClr val="1EC5FF"/>
@@ -12264,6 +13397,7 @@
           <a:lstStyle xmlns:a="http://schemas.openxmlformats.org/drawingml/2006/main"/>
           <a:p xmlns:a="http://schemas.openxmlformats.org/drawingml/2006/main">
             <a:pPr>
+              <a:buNone/>
               <a:defRPr sz="825">
                 <a:solidFill>
                   <a:srgbClr val="FFFFFF">
@@ -12318,6 +13452,7 @@
           <a:lstStyle xmlns:a="http://schemas.openxmlformats.org/drawingml/2006/main"/>
           <a:p xmlns:a="http://schemas.openxmlformats.org/drawingml/2006/main">
             <a:pPr algn="r">
+              <a:buNone/>
               <a:defRPr sz="825" b="1">
                 <a:solidFill>
                   <a:srgbClr val="FFFFFF">
@@ -12401,6 +13536,7 @@
           <a:lstStyle xmlns:a="http://schemas.openxmlformats.org/drawingml/2006/main"/>
           <a:p xmlns:a="http://schemas.openxmlformats.org/drawingml/2006/main">
             <a:pPr>
+              <a:buNone/>
               <a:defRPr sz="2925" b="1">
                 <a:solidFill>
                   <a:srgbClr val="0B1F3A"/>
@@ -12484,6 +13620,7 @@
           <a:lstStyle xmlns:a="http://schemas.openxmlformats.org/drawingml/2006/main"/>
           <a:p xmlns:a="http://schemas.openxmlformats.org/drawingml/2006/main">
             <a:pPr algn="ctr">
+              <a:buNone/>
               <a:defRPr sz="1575" b="1">
                 <a:solidFill>
                   <a:srgbClr val="0B1F3A"/>
@@ -12567,6 +13704,7 @@
           <a:lstStyle xmlns:a="http://schemas.openxmlformats.org/drawingml/2006/main"/>
           <a:p xmlns:a="http://schemas.openxmlformats.org/drawingml/2006/main">
             <a:pPr algn="ctr">
+              <a:buNone/>
               <a:defRPr sz="1575" b="1">
                 <a:solidFill>
                   <a:srgbClr val="0B1F3A"/>
@@ -12650,6 +13788,7 @@
           <a:lstStyle xmlns:a="http://schemas.openxmlformats.org/drawingml/2006/main"/>
           <a:p xmlns:a="http://schemas.openxmlformats.org/drawingml/2006/main">
             <a:pPr algn="ctr">
+              <a:buNone/>
               <a:defRPr sz="1575" b="1">
                 <a:solidFill>
                   <a:srgbClr val="0B1F3A"/>
@@ -12700,6 +13839,7 @@
           <a:lstStyle xmlns:a="http://schemas.openxmlformats.org/drawingml/2006/main"/>
           <a:p xmlns:a="http://schemas.openxmlformats.org/drawingml/2006/main">
             <a:pPr>
+              <a:buNone/>
               <a:defRPr sz="1050" b="1">
                 <a:solidFill>
                   <a:srgbClr val="1565C0"/>
@@ -12783,6 +13923,7 @@
           <a:lstStyle xmlns:a="http://schemas.openxmlformats.org/drawingml/2006/main"/>
           <a:p xmlns:a="http://schemas.openxmlformats.org/drawingml/2006/main">
             <a:pPr>
+              <a:buNone/>
               <a:defRPr sz="825">
                 <a:solidFill>
                   <a:srgbClr val="0B1F3A">
@@ -12837,6 +13978,7 @@
           <a:lstStyle xmlns:a="http://schemas.openxmlformats.org/drawingml/2006/main"/>
           <a:p xmlns:a="http://schemas.openxmlformats.org/drawingml/2006/main">
             <a:pPr algn="r">
+              <a:buNone/>
               <a:defRPr sz="825" b="1">
                 <a:solidFill>
                   <a:srgbClr val="0B1F3A">
@@ -12920,6 +14062,7 @@
           <a:lstStyle xmlns:a="http://schemas.openxmlformats.org/drawingml/2006/main"/>
           <a:p xmlns:a="http://schemas.openxmlformats.org/drawingml/2006/main">
             <a:pPr>
+              <a:buNone/>
               <a:defRPr sz="2925" b="1">
                 <a:solidFill>
                   <a:srgbClr val="0B1F3A"/>
@@ -12970,6 +14113,7 @@
           <a:lstStyle xmlns:a="http://schemas.openxmlformats.org/drawingml/2006/main"/>
           <a:p xmlns:a="http://schemas.openxmlformats.org/drawingml/2006/main">
             <a:pPr>
+              <a:buNone/>
               <a:defRPr sz="1650">
                 <a:solidFill>
                   <a:srgbClr val="5C6F86"/>
@@ -13020,6 +14164,7 @@
           <a:lstStyle xmlns:a="http://schemas.openxmlformats.org/drawingml/2006/main"/>
           <a:p xmlns:a="http://schemas.openxmlformats.org/drawingml/2006/main">
             <a:pPr>
+              <a:buNone/>
               <a:defRPr sz="1800">
                 <a:solidFill>
                   <a:srgbClr val="0B1F3A"/>
@@ -13037,6 +14182,7 @@
           </a:p>
           <a:p xmlns:a="http://schemas.openxmlformats.org/drawingml/2006/main">
             <a:pPr>
+              <a:buNone/>
               <a:defRPr sz="1800">
                 <a:solidFill>
                   <a:srgbClr val="0B1F3A"/>
@@ -13054,6 +14200,7 @@
           </a:p>
           <a:p xmlns:a="http://schemas.openxmlformats.org/drawingml/2006/main">
             <a:pPr>
+              <a:buNone/>
               <a:defRPr sz="1800">
                 <a:solidFill>
                   <a:srgbClr val="0B1F3A"/>
@@ -13071,6 +14218,7 @@
           </a:p>
           <a:p xmlns:a="http://schemas.openxmlformats.org/drawingml/2006/main">
             <a:pPr>
+              <a:buNone/>
               <a:defRPr sz="1800">
                 <a:solidFill>
                   <a:srgbClr val="0B1F3A"/>
@@ -13195,6 +14343,7 @@
           <a:lstStyle xmlns:a="http://schemas.openxmlformats.org/drawingml/2006/main"/>
           <a:p xmlns:a="http://schemas.openxmlformats.org/drawingml/2006/main">
             <a:pPr algn="ctr">
+              <a:buNone/>
               <a:defRPr sz="4650" b="1">
                 <a:solidFill>
                   <a:srgbClr val="1565C0"/>
@@ -13245,6 +14394,7 @@
           <a:lstStyle xmlns:a="http://schemas.openxmlformats.org/drawingml/2006/main"/>
           <a:p xmlns:a="http://schemas.openxmlformats.org/drawingml/2006/main">
             <a:pPr>
+              <a:buNone/>
               <a:defRPr sz="1050" b="1">
                 <a:solidFill>
                   <a:srgbClr val="1565C0"/>
@@ -13328,6 +14478,7 @@
           <a:lstStyle xmlns:a="http://schemas.openxmlformats.org/drawingml/2006/main"/>
           <a:p xmlns:a="http://schemas.openxmlformats.org/drawingml/2006/main">
             <a:pPr>
+              <a:buNone/>
               <a:defRPr sz="825">
                 <a:solidFill>
                   <a:srgbClr val="0B1F3A">
@@ -13382,6 +14533,7 @@
           <a:lstStyle xmlns:a="http://schemas.openxmlformats.org/drawingml/2006/main"/>
           <a:p xmlns:a="http://schemas.openxmlformats.org/drawingml/2006/main">
             <a:pPr algn="r">
+              <a:buNone/>
               <a:defRPr sz="825" b="1">
                 <a:solidFill>
                   <a:srgbClr val="0B1F3A">

--- a/assets/decks/episodio-07-governanca-como-codigo.pptx
+++ b/assets/decks/episodio-07-governanca-como-codigo.pptx
@@ -2,33 +2,33 @@
 <file path=ppt/presentation.xml><?xml version="1.0" encoding="utf-8"?>
 <p:presentation xmlns:p="http://schemas.openxmlformats.org/presentationml/2006/main">
   <p:sldMasterIdLst>
-    <p:sldMasterId xmlns:r="http://schemas.openxmlformats.org/officeDocument/2006/relationships" id="2147483648" r:id="R5f97504616144c79"/>
-    <p:sldMasterId xmlns:r="http://schemas.openxmlformats.org/officeDocument/2006/relationships" id="2147483650" r:id="R010407b00b2646cb"/>
+    <p:sldMasterId xmlns:r="http://schemas.openxmlformats.org/officeDocument/2006/relationships" id="2147483648" r:id="R2981984df45f4fde"/>
+    <p:sldMasterId xmlns:r="http://schemas.openxmlformats.org/officeDocument/2006/relationships" id="2147483650" r:id="R8fac7558b74e425b"/>
   </p:sldMasterIdLst>
   <p:notesMasterIdLst>
-    <p:notesMasterId xmlns:r="http://schemas.openxmlformats.org/officeDocument/2006/relationships" r:id="Rf941f39cf33543c7"/>
+    <p:notesMasterId xmlns:r="http://schemas.openxmlformats.org/officeDocument/2006/relationships" r:id="R42ad50372f53447f"/>
   </p:notesMasterIdLst>
   <p:sldIdLst>
-    <p:sldId xmlns:r="http://schemas.openxmlformats.org/officeDocument/2006/relationships" id="256" r:id="Re2a50d45552745aa"/>
-    <p:sldId xmlns:r="http://schemas.openxmlformats.org/officeDocument/2006/relationships" id="257" r:id="R5d603fe022f448b6"/>
-    <p:sldId xmlns:r="http://schemas.openxmlformats.org/officeDocument/2006/relationships" id="258" r:id="R2c2000249904478a"/>
-    <p:sldId xmlns:r="http://schemas.openxmlformats.org/officeDocument/2006/relationships" id="259" r:id="Rfc140d186b75496a"/>
-    <p:sldId xmlns:r="http://schemas.openxmlformats.org/officeDocument/2006/relationships" id="260" r:id="Rf0cfde24a1b845bb"/>
-    <p:sldId xmlns:r="http://schemas.openxmlformats.org/officeDocument/2006/relationships" id="261" r:id="Ra7199f378c5a4719"/>
-    <p:sldId xmlns:r="http://schemas.openxmlformats.org/officeDocument/2006/relationships" id="262" r:id="R352626ab1ee74e92"/>
-    <p:sldId xmlns:r="http://schemas.openxmlformats.org/officeDocument/2006/relationships" id="263" r:id="R338f21bdcc424f9d"/>
-    <p:sldId xmlns:r="http://schemas.openxmlformats.org/officeDocument/2006/relationships" id="264" r:id="Rf85aea4f56f04fe2"/>
-    <p:sldId xmlns:r="http://schemas.openxmlformats.org/officeDocument/2006/relationships" id="265" r:id="R070b8d076e72491d"/>
-    <p:sldId xmlns:r="http://schemas.openxmlformats.org/officeDocument/2006/relationships" id="266" r:id="R8ab47913b9794117"/>
-    <p:sldId xmlns:r="http://schemas.openxmlformats.org/officeDocument/2006/relationships" id="267" r:id="Rf2195c67dfb94477"/>
-    <p:sldId xmlns:r="http://schemas.openxmlformats.org/officeDocument/2006/relationships" id="268" r:id="Ra1947bb7ee3f473e"/>
-    <p:sldId xmlns:r="http://schemas.openxmlformats.org/officeDocument/2006/relationships" id="269" r:id="Rc6ac486625b04ba3"/>
-    <p:sldId xmlns:r="http://schemas.openxmlformats.org/officeDocument/2006/relationships" id="270" r:id="Rc0c2a381b99f41b5"/>
-    <p:sldId xmlns:r="http://schemas.openxmlformats.org/officeDocument/2006/relationships" id="271" r:id="Rd2699720d09d4c14"/>
-    <p:sldId xmlns:r="http://schemas.openxmlformats.org/officeDocument/2006/relationships" id="272" r:id="R4f2fc043c49645f6"/>
-    <p:sldId xmlns:r="http://schemas.openxmlformats.org/officeDocument/2006/relationships" id="273" r:id="R7fe88bb8452a4154"/>
-    <p:sldId xmlns:r="http://schemas.openxmlformats.org/officeDocument/2006/relationships" id="274" r:id="R3919d4c580ad422c"/>
-    <p:sldId xmlns:r="http://schemas.openxmlformats.org/officeDocument/2006/relationships" id="275" r:id="R3fe4eab8aed54ae5"/>
+    <p:sldId xmlns:r="http://schemas.openxmlformats.org/officeDocument/2006/relationships" id="256" r:id="R81fca32c41504c44"/>
+    <p:sldId xmlns:r="http://schemas.openxmlformats.org/officeDocument/2006/relationships" id="257" r:id="Rb9431540cb5c4f57"/>
+    <p:sldId xmlns:r="http://schemas.openxmlformats.org/officeDocument/2006/relationships" id="258" r:id="Ra69042600afa43e7"/>
+    <p:sldId xmlns:r="http://schemas.openxmlformats.org/officeDocument/2006/relationships" id="259" r:id="Rfd8f876437374556"/>
+    <p:sldId xmlns:r="http://schemas.openxmlformats.org/officeDocument/2006/relationships" id="260" r:id="Rb6aefc99931a415d"/>
+    <p:sldId xmlns:r="http://schemas.openxmlformats.org/officeDocument/2006/relationships" id="261" r:id="R11d7b7e3ef624de1"/>
+    <p:sldId xmlns:r="http://schemas.openxmlformats.org/officeDocument/2006/relationships" id="262" r:id="R59346bf271af4f88"/>
+    <p:sldId xmlns:r="http://schemas.openxmlformats.org/officeDocument/2006/relationships" id="263" r:id="Rd0806d83a7564878"/>
+    <p:sldId xmlns:r="http://schemas.openxmlformats.org/officeDocument/2006/relationships" id="264" r:id="Reaccfe44a0404147"/>
+    <p:sldId xmlns:r="http://schemas.openxmlformats.org/officeDocument/2006/relationships" id="265" r:id="R71f460d6c8fe4622"/>
+    <p:sldId xmlns:r="http://schemas.openxmlformats.org/officeDocument/2006/relationships" id="266" r:id="Re4e3a3b2cf814702"/>
+    <p:sldId xmlns:r="http://schemas.openxmlformats.org/officeDocument/2006/relationships" id="267" r:id="Rc7e4f68907844452"/>
+    <p:sldId xmlns:r="http://schemas.openxmlformats.org/officeDocument/2006/relationships" id="268" r:id="R6817441d63bb46af"/>
+    <p:sldId xmlns:r="http://schemas.openxmlformats.org/officeDocument/2006/relationships" id="269" r:id="Raabd93cff6a64749"/>
+    <p:sldId xmlns:r="http://schemas.openxmlformats.org/officeDocument/2006/relationships" id="270" r:id="R1eba9ed83c344838"/>
+    <p:sldId xmlns:r="http://schemas.openxmlformats.org/officeDocument/2006/relationships" id="271" r:id="R427ac1caa98b4297"/>
+    <p:sldId xmlns:r="http://schemas.openxmlformats.org/officeDocument/2006/relationships" id="272" r:id="R6f05340b4b06469d"/>
+    <p:sldId xmlns:r="http://schemas.openxmlformats.org/officeDocument/2006/relationships" id="273" r:id="R2051c56e47e34766"/>
+    <p:sldId xmlns:r="http://schemas.openxmlformats.org/officeDocument/2006/relationships" id="274" r:id="R443430cef06c47be"/>
+    <p:sldId xmlns:r="http://schemas.openxmlformats.org/officeDocument/2006/relationships" id="275" r:id="R41231d4f128e40c3"/>
   </p:sldIdLst>
   <p:sldSz cx="12192000" cy="6858000"/>
   <p:notesSz cx="6858000" cy="9144000"/>
@@ -542,6 +542,11 @@
           </a:p>
           <a:p xmlns:a="http://schemas.openxmlformats.org/drawingml/2006/main">
             <a:r>
+              <a:t>- https://rescuepoint.com.br/assets/img/logo.png</a:t>
+            </a:r>
+          </a:p>
+          <a:p xmlns:a="http://schemas.openxmlformats.org/drawingml/2006/main">
+            <a:r>
               <a:t>- https://github.com/AnselmoBorges/dbt-moderno-na-pratica/blob/main/roteiros/07-governanca-como-codigo.md</a:t>
             </a:r>
           </a:p>
@@ -707,6 +712,11 @@
           </a:p>
           <a:p xmlns:a="http://schemas.openxmlformats.org/drawingml/2006/main">
             <a:r>
+              <a:t>- https://rescuepoint.com.br/assets/img/logo.png</a:t>
+            </a:r>
+          </a:p>
+          <a:p xmlns:a="http://schemas.openxmlformats.org/drawingml/2006/main">
+            <a:r>
               <a:t>- https://github.com/AnselmoBorges/dbt-moderno-na-pratica/blob/main/roteiros/07-governanca-como-codigo.md</a:t>
             </a:r>
           </a:p>
@@ -877,6 +887,11 @@
           </a:p>
           <a:p xmlns:a="http://schemas.openxmlformats.org/drawingml/2006/main">
             <a:r>
+              <a:t>- https://rescuepoint.com.br/assets/img/logo.png</a:t>
+            </a:r>
+          </a:p>
+          <a:p xmlns:a="http://schemas.openxmlformats.org/drawingml/2006/main">
+            <a:r>
               <a:t>- https://github.com/AnselmoBorges/dbt-moderno-na-pratica/blob/main/roteiros/07-governanca-como-codigo.md</a:t>
             </a:r>
           </a:p>
@@ -1042,6 +1057,11 @@
           </a:p>
           <a:p xmlns:a="http://schemas.openxmlformats.org/drawingml/2006/main">
             <a:r>
+              <a:t>- https://rescuepoint.com.br/assets/img/logo.png</a:t>
+            </a:r>
+          </a:p>
+          <a:p xmlns:a="http://schemas.openxmlformats.org/drawingml/2006/main">
+            <a:r>
               <a:t>- https://github.com/AnselmoBorges/dbt-moderno-na-pratica/blob/main/roteiros/07-governanca-como-codigo.md</a:t>
             </a:r>
           </a:p>
@@ -1207,6 +1227,11 @@
           </a:p>
           <a:p xmlns:a="http://schemas.openxmlformats.org/drawingml/2006/main">
             <a:r>
+              <a:t>- https://rescuepoint.com.br/assets/img/logo.png</a:t>
+            </a:r>
+          </a:p>
+          <a:p xmlns:a="http://schemas.openxmlformats.org/drawingml/2006/main">
+            <a:r>
               <a:t>- https://github.com/AnselmoBorges/dbt-moderno-na-pratica/blob/main/roteiros/07-governanca-como-codigo.md</a:t>
             </a:r>
           </a:p>
@@ -1372,6 +1397,11 @@
           </a:p>
           <a:p xmlns:a="http://schemas.openxmlformats.org/drawingml/2006/main">
             <a:r>
+              <a:t>- https://rescuepoint.com.br/assets/img/logo.png</a:t>
+            </a:r>
+          </a:p>
+          <a:p xmlns:a="http://schemas.openxmlformats.org/drawingml/2006/main">
+            <a:r>
               <a:t>- https://github.com/AnselmoBorges/dbt-moderno-na-pratica/blob/main/roteiros/07-governanca-como-codigo.md</a:t>
             </a:r>
           </a:p>
@@ -1537,6 +1567,11 @@
           </a:p>
           <a:p xmlns:a="http://schemas.openxmlformats.org/drawingml/2006/main">
             <a:r>
+              <a:t>- https://rescuepoint.com.br/assets/img/logo.png</a:t>
+            </a:r>
+          </a:p>
+          <a:p xmlns:a="http://schemas.openxmlformats.org/drawingml/2006/main">
+            <a:r>
               <a:t>- https://github.com/AnselmoBorges/dbt-moderno-na-pratica/blob/main/roteiros/07-governanca-como-codigo.md</a:t>
             </a:r>
           </a:p>
@@ -1702,6 +1737,11 @@
           </a:p>
           <a:p xmlns:a="http://schemas.openxmlformats.org/drawingml/2006/main">
             <a:r>
+              <a:t>- https://rescuepoint.com.br/assets/img/logo.png</a:t>
+            </a:r>
+          </a:p>
+          <a:p xmlns:a="http://schemas.openxmlformats.org/drawingml/2006/main">
+            <a:r>
               <a:t>- https://github.com/AnselmoBorges/dbt-moderno-na-pratica/blob/main/roteiros/07-governanca-como-codigo.md</a:t>
             </a:r>
           </a:p>
@@ -1867,6 +1907,11 @@
           </a:p>
           <a:p xmlns:a="http://schemas.openxmlformats.org/drawingml/2006/main">
             <a:r>
+              <a:t>- https://rescuepoint.com.br/assets/img/logo.png</a:t>
+            </a:r>
+          </a:p>
+          <a:p xmlns:a="http://schemas.openxmlformats.org/drawingml/2006/main">
+            <a:r>
               <a:t>- https://github.com/AnselmoBorges/dbt-moderno-na-pratica/blob/main/roteiros/07-governanca-como-codigo.md</a:t>
             </a:r>
           </a:p>
@@ -2032,6 +2077,11 @@
           </a:p>
           <a:p xmlns:a="http://schemas.openxmlformats.org/drawingml/2006/main">
             <a:r>
+              <a:t>- https://rescuepoint.com.br/assets/img/logo.png</a:t>
+            </a:r>
+          </a:p>
+          <a:p xmlns:a="http://schemas.openxmlformats.org/drawingml/2006/main">
+            <a:r>
               <a:t>- https://github.com/AnselmoBorges/dbt-moderno-na-pratica/blob/main/roteiros/07-governanca-como-codigo.md</a:t>
             </a:r>
           </a:p>
@@ -2197,6 +2247,11 @@
           </a:p>
           <a:p xmlns:a="http://schemas.openxmlformats.org/drawingml/2006/main">
             <a:r>
+              <a:t>- https://rescuepoint.com.br/assets/img/logo.png</a:t>
+            </a:r>
+          </a:p>
+          <a:p xmlns:a="http://schemas.openxmlformats.org/drawingml/2006/main">
+            <a:r>
               <a:t>- https://github.com/AnselmoBorges/dbt-moderno-na-pratica/blob/main/roteiros/07-governanca-como-codigo.md</a:t>
             </a:r>
           </a:p>
@@ -2362,6 +2417,11 @@
           </a:p>
           <a:p xmlns:a="http://schemas.openxmlformats.org/drawingml/2006/main">
             <a:r>
+              <a:t>- https://rescuepoint.com.br/assets/img/logo.png</a:t>
+            </a:r>
+          </a:p>
+          <a:p xmlns:a="http://schemas.openxmlformats.org/drawingml/2006/main">
+            <a:r>
               <a:t>- https://github.com/AnselmoBorges/dbt-moderno-na-pratica/blob/main/roteiros/07-governanca-como-codigo.md</a:t>
             </a:r>
           </a:p>
@@ -2527,6 +2587,11 @@
           </a:p>
           <a:p xmlns:a="http://schemas.openxmlformats.org/drawingml/2006/main">
             <a:r>
+              <a:t>- https://rescuepoint.com.br/assets/img/logo.png</a:t>
+            </a:r>
+          </a:p>
+          <a:p xmlns:a="http://schemas.openxmlformats.org/drawingml/2006/main">
+            <a:r>
               <a:t>- https://github.com/AnselmoBorges/dbt-moderno-na-pratica/blob/main/roteiros/07-governanca-como-codigo.md</a:t>
             </a:r>
           </a:p>
@@ -2692,6 +2757,11 @@
           </a:p>
           <a:p xmlns:a="http://schemas.openxmlformats.org/drawingml/2006/main">
             <a:r>
+              <a:t>- https://rescuepoint.com.br/assets/img/logo.png</a:t>
+            </a:r>
+          </a:p>
+          <a:p xmlns:a="http://schemas.openxmlformats.org/drawingml/2006/main">
+            <a:r>
               <a:t>- https://github.com/AnselmoBorges/dbt-moderno-na-pratica/blob/main/roteiros/07-governanca-como-codigo.md</a:t>
             </a:r>
           </a:p>
@@ -2857,6 +2927,11 @@
           </a:p>
           <a:p xmlns:a="http://schemas.openxmlformats.org/drawingml/2006/main">
             <a:r>
+              <a:t>- https://rescuepoint.com.br/assets/img/logo.png</a:t>
+            </a:r>
+          </a:p>
+          <a:p xmlns:a="http://schemas.openxmlformats.org/drawingml/2006/main">
+            <a:r>
               <a:t>- https://github.com/AnselmoBorges/dbt-moderno-na-pratica/blob/main/roteiros/07-governanca-como-codigo.md</a:t>
             </a:r>
           </a:p>
@@ -3022,6 +3097,11 @@
           </a:p>
           <a:p xmlns:a="http://schemas.openxmlformats.org/drawingml/2006/main">
             <a:r>
+              <a:t>- https://rescuepoint.com.br/assets/img/logo.png</a:t>
+            </a:r>
+          </a:p>
+          <a:p xmlns:a="http://schemas.openxmlformats.org/drawingml/2006/main">
+            <a:r>
               <a:t>- https://github.com/AnselmoBorges/dbt-moderno-na-pratica/blob/main/roteiros/07-governanca-como-codigo.md</a:t>
             </a:r>
           </a:p>
@@ -3187,6 +3267,11 @@
           </a:p>
           <a:p xmlns:a="http://schemas.openxmlformats.org/drawingml/2006/main">
             <a:r>
+              <a:t>- https://rescuepoint.com.br/assets/img/logo.png</a:t>
+            </a:r>
+          </a:p>
+          <a:p xmlns:a="http://schemas.openxmlformats.org/drawingml/2006/main">
+            <a:r>
               <a:t>- https://github.com/AnselmoBorges/dbt-moderno-na-pratica/blob/main/roteiros/07-governanca-como-codigo.md</a:t>
             </a:r>
           </a:p>
@@ -3352,6 +3437,11 @@
           </a:p>
           <a:p xmlns:a="http://schemas.openxmlformats.org/drawingml/2006/main">
             <a:r>
+              <a:t>- https://rescuepoint.com.br/assets/img/logo.png</a:t>
+            </a:r>
+          </a:p>
+          <a:p xmlns:a="http://schemas.openxmlformats.org/drawingml/2006/main">
+            <a:r>
               <a:t>- https://github.com/AnselmoBorges/dbt-moderno-na-pratica/blob/main/roteiros/07-governanca-como-codigo.md</a:t>
             </a:r>
           </a:p>
@@ -3517,6 +3607,11 @@
           </a:p>
           <a:p xmlns:a="http://schemas.openxmlformats.org/drawingml/2006/main">
             <a:r>
+              <a:t>- https://rescuepoint.com.br/assets/img/logo.png</a:t>
+            </a:r>
+          </a:p>
+          <a:p xmlns:a="http://schemas.openxmlformats.org/drawingml/2006/main">
+            <a:r>
               <a:t>- https://github.com/AnselmoBorges/dbt-moderno-na-pratica/blob/main/roteiros/07-governanca-como-codigo.md</a:t>
             </a:r>
           </a:p>
@@ -3678,6 +3773,11 @@
           <a:p xmlns:a="http://schemas.openxmlformats.org/drawingml/2006/main">
             <a:r>
               <a:t>- https://github.com/dbt-labs/dbt-project-evaluator</a:t>
+            </a:r>
+          </a:p>
+          <a:p xmlns:a="http://schemas.openxmlformats.org/drawingml/2006/main">
+            <a:r>
+              <a:t>- https://rescuepoint.com.br/assets/img/logo.png</a:t>
             </a:r>
           </a:p>
           <a:p xmlns:a="http://schemas.openxmlformats.org/drawingml/2006/main">
@@ -3799,7 +3899,7 @@
   </p:cSld>
   <p:clrMap bg1="lt1" tx1="dk1" bg2="lt2" tx2="dk2" accent1="accent1" accent2="accent2" accent3="accent3" accent4="accent4" accent5="accent5" accent6="accent6" hlink="hlink" folHlink="folHlink"/>
   <p:sldLayoutIdLst>
-    <p:sldLayoutId xmlns:r="http://schemas.openxmlformats.org/officeDocument/2006/relationships" id="2147483649" r:id="R63acb38ddfa04e93"/>
+    <p:sldLayoutId xmlns:r="http://schemas.openxmlformats.org/officeDocument/2006/relationships" id="2147483649" r:id="Rf202f15faad14d95"/>
   </p:sldLayoutIdLst>
   <p:txStyles>
     <p:titleStyle>
@@ -4097,8 +4197,8 @@
   </p:cSld>
   <p:clrMap bg1="lt1" tx1="dk1" bg2="lt2" tx2="dk2" accent1="accent1" accent2="accent2" accent3="accent3" accent4="accent4" accent5="accent5" accent6="accent6" hlink="hlink" folHlink="folHlink"/>
   <p:sldLayoutIdLst>
-    <p:sldLayoutId xmlns:r="http://schemas.openxmlformats.org/officeDocument/2006/relationships" id="2147483651" r:id="R8f1f11c5a80b4925"/>
-    <p:sldLayoutId xmlns:r="http://schemas.openxmlformats.org/officeDocument/2006/relationships" id="2147483652" r:id="Rad72c22fddab46a6"/>
+    <p:sldLayoutId xmlns:r="http://schemas.openxmlformats.org/officeDocument/2006/relationships" id="2147483651" r:id="R60c954521f7748cc"/>
+    <p:sldLayoutId xmlns:r="http://schemas.openxmlformats.org/officeDocument/2006/relationships" id="2147483652" r:id="R2aee690a787e4e79"/>
   </p:sldLayoutIdLst>
 </p:sldMaster>
 </file>
@@ -4622,14 +4722,14 @@
       </p:grpSpPr>
       <p:pic>
         <p:nvPicPr>
-          <p:cNvPr id="10" name="" descr="Ilustração conceitual autoral da capa: EPISÓDIO 7 — Governança como código."/>
+          <p:cNvPr id="13" name="" descr="Ilustração conceitual autoral da capa: EPISÓDIO 7 — Governança como código."/>
           <p:cNvPicPr>
             <a:picLocks xmlns:a="http://schemas.openxmlformats.org/drawingml/2006/main" noChangeAspect="1"/>
           </p:cNvPicPr>
           <p:nvPr/>
         </p:nvPicPr>
         <p:blipFill>
-          <a:blip xmlns:r="http://schemas.openxmlformats.org/officeDocument/2006/relationships" xmlns:a="http://schemas.openxmlformats.org/drawingml/2006/main" r:embed="Rbaa0ed888c804ace"/>
+          <a:blip xmlns:r="http://schemas.openxmlformats.org/officeDocument/2006/relationships" xmlns:a="http://schemas.openxmlformats.org/drawingml/2006/main" r:embed="Rd6ffebf118154839"/>
           <a:srcRect xmlns:a="http://schemas.openxmlformats.org/drawingml/2006/main" l="19785" t="0" r="19785" b="0"/>
           <a:stretch xmlns:a="http://schemas.openxmlformats.org/drawingml/2006/main">
             <a:fillRect l="0" t="0" r="0" b="0"/>
@@ -4650,7 +4750,7 @@
           <p:cNvPr id="2" name="cover-text-surface">
             <a:extLst xmlns:a="http://schemas.openxmlformats.org/drawingml/2006/main">
               <a:ext uri="{FF2B5EF4-FFF2-40B4-BE49-F238E27FC236}">
-                <a16:creationId xmlns:a16="http://schemas.microsoft.com/office/drawing/2014/main" id="{AE6E0018-8BFC-4789-B08D-AF0808601159}"/>
+                <a16:creationId xmlns:a16="http://schemas.microsoft.com/office/drawing/2014/main" id="{EDB7E035-966A-4B54-BF05-40043D60F361}"/>
               </a:ext>
             </a:extLst>
           </p:cNvPr>
@@ -4683,7 +4783,7 @@
           <p:cNvPr id="3" name="cover-divider">
             <a:extLst xmlns:a="http://schemas.openxmlformats.org/drawingml/2006/main">
               <a:ext uri="{FF2B5EF4-FFF2-40B4-BE49-F238E27FC236}">
-                <a16:creationId xmlns:a16="http://schemas.microsoft.com/office/drawing/2014/main" id="{589F72CB-041B-4A46-B924-44C09F613737}"/>
+                <a16:creationId xmlns:a16="http://schemas.microsoft.com/office/drawing/2014/main" id="{B2515E21-781C-418E-AEE4-76780657877C}"/>
               </a:ext>
             </a:extLst>
           </p:cNvPr>
@@ -4714,7 +4814,7 @@
           <p:cNvPr id="4" name="cover-episode">
             <a:extLst xmlns:a="http://schemas.openxmlformats.org/drawingml/2006/main">
               <a:ext uri="{FF2B5EF4-FFF2-40B4-BE49-F238E27FC236}">
-                <a16:creationId xmlns:a16="http://schemas.microsoft.com/office/drawing/2014/main" id="{1B197A76-3309-4287-A482-E9ABF8CC0F57}"/>
+                <a16:creationId xmlns:a16="http://schemas.microsoft.com/office/drawing/2014/main" id="{AB541F87-E986-40A5-899B-0D314233A954}"/>
               </a:ext>
             </a:extLst>
           </p:cNvPr>
@@ -4762,10 +4862,69 @@
       </p:sp>
       <p:sp>
         <p:nvSpPr>
-          <p:cNvPr id="5" name="cover-title">
-            <a:extLst xmlns:a="http://schemas.openxmlformats.org/drawingml/2006/main">
-              <a:ext uri="{FF2B5EF4-FFF2-40B4-BE49-F238E27FC236}">
-                <a16:creationId xmlns:a16="http://schemas.microsoft.com/office/drawing/2014/main" id="{980BF435-3318-4BFA-9F68-D6A4D73EBECA}"/>
+          <p:cNvPr id="5" name="rescue-point-logo-background">
+            <a:extLst xmlns:a="http://schemas.openxmlformats.org/drawingml/2006/main">
+              <a:ext uri="{FF2B5EF4-FFF2-40B4-BE49-F238E27FC236}">
+                <a16:creationId xmlns:a16="http://schemas.microsoft.com/office/drawing/2014/main" id="{82E9F219-0DB6-415A-A4B1-D516CC5164AB}"/>
+              </a:ext>
+            </a:extLst>
+          </p:cNvPr>
+          <p:cNvSpPr>
+            <a:spLocks xmlns:a="http://schemas.openxmlformats.org/drawingml/2006/main" noGrp="1"/>
+          </p:cNvSpPr>
+          <p:nvPr/>
+        </p:nvSpPr>
+        <p:spPr>
+          <a:xfrm xmlns:a="http://schemas.openxmlformats.org/drawingml/2006/main">
+            <a:off x="9772650" y="133350"/>
+            <a:ext cx="1733550" cy="457200"/>
+          </a:xfrm>
+          <a:prstGeom xmlns:a="http://schemas.openxmlformats.org/drawingml/2006/main" prst="roundRect">
+            <a:avLst>
+              <a:gd name="adj" fmla="val 16667"/>
+            </a:avLst>
+          </a:prstGeom>
+          <a:solidFill xmlns:a="http://schemas.openxmlformats.org/drawingml/2006/main">
+            <a:srgbClr val="06142E"/>
+          </a:solidFill>
+          <a:ln xmlns:a="http://schemas.openxmlformats.org/drawingml/2006/main" w="9525">
+            <a:solidFill>
+              <a:srgbClr val="1EC5FF">
+                <a:alpha val="33333"/>
+              </a:srgbClr>
+            </a:solidFill>
+            <a:prstDash val="solid"/>
+          </a:ln>
+        </p:spPr>
+      </p:sp>
+      <p:pic>
+        <p:nvPicPr>
+          <p:cNvPr id="18" name="" descr="Ilustração conceitual autoral da capa: EPISÓDIO 7 — Governança como código."/>
+          <p:cNvPicPr>
+            <a:picLocks xmlns:a="http://schemas.openxmlformats.org/drawingml/2006/main" noChangeAspect="1"/>
+          </p:cNvPicPr>
+          <p:nvPr/>
+        </p:nvPicPr>
+        <p:blipFill>
+          <a:blip xmlns:r="http://schemas.openxmlformats.org/officeDocument/2006/relationships" xmlns:a="http://schemas.openxmlformats.org/drawingml/2006/main" r:embed="R2d2ecc9864924c87"/>
+          <a:stretch xmlns:a="http://schemas.openxmlformats.org/drawingml/2006/main"/>
+        </p:blipFill>
+        <p:spPr>
+          <a:xfrm xmlns:a="http://schemas.openxmlformats.org/drawingml/2006/main">
+            <a:off x="9893718" y="209550"/>
+            <a:ext cx="1491414" cy="323850"/>
+          </a:xfrm>
+          <a:prstGeom xmlns:a="http://schemas.openxmlformats.org/drawingml/2006/main" prst="rect">
+            <a:avLst/>
+          </a:prstGeom>
+        </p:spPr>
+      </p:pic>
+      <p:sp>
+        <p:nvSpPr>
+          <p:cNvPr id="7" name="cover-title">
+            <a:extLst xmlns:a="http://schemas.openxmlformats.org/drawingml/2006/main">
+              <a:ext uri="{FF2B5EF4-FFF2-40B4-BE49-F238E27FC236}">
+                <a16:creationId xmlns:a16="http://schemas.microsoft.com/office/drawing/2014/main" id="{23B63979-FFD4-4379-B798-6AEDA0B1DBEE}"/>
               </a:ext>
             </a:extLst>
           </p:cNvPr>
@@ -4813,10 +4972,10 @@
       </p:sp>
       <p:sp>
         <p:nvSpPr>
-          <p:cNvPr id="6" name="cover-subtitle">
-            <a:extLst xmlns:a="http://schemas.openxmlformats.org/drawingml/2006/main">
-              <a:ext uri="{FF2B5EF4-FFF2-40B4-BE49-F238E27FC236}">
-                <a16:creationId xmlns:a16="http://schemas.microsoft.com/office/drawing/2014/main" id="{F60E0FF5-B156-42EA-959E-A985664A0171}"/>
+          <p:cNvPr id="8" name="cover-subtitle">
+            <a:extLst xmlns:a="http://schemas.openxmlformats.org/drawingml/2006/main">
+              <a:ext uri="{FF2B5EF4-FFF2-40B4-BE49-F238E27FC236}">
+                <a16:creationId xmlns:a16="http://schemas.microsoft.com/office/drawing/2014/main" id="{153A3213-041A-4844-93BF-1AB2E181E2E7}"/>
               </a:ext>
             </a:extLst>
           </p:cNvPr>
@@ -4864,10 +5023,10 @@
       </p:sp>
       <p:sp>
         <p:nvSpPr>
-          <p:cNvPr id="7" name="cover-accent">
-            <a:extLst xmlns:a="http://schemas.openxmlformats.org/drawingml/2006/main">
-              <a:ext uri="{FF2B5EF4-FFF2-40B4-BE49-F238E27FC236}">
-                <a16:creationId xmlns:a16="http://schemas.microsoft.com/office/drawing/2014/main" id="{3207D70E-B7E2-4C45-A8FF-0722D11010C4}"/>
+          <p:cNvPr id="9" name="cover-accent">
+            <a:extLst xmlns:a="http://schemas.openxmlformats.org/drawingml/2006/main">
+              <a:ext uri="{FF2B5EF4-FFF2-40B4-BE49-F238E27FC236}">
+                <a16:creationId xmlns:a16="http://schemas.microsoft.com/office/drawing/2014/main" id="{8EB7FDF5-E422-404B-8C50-EE1F306BBE04}"/>
               </a:ext>
             </a:extLst>
           </p:cNvPr>
@@ -4895,10 +5054,10 @@
       </p:sp>
       <p:sp>
         <p:nvSpPr>
-          <p:cNvPr id="8" name="cover-meta">
-            <a:extLst xmlns:a="http://schemas.openxmlformats.org/drawingml/2006/main">
-              <a:ext uri="{FF2B5EF4-FFF2-40B4-BE49-F238E27FC236}">
-                <a16:creationId xmlns:a16="http://schemas.microsoft.com/office/drawing/2014/main" id="{7AB5422B-CDC3-4B2F-971C-B68656B185AE}"/>
+          <p:cNvPr id="10" name="cover-meta">
+            <a:extLst xmlns:a="http://schemas.openxmlformats.org/drawingml/2006/main">
+              <a:ext uri="{FF2B5EF4-FFF2-40B4-BE49-F238E27FC236}">
+                <a16:creationId xmlns:a16="http://schemas.microsoft.com/office/drawing/2014/main" id="{DF577D91-C060-4D5C-BC87-9B0E2FAC1C0A}"/>
               </a:ext>
             </a:extLst>
           </p:cNvPr>
@@ -4951,7 +5110,7 @@
     </p:spTree>
     <p:extLst>
       <p:ext uri="{BB962C8B-B14F-4D97-AF65-F5344CB8AC3E}">
-        <p14:creationId xmlns:p14="http://schemas.microsoft.com/office/powerpoint/2010/main" val="1192546052"/>
+        <p14:creationId xmlns:p14="http://schemas.microsoft.com/office/powerpoint/2010/main" val="257445521"/>
       </p:ext>
     </p:extLst>
   </p:cSld>
@@ -4987,10 +5146,10 @@
       </p:grpSpPr>
       <p:sp>
         <p:nvSpPr>
-          <p:cNvPr id="10" name="slide-title">
-            <a:extLst xmlns:a="http://schemas.openxmlformats.org/drawingml/2006/main">
-              <a:ext uri="{FF2B5EF4-FFF2-40B4-BE49-F238E27FC236}">
-                <a16:creationId xmlns:a16="http://schemas.microsoft.com/office/drawing/2014/main" id="{BD99E967-117A-42CC-B3A6-805CA65D5BD0}"/>
+          <p:cNvPr id="12" name="slide-title">
+            <a:extLst xmlns:a="http://schemas.openxmlformats.org/drawingml/2006/main">
+              <a:ext uri="{FF2B5EF4-FFF2-40B4-BE49-F238E27FC236}">
+                <a16:creationId xmlns:a16="http://schemas.microsoft.com/office/drawing/2014/main" id="{93DF6C42-D0B8-4423-BBF7-F0A39ACA9E79}"/>
               </a:ext>
             </a:extLst>
           </p:cNvPr>
@@ -5041,7 +5200,7 @@
           <p:cNvPr id="2" name="visual-claim">
             <a:extLst xmlns:a="http://schemas.openxmlformats.org/drawingml/2006/main">
               <a:ext uri="{FF2B5EF4-FFF2-40B4-BE49-F238E27FC236}">
-                <a16:creationId xmlns:a16="http://schemas.microsoft.com/office/drawing/2014/main" id="{2E07B395-402E-4AC9-ADC1-7256F3BE3177}"/>
+                <a16:creationId xmlns:a16="http://schemas.microsoft.com/office/drawing/2014/main" id="{163D1FE7-9A11-4C7F-9A0E-8F79AE70590B}"/>
               </a:ext>
             </a:extLst>
           </p:cNvPr>
@@ -5092,7 +5251,7 @@
           <p:cNvPr id="3" name="image-surface">
             <a:extLst xmlns:a="http://schemas.openxmlformats.org/drawingml/2006/main">
               <a:ext uri="{FF2B5EF4-FFF2-40B4-BE49-F238E27FC236}">
-                <a16:creationId xmlns:a16="http://schemas.microsoft.com/office/drawing/2014/main" id="{72241FBF-5260-4E1B-A1B4-EBA08F2F7B3E}"/>
+                <a16:creationId xmlns:a16="http://schemas.microsoft.com/office/drawing/2014/main" id="{6F970582-1FC7-4D0C-AC8C-AD0E9B7A9310}"/>
               </a:ext>
             </a:extLst>
           </p:cNvPr>
@@ -5126,14 +5285,14 @@
       </p:sp>
       <p:pic>
         <p:nvPicPr>
-          <p:cNvPr id="15" name="" descr="Figura oficial da documentação dbt usada para explicar: Exposure coloca o consumidor no grafo — Dashboard e agente deixam de ser dependências invisíveis.."/>
+          <p:cNvPr id="18" name="" descr="Figura oficial da documentação dbt usada para explicar: Exposure coloca o consumidor no grafo — Dashboard e agente deixam de ser dependências invisíveis.."/>
           <p:cNvPicPr>
             <a:picLocks xmlns:a="http://schemas.openxmlformats.org/drawingml/2006/main" noChangeAspect="1"/>
           </p:cNvPicPr>
           <p:nvPr/>
         </p:nvPicPr>
         <p:blipFill>
-          <a:blip xmlns:r="http://schemas.openxmlformats.org/officeDocument/2006/relationships" xmlns:a="http://schemas.openxmlformats.org/drawingml/2006/main" r:embed="R0acee4bd685442b8"/>
+          <a:blip xmlns:r="http://schemas.openxmlformats.org/officeDocument/2006/relationships" xmlns:a="http://schemas.openxmlformats.org/drawingml/2006/main" r:embed="R064009e62b5c4d00"/>
           <a:stretch xmlns:a="http://schemas.openxmlformats.org/drawingml/2006/main"/>
         </p:blipFill>
         <p:spPr>
@@ -5151,7 +5310,7 @@
           <p:cNvPr id="5" name="image-caption">
             <a:extLst xmlns:a="http://schemas.openxmlformats.org/drawingml/2006/main">
               <a:ext uri="{FF2B5EF4-FFF2-40B4-BE49-F238E27FC236}">
-                <a16:creationId xmlns:a16="http://schemas.microsoft.com/office/drawing/2014/main" id="{38AA2975-12D2-4B2F-A4F8-ACBE7695DCB3}"/>
+                <a16:creationId xmlns:a16="http://schemas.microsoft.com/office/drawing/2014/main" id="{5CB202EF-6B84-4E79-B604-7EBA5AAAAF4D}"/>
               </a:ext>
             </a:extLst>
           </p:cNvPr>
@@ -5202,7 +5361,7 @@
           <p:cNvPr id="6" name="eyebrow">
             <a:extLst xmlns:a="http://schemas.openxmlformats.org/drawingml/2006/main">
               <a:ext uri="{FF2B5EF4-FFF2-40B4-BE49-F238E27FC236}">
-                <a16:creationId xmlns:a16="http://schemas.microsoft.com/office/drawing/2014/main" id="{6F7386A9-2B19-44A0-B741-C0705E85EE61}"/>
+                <a16:creationId xmlns:a16="http://schemas.microsoft.com/office/drawing/2014/main" id="{1CDDC05F-FC9B-462A-80CA-04432DFC45AE}"/>
               </a:ext>
             </a:extLst>
           </p:cNvPr>
@@ -5250,10 +5409,69 @@
       </p:sp>
       <p:sp>
         <p:nvSpPr>
-          <p:cNvPr id="7" name="footer-rule">
-            <a:extLst xmlns:a="http://schemas.openxmlformats.org/drawingml/2006/main">
-              <a:ext uri="{FF2B5EF4-FFF2-40B4-BE49-F238E27FC236}">
-                <a16:creationId xmlns:a16="http://schemas.microsoft.com/office/drawing/2014/main" id="{1B1F1DE1-BF5A-4279-AB2B-0BC315105E78}"/>
+          <p:cNvPr id="7" name="rescue-point-logo-background">
+            <a:extLst xmlns:a="http://schemas.openxmlformats.org/drawingml/2006/main">
+              <a:ext uri="{FF2B5EF4-FFF2-40B4-BE49-F238E27FC236}">
+                <a16:creationId xmlns:a16="http://schemas.microsoft.com/office/drawing/2014/main" id="{A4C15B92-7DCC-425F-87CB-87645B2BE25E}"/>
+              </a:ext>
+            </a:extLst>
+          </p:cNvPr>
+          <p:cNvSpPr>
+            <a:spLocks xmlns:a="http://schemas.openxmlformats.org/drawingml/2006/main" noGrp="1"/>
+          </p:cNvSpPr>
+          <p:nvPr/>
+        </p:nvSpPr>
+        <p:spPr>
+          <a:xfrm xmlns:a="http://schemas.openxmlformats.org/drawingml/2006/main">
+            <a:off x="9772650" y="133350"/>
+            <a:ext cx="1733550" cy="457200"/>
+          </a:xfrm>
+          <a:prstGeom xmlns:a="http://schemas.openxmlformats.org/drawingml/2006/main" prst="roundRect">
+            <a:avLst>
+              <a:gd name="adj" fmla="val 16667"/>
+            </a:avLst>
+          </a:prstGeom>
+          <a:solidFill xmlns:a="http://schemas.openxmlformats.org/drawingml/2006/main">
+            <a:srgbClr val="06142E"/>
+          </a:solidFill>
+          <a:ln xmlns:a="http://schemas.openxmlformats.org/drawingml/2006/main" w="9525">
+            <a:solidFill>
+              <a:srgbClr val="1EC5FF">
+                <a:alpha val="33333"/>
+              </a:srgbClr>
+            </a:solidFill>
+            <a:prstDash val="solid"/>
+          </a:ln>
+        </p:spPr>
+      </p:sp>
+      <p:pic>
+        <p:nvPicPr>
+          <p:cNvPr id="22" name="" descr="Figura oficial da documentação dbt usada para explicar: Exposure coloca o consumidor no grafo — Dashboard e agente deixam de ser dependências invisíveis.."/>
+          <p:cNvPicPr>
+            <a:picLocks xmlns:a="http://schemas.openxmlformats.org/drawingml/2006/main" noChangeAspect="1"/>
+          </p:cNvPicPr>
+          <p:nvPr/>
+        </p:nvPicPr>
+        <p:blipFill>
+          <a:blip xmlns:r="http://schemas.openxmlformats.org/officeDocument/2006/relationships" xmlns:a="http://schemas.openxmlformats.org/drawingml/2006/main" r:embed="Rc4de7fda81764153"/>
+          <a:stretch xmlns:a="http://schemas.openxmlformats.org/drawingml/2006/main"/>
+        </p:blipFill>
+        <p:spPr>
+          <a:xfrm xmlns:a="http://schemas.openxmlformats.org/drawingml/2006/main">
+            <a:off x="9893718" y="209550"/>
+            <a:ext cx="1491414" cy="323850"/>
+          </a:xfrm>
+          <a:prstGeom xmlns:a="http://schemas.openxmlformats.org/drawingml/2006/main" prst="rect">
+            <a:avLst/>
+          </a:prstGeom>
+        </p:spPr>
+      </p:pic>
+      <p:sp>
+        <p:nvSpPr>
+          <p:cNvPr id="9" name="footer-rule">
+            <a:extLst xmlns:a="http://schemas.openxmlformats.org/drawingml/2006/main">
+              <a:ext uri="{FF2B5EF4-FFF2-40B4-BE49-F238E27FC236}">
+                <a16:creationId xmlns:a16="http://schemas.microsoft.com/office/drawing/2014/main" id="{B68E713C-4078-4313-8A78-8DF0FAFE1AF6}"/>
               </a:ext>
             </a:extLst>
           </p:cNvPr>
@@ -5283,10 +5501,10 @@
       </p:sp>
       <p:sp>
         <p:nvSpPr>
-          <p:cNvPr id="8" name="footer">
-            <a:extLst xmlns:a="http://schemas.openxmlformats.org/drawingml/2006/main">
-              <a:ext uri="{FF2B5EF4-FFF2-40B4-BE49-F238E27FC236}">
-                <a16:creationId xmlns:a16="http://schemas.microsoft.com/office/drawing/2014/main" id="{FF5EB512-4C82-4344-8A00-E5F30781AD2F}"/>
+          <p:cNvPr id="10" name="footer">
+            <a:extLst xmlns:a="http://schemas.openxmlformats.org/drawingml/2006/main">
+              <a:ext uri="{FF2B5EF4-FFF2-40B4-BE49-F238E27FC236}">
+                <a16:creationId xmlns:a16="http://schemas.microsoft.com/office/drawing/2014/main" id="{10EC188C-96E1-4873-A9CF-5B8AF9DBDC6A}"/>
               </a:ext>
             </a:extLst>
           </p:cNvPr>
@@ -5338,10 +5556,10 @@
       </p:sp>
       <p:sp>
         <p:nvSpPr>
-          <p:cNvPr id="9" name="page-number">
-            <a:extLst xmlns:a="http://schemas.openxmlformats.org/drawingml/2006/main">
-              <a:ext uri="{FF2B5EF4-FFF2-40B4-BE49-F238E27FC236}">
-                <a16:creationId xmlns:a16="http://schemas.microsoft.com/office/drawing/2014/main" id="{10789FE4-7DBB-44F4-9BDA-ED5FAB79ABCC}"/>
+          <p:cNvPr id="11" name="page-number">
+            <a:extLst xmlns:a="http://schemas.openxmlformats.org/drawingml/2006/main">
+              <a:ext uri="{FF2B5EF4-FFF2-40B4-BE49-F238E27FC236}">
+                <a16:creationId xmlns:a16="http://schemas.microsoft.com/office/drawing/2014/main" id="{5FCF3A3B-C4C2-4B5A-B440-85D92FD891CF}"/>
               </a:ext>
             </a:extLst>
           </p:cNvPr>
@@ -5394,7 +5612,7 @@
     </p:spTree>
     <p:extLst>
       <p:ext uri="{BB962C8B-B14F-4D97-AF65-F5344CB8AC3E}">
-        <p14:creationId xmlns:p14="http://schemas.microsoft.com/office/powerpoint/2010/main" val="417680298"/>
+        <p14:creationId xmlns:p14="http://schemas.microsoft.com/office/powerpoint/2010/main" val="655115539"/>
       </p:ext>
     </p:extLst>
   </p:cSld>
@@ -5430,10 +5648,10 @@
       </p:grpSpPr>
       <p:sp>
         <p:nvSpPr>
-          <p:cNvPr id="11" name="slide-title">
-            <a:extLst xmlns:a="http://schemas.openxmlformats.org/drawingml/2006/main">
-              <a:ext uri="{FF2B5EF4-FFF2-40B4-BE49-F238E27FC236}">
-                <a16:creationId xmlns:a16="http://schemas.microsoft.com/office/drawing/2014/main" id="{EA150306-C27F-4834-9058-CECD0A6CBDD6}"/>
+          <p:cNvPr id="13" name="slide-title">
+            <a:extLst xmlns:a="http://schemas.openxmlformats.org/drawingml/2006/main">
+              <a:ext uri="{FF2B5EF4-FFF2-40B4-BE49-F238E27FC236}">
+                <a16:creationId xmlns:a16="http://schemas.microsoft.com/office/drawing/2014/main" id="{022001E0-1682-404E-A642-86E21B1B5C08}"/>
               </a:ext>
             </a:extLst>
           </p:cNvPr>
@@ -5484,7 +5702,7 @@
           <p:cNvPr id="2" name="slide-subtitle">
             <a:extLst xmlns:a="http://schemas.openxmlformats.org/drawingml/2006/main">
               <a:ext uri="{FF2B5EF4-FFF2-40B4-BE49-F238E27FC236}">
-                <a16:creationId xmlns:a16="http://schemas.microsoft.com/office/drawing/2014/main" id="{41E745E4-2D11-4787-8AFA-EC9D03EBE437}"/>
+                <a16:creationId xmlns:a16="http://schemas.microsoft.com/office/drawing/2014/main" id="{9AA30D33-377B-4696-BECC-920D3F5CE97A}"/>
               </a:ext>
             </a:extLst>
           </p:cNvPr>
@@ -5535,7 +5753,7 @@
           <p:cNvPr id="3" name="bullets">
             <a:extLst xmlns:a="http://schemas.openxmlformats.org/drawingml/2006/main">
               <a:ext uri="{FF2B5EF4-FFF2-40B4-BE49-F238E27FC236}">
-                <a16:creationId xmlns:a16="http://schemas.microsoft.com/office/drawing/2014/main" id="{B5AF4B1B-741D-4937-AA30-CBAFDFAED327}"/>
+                <a16:creationId xmlns:a16="http://schemas.microsoft.com/office/drawing/2014/main" id="{EEEC1597-8DE5-4B0A-AB5C-EEEA89C20644}"/>
               </a:ext>
             </a:extLst>
           </p:cNvPr>
@@ -5622,7 +5840,7 @@
           <p:cNvPr id="4" name="ambient-glow">
             <a:extLst xmlns:a="http://schemas.openxmlformats.org/drawingml/2006/main">
               <a:ext uri="{FF2B5EF4-FFF2-40B4-BE49-F238E27FC236}">
-                <a16:creationId xmlns:a16="http://schemas.microsoft.com/office/drawing/2014/main" id="{23A0D8F7-A310-4B9D-BBDC-D8FEB1DBA99F}"/>
+                <a16:creationId xmlns:a16="http://schemas.microsoft.com/office/drawing/2014/main" id="{F85909BC-DB05-4266-A051-1FA252E3A92B}"/>
               </a:ext>
             </a:extLst>
           </p:cNvPr>
@@ -5659,7 +5877,7 @@
           <p:cNvPr id="5" name="ambient-core">
             <a:extLst xmlns:a="http://schemas.openxmlformats.org/drawingml/2006/main">
               <a:ext uri="{FF2B5EF4-FFF2-40B4-BE49-F238E27FC236}">
-                <a16:creationId xmlns:a16="http://schemas.microsoft.com/office/drawing/2014/main" id="{8782D3C6-B2D4-4460-8B0D-1EEF41ADDAE4}"/>
+                <a16:creationId xmlns:a16="http://schemas.microsoft.com/office/drawing/2014/main" id="{F3529184-F331-4E10-A617-55BFC532C835}"/>
               </a:ext>
             </a:extLst>
           </p:cNvPr>
@@ -5696,7 +5914,7 @@
           <p:cNvPr id="6" name="section-number">
             <a:extLst xmlns:a="http://schemas.openxmlformats.org/drawingml/2006/main">
               <a:ext uri="{FF2B5EF4-FFF2-40B4-BE49-F238E27FC236}">
-                <a16:creationId xmlns:a16="http://schemas.microsoft.com/office/drawing/2014/main" id="{A4DD9124-7288-4F2F-BB3C-6745D259765F}"/>
+                <a16:creationId xmlns:a16="http://schemas.microsoft.com/office/drawing/2014/main" id="{B43B70E2-85AA-446F-891C-2EA8DD9AE070}"/>
               </a:ext>
             </a:extLst>
           </p:cNvPr>
@@ -5747,7 +5965,7 @@
           <p:cNvPr id="7" name="eyebrow">
             <a:extLst xmlns:a="http://schemas.openxmlformats.org/drawingml/2006/main">
               <a:ext uri="{FF2B5EF4-FFF2-40B4-BE49-F238E27FC236}">
-                <a16:creationId xmlns:a16="http://schemas.microsoft.com/office/drawing/2014/main" id="{BE3B08AB-1A33-4187-84B5-743A7AE8B611}"/>
+                <a16:creationId xmlns:a16="http://schemas.microsoft.com/office/drawing/2014/main" id="{75A02502-130B-42C8-9547-5E528E1D243B}"/>
               </a:ext>
             </a:extLst>
           </p:cNvPr>
@@ -5795,10 +6013,69 @@
       </p:sp>
       <p:sp>
         <p:nvSpPr>
-          <p:cNvPr id="8" name="footer-rule">
-            <a:extLst xmlns:a="http://schemas.openxmlformats.org/drawingml/2006/main">
-              <a:ext uri="{FF2B5EF4-FFF2-40B4-BE49-F238E27FC236}">
-                <a16:creationId xmlns:a16="http://schemas.microsoft.com/office/drawing/2014/main" id="{B039CD91-8AF4-468F-9062-DF08AD48388E}"/>
+          <p:cNvPr id="8" name="rescue-point-logo-background">
+            <a:extLst xmlns:a="http://schemas.openxmlformats.org/drawingml/2006/main">
+              <a:ext uri="{FF2B5EF4-FFF2-40B4-BE49-F238E27FC236}">
+                <a16:creationId xmlns:a16="http://schemas.microsoft.com/office/drawing/2014/main" id="{B4CDDBC4-3283-4806-96E9-B8146B1DB946}"/>
+              </a:ext>
+            </a:extLst>
+          </p:cNvPr>
+          <p:cNvSpPr>
+            <a:spLocks xmlns:a="http://schemas.openxmlformats.org/drawingml/2006/main" noGrp="1"/>
+          </p:cNvSpPr>
+          <p:nvPr/>
+        </p:nvSpPr>
+        <p:spPr>
+          <a:xfrm xmlns:a="http://schemas.openxmlformats.org/drawingml/2006/main">
+            <a:off x="9772650" y="133350"/>
+            <a:ext cx="1733550" cy="457200"/>
+          </a:xfrm>
+          <a:prstGeom xmlns:a="http://schemas.openxmlformats.org/drawingml/2006/main" prst="roundRect">
+            <a:avLst>
+              <a:gd name="adj" fmla="val 16667"/>
+            </a:avLst>
+          </a:prstGeom>
+          <a:solidFill xmlns:a="http://schemas.openxmlformats.org/drawingml/2006/main">
+            <a:srgbClr val="06142E"/>
+          </a:solidFill>
+          <a:ln xmlns:a="http://schemas.openxmlformats.org/drawingml/2006/main" w="9525">
+            <a:solidFill>
+              <a:srgbClr val="1EC5FF">
+                <a:alpha val="33333"/>
+              </a:srgbClr>
+            </a:solidFill>
+            <a:prstDash val="solid"/>
+          </a:ln>
+        </p:spPr>
+      </p:sp>
+      <p:pic>
+        <p:nvPicPr>
+          <p:cNvPr id="23" name="" descr="Figura oficial da documentação dbt usada para explicar: Project Evaluator transforma convenção em teste — Regras de estrutura podem ser avaliadas como parte da CI.."/>
+          <p:cNvPicPr>
+            <a:picLocks xmlns:a="http://schemas.openxmlformats.org/drawingml/2006/main" noChangeAspect="1"/>
+          </p:cNvPicPr>
+          <p:nvPr/>
+        </p:nvPicPr>
+        <p:blipFill>
+          <a:blip xmlns:r="http://schemas.openxmlformats.org/officeDocument/2006/relationships" xmlns:a="http://schemas.openxmlformats.org/drawingml/2006/main" r:embed="Re90a7470bea647f9"/>
+          <a:stretch xmlns:a="http://schemas.openxmlformats.org/drawingml/2006/main"/>
+        </p:blipFill>
+        <p:spPr>
+          <a:xfrm xmlns:a="http://schemas.openxmlformats.org/drawingml/2006/main">
+            <a:off x="9893718" y="209550"/>
+            <a:ext cx="1491414" cy="323850"/>
+          </a:xfrm>
+          <a:prstGeom xmlns:a="http://schemas.openxmlformats.org/drawingml/2006/main" prst="rect">
+            <a:avLst/>
+          </a:prstGeom>
+        </p:spPr>
+      </p:pic>
+      <p:sp>
+        <p:nvSpPr>
+          <p:cNvPr id="10" name="footer-rule">
+            <a:extLst xmlns:a="http://schemas.openxmlformats.org/drawingml/2006/main">
+              <a:ext uri="{FF2B5EF4-FFF2-40B4-BE49-F238E27FC236}">
+                <a16:creationId xmlns:a16="http://schemas.microsoft.com/office/drawing/2014/main" id="{63F18003-DA4F-44FA-BE18-5EF7DAAC2172}"/>
               </a:ext>
             </a:extLst>
           </p:cNvPr>
@@ -5828,10 +6105,10 @@
       </p:sp>
       <p:sp>
         <p:nvSpPr>
-          <p:cNvPr id="9" name="footer">
-            <a:extLst xmlns:a="http://schemas.openxmlformats.org/drawingml/2006/main">
-              <a:ext uri="{FF2B5EF4-FFF2-40B4-BE49-F238E27FC236}">
-                <a16:creationId xmlns:a16="http://schemas.microsoft.com/office/drawing/2014/main" id="{6878ABC7-2B5B-49F5-8648-548E4B41F149}"/>
+          <p:cNvPr id="11" name="footer">
+            <a:extLst xmlns:a="http://schemas.openxmlformats.org/drawingml/2006/main">
+              <a:ext uri="{FF2B5EF4-FFF2-40B4-BE49-F238E27FC236}">
+                <a16:creationId xmlns:a16="http://schemas.microsoft.com/office/drawing/2014/main" id="{3B2740C4-8A8D-4DF7-A015-E366AAA8ED3A}"/>
               </a:ext>
             </a:extLst>
           </p:cNvPr>
@@ -5883,10 +6160,10 @@
       </p:sp>
       <p:sp>
         <p:nvSpPr>
-          <p:cNvPr id="10" name="page-number">
-            <a:extLst xmlns:a="http://schemas.openxmlformats.org/drawingml/2006/main">
-              <a:ext uri="{FF2B5EF4-FFF2-40B4-BE49-F238E27FC236}">
-                <a16:creationId xmlns:a16="http://schemas.microsoft.com/office/drawing/2014/main" id="{40BA0F82-26D1-4E42-9F95-51236BF23360}"/>
+          <p:cNvPr id="12" name="page-number">
+            <a:extLst xmlns:a="http://schemas.openxmlformats.org/drawingml/2006/main">
+              <a:ext uri="{FF2B5EF4-FFF2-40B4-BE49-F238E27FC236}">
+                <a16:creationId xmlns:a16="http://schemas.microsoft.com/office/drawing/2014/main" id="{4AFBE3F0-643F-4E3D-90EE-54507CD58040}"/>
               </a:ext>
             </a:extLst>
           </p:cNvPr>
@@ -5939,7 +6216,7 @@
     </p:spTree>
     <p:extLst>
       <p:ext uri="{BB962C8B-B14F-4D97-AF65-F5344CB8AC3E}">
-        <p14:creationId xmlns:p14="http://schemas.microsoft.com/office/powerpoint/2010/main" val="1351724783"/>
+        <p14:creationId xmlns:p14="http://schemas.microsoft.com/office/powerpoint/2010/main" val="2130725192"/>
       </p:ext>
     </p:extLst>
   </p:cSld>
@@ -5967,10 +6244,10 @@
       </p:grpSpPr>
       <p:sp>
         <p:nvSpPr>
-          <p:cNvPr id="13" name="slide-title">
-            <a:extLst xmlns:a="http://schemas.openxmlformats.org/drawingml/2006/main">
-              <a:ext uri="{FF2B5EF4-FFF2-40B4-BE49-F238E27FC236}">
-                <a16:creationId xmlns:a16="http://schemas.microsoft.com/office/drawing/2014/main" id="{0BAF7A98-E6BE-4A03-8B5A-76CBC4F57DB3}"/>
+          <p:cNvPr id="15" name="slide-title">
+            <a:extLst xmlns:a="http://schemas.openxmlformats.org/drawingml/2006/main">
+              <a:ext uri="{FF2B5EF4-FFF2-40B4-BE49-F238E27FC236}">
+                <a16:creationId xmlns:a16="http://schemas.microsoft.com/office/drawing/2014/main" id="{DC36FC21-9E36-4BFE-8DAB-89255BF86256}"/>
               </a:ext>
             </a:extLst>
           </p:cNvPr>
@@ -6021,7 +6298,7 @@
           <p:cNvPr id="2" name="flow-1">
             <a:extLst xmlns:a="http://schemas.openxmlformats.org/drawingml/2006/main">
               <a:ext uri="{FF2B5EF4-FFF2-40B4-BE49-F238E27FC236}">
-                <a16:creationId xmlns:a16="http://schemas.microsoft.com/office/drawing/2014/main" id="{0DF59D7D-EAC3-483E-8DE1-F328CB06F6CD}"/>
+                <a16:creationId xmlns:a16="http://schemas.microsoft.com/office/drawing/2014/main" id="{8456ECC7-6238-45C6-A004-2A2122CB97E9}"/>
               </a:ext>
             </a:extLst>
           </p:cNvPr>
@@ -6078,7 +6355,7 @@
           <p:cNvPr id="3" name="flow-2">
             <a:extLst xmlns:a="http://schemas.openxmlformats.org/drawingml/2006/main">
               <a:ext uri="{FF2B5EF4-FFF2-40B4-BE49-F238E27FC236}">
-                <a16:creationId xmlns:a16="http://schemas.microsoft.com/office/drawing/2014/main" id="{6F8AC1CF-6532-40AB-A44B-4A0DAB6C1B85}"/>
+                <a16:creationId xmlns:a16="http://schemas.microsoft.com/office/drawing/2014/main" id="{A8BBC6AA-955E-4D06-A5D1-8D7A6F311E70}"/>
               </a:ext>
             </a:extLst>
           </p:cNvPr>
@@ -6135,7 +6412,7 @@
           <p:cNvPr id="4" name="flow-3">
             <a:extLst xmlns:a="http://schemas.openxmlformats.org/drawingml/2006/main">
               <a:ext uri="{FF2B5EF4-FFF2-40B4-BE49-F238E27FC236}">
-                <a16:creationId xmlns:a16="http://schemas.microsoft.com/office/drawing/2014/main" id="{B9E9436F-2464-4C2D-8CBD-69A75A8A237C}"/>
+                <a16:creationId xmlns:a16="http://schemas.microsoft.com/office/drawing/2014/main" id="{C3CA1F1A-20D6-497A-B615-4F0D0DDB8303}"/>
               </a:ext>
             </a:extLst>
           </p:cNvPr>
@@ -6192,7 +6469,7 @@
           <p:cNvPr id="5" name="flow-4">
             <a:extLst xmlns:a="http://schemas.openxmlformats.org/drawingml/2006/main">
               <a:ext uri="{FF2B5EF4-FFF2-40B4-BE49-F238E27FC236}">
-                <a16:creationId xmlns:a16="http://schemas.microsoft.com/office/drawing/2014/main" id="{7FEAA2FE-EDBB-4AB4-95B2-BD6E8AB6AB65}"/>
+                <a16:creationId xmlns:a16="http://schemas.microsoft.com/office/drawing/2014/main" id="{49A70DE4-5974-4EC7-B688-6AB239D969FB}"/>
               </a:ext>
             </a:extLst>
           </p:cNvPr>
@@ -6246,7 +6523,7 @@
       </p:sp>
       <p:cxnSp>
         <p:nvCxnSpPr>
-          <p:cNvPr id="26" name=""/>
+          <p:cNvPr id="29" name=""/>
           <p:cNvCxnSpPr>
             <a:stCxn xmlns:a="http://schemas.openxmlformats.org/drawingml/2006/main" id="2" idx="3"/>
             <a:endCxn xmlns:a="http://schemas.openxmlformats.org/drawingml/2006/main" id="3" idx="1"/>
@@ -6272,7 +6549,7 @@
       </p:cxnSp>
       <p:cxnSp>
         <p:nvCxnSpPr>
-          <p:cNvPr id="27" name=""/>
+          <p:cNvPr id="30" name=""/>
           <p:cNvCxnSpPr>
             <a:stCxn xmlns:a="http://schemas.openxmlformats.org/drawingml/2006/main" id="3" idx="3"/>
             <a:endCxn xmlns:a="http://schemas.openxmlformats.org/drawingml/2006/main" id="4" idx="1"/>
@@ -6298,7 +6575,7 @@
       </p:cxnSp>
       <p:cxnSp>
         <p:nvCxnSpPr>
-          <p:cNvPr id="28" name=""/>
+          <p:cNvPr id="31" name=""/>
           <p:cNvCxnSpPr>
             <a:stCxn xmlns:a="http://schemas.openxmlformats.org/drawingml/2006/main" id="4" idx="3"/>
             <a:endCxn xmlns:a="http://schemas.openxmlformats.org/drawingml/2006/main" id="5" idx="1"/>
@@ -6327,7 +6604,7 @@
           <p:cNvPr id="9" name="eyebrow">
             <a:extLst xmlns:a="http://schemas.openxmlformats.org/drawingml/2006/main">
               <a:ext uri="{FF2B5EF4-FFF2-40B4-BE49-F238E27FC236}">
-                <a16:creationId xmlns:a16="http://schemas.microsoft.com/office/drawing/2014/main" id="{FAA66AC8-1665-4ED7-8EB5-3D4386E28D45}"/>
+                <a16:creationId xmlns:a16="http://schemas.microsoft.com/office/drawing/2014/main" id="{77B39523-8C60-4725-9D80-FC9735DDCAE6}"/>
               </a:ext>
             </a:extLst>
           </p:cNvPr>
@@ -6375,10 +6652,69 @@
       </p:sp>
       <p:sp>
         <p:nvSpPr>
-          <p:cNvPr id="10" name="footer-rule">
-            <a:extLst xmlns:a="http://schemas.openxmlformats.org/drawingml/2006/main">
-              <a:ext uri="{FF2B5EF4-FFF2-40B4-BE49-F238E27FC236}">
-                <a16:creationId xmlns:a16="http://schemas.microsoft.com/office/drawing/2014/main" id="{7DFD07A5-7284-46A2-B760-ECAE10A1B029}"/>
+          <p:cNvPr id="10" name="rescue-point-logo-background">
+            <a:extLst xmlns:a="http://schemas.openxmlformats.org/drawingml/2006/main">
+              <a:ext uri="{FF2B5EF4-FFF2-40B4-BE49-F238E27FC236}">
+                <a16:creationId xmlns:a16="http://schemas.microsoft.com/office/drawing/2014/main" id="{9C3D33FD-729C-4B06-86D0-17F904DC4CBE}"/>
+              </a:ext>
+            </a:extLst>
+          </p:cNvPr>
+          <p:cNvSpPr>
+            <a:spLocks xmlns:a="http://schemas.openxmlformats.org/drawingml/2006/main" noGrp="1"/>
+          </p:cNvSpPr>
+          <p:nvPr/>
+        </p:nvSpPr>
+        <p:spPr>
+          <a:xfrm xmlns:a="http://schemas.openxmlformats.org/drawingml/2006/main">
+            <a:off x="9772650" y="133350"/>
+            <a:ext cx="1733550" cy="457200"/>
+          </a:xfrm>
+          <a:prstGeom xmlns:a="http://schemas.openxmlformats.org/drawingml/2006/main" prst="roundRect">
+            <a:avLst>
+              <a:gd name="adj" fmla="val 16667"/>
+            </a:avLst>
+          </a:prstGeom>
+          <a:solidFill xmlns:a="http://schemas.openxmlformats.org/drawingml/2006/main">
+            <a:srgbClr val="06142E"/>
+          </a:solidFill>
+          <a:ln xmlns:a="http://schemas.openxmlformats.org/drawingml/2006/main" w="9525">
+            <a:solidFill>
+              <a:srgbClr val="1EC5FF">
+                <a:alpha val="33333"/>
+              </a:srgbClr>
+            </a:solidFill>
+            <a:prstDash val="solid"/>
+          </a:ln>
+        </p:spPr>
+      </p:sp>
+      <p:pic>
+        <p:nvPicPr>
+          <p:cNvPr id="34" name="" descr="Figura oficial da documentação dbt usada para explicar: Project Evaluator transforma convenção em teste — Projeto."/>
+          <p:cNvPicPr>
+            <a:picLocks xmlns:a="http://schemas.openxmlformats.org/drawingml/2006/main" noChangeAspect="1"/>
+          </p:cNvPicPr>
+          <p:nvPr/>
+        </p:nvPicPr>
+        <p:blipFill>
+          <a:blip xmlns:r="http://schemas.openxmlformats.org/officeDocument/2006/relationships" xmlns:a="http://schemas.openxmlformats.org/drawingml/2006/main" r:embed="R79c1f1de06344469"/>
+          <a:stretch xmlns:a="http://schemas.openxmlformats.org/drawingml/2006/main"/>
+        </p:blipFill>
+        <p:spPr>
+          <a:xfrm xmlns:a="http://schemas.openxmlformats.org/drawingml/2006/main">
+            <a:off x="9893718" y="209550"/>
+            <a:ext cx="1491414" cy="323850"/>
+          </a:xfrm>
+          <a:prstGeom xmlns:a="http://schemas.openxmlformats.org/drawingml/2006/main" prst="rect">
+            <a:avLst/>
+          </a:prstGeom>
+        </p:spPr>
+      </p:pic>
+      <p:sp>
+        <p:nvSpPr>
+          <p:cNvPr id="12" name="footer-rule">
+            <a:extLst xmlns:a="http://schemas.openxmlformats.org/drawingml/2006/main">
+              <a:ext uri="{FF2B5EF4-FFF2-40B4-BE49-F238E27FC236}">
+                <a16:creationId xmlns:a16="http://schemas.microsoft.com/office/drawing/2014/main" id="{BB2D841B-E0A7-4D65-A99E-E113F04E3FE7}"/>
               </a:ext>
             </a:extLst>
           </p:cNvPr>
@@ -6408,10 +6744,10 @@
       </p:sp>
       <p:sp>
         <p:nvSpPr>
-          <p:cNvPr id="11" name="footer">
-            <a:extLst xmlns:a="http://schemas.openxmlformats.org/drawingml/2006/main">
-              <a:ext uri="{FF2B5EF4-FFF2-40B4-BE49-F238E27FC236}">
-                <a16:creationId xmlns:a16="http://schemas.microsoft.com/office/drawing/2014/main" id="{C266FC35-2DDA-4E42-AFE4-9C1EA611FD69}"/>
+          <p:cNvPr id="13" name="footer">
+            <a:extLst xmlns:a="http://schemas.openxmlformats.org/drawingml/2006/main">
+              <a:ext uri="{FF2B5EF4-FFF2-40B4-BE49-F238E27FC236}">
+                <a16:creationId xmlns:a16="http://schemas.microsoft.com/office/drawing/2014/main" id="{085F4FD9-7120-4673-8DC2-A06839468245}"/>
               </a:ext>
             </a:extLst>
           </p:cNvPr>
@@ -6463,10 +6799,10 @@
       </p:sp>
       <p:sp>
         <p:nvSpPr>
-          <p:cNvPr id="12" name="page-number">
-            <a:extLst xmlns:a="http://schemas.openxmlformats.org/drawingml/2006/main">
-              <a:ext uri="{FF2B5EF4-FFF2-40B4-BE49-F238E27FC236}">
-                <a16:creationId xmlns:a16="http://schemas.microsoft.com/office/drawing/2014/main" id="{485D2797-8A90-428E-A432-C51BD8832986}"/>
+          <p:cNvPr id="14" name="page-number">
+            <a:extLst xmlns:a="http://schemas.openxmlformats.org/drawingml/2006/main">
+              <a:ext uri="{FF2B5EF4-FFF2-40B4-BE49-F238E27FC236}">
+                <a16:creationId xmlns:a16="http://schemas.microsoft.com/office/drawing/2014/main" id="{EE0B99FF-906D-4176-A317-DD0797461748}"/>
               </a:ext>
             </a:extLst>
           </p:cNvPr>
@@ -6519,7 +6855,7 @@
     </p:spTree>
     <p:extLst>
       <p:ext uri="{BB962C8B-B14F-4D97-AF65-F5344CB8AC3E}">
-        <p14:creationId xmlns:p14="http://schemas.microsoft.com/office/powerpoint/2010/main" val="202482568"/>
+        <p14:creationId xmlns:p14="http://schemas.microsoft.com/office/powerpoint/2010/main" val="1148590136"/>
       </p:ext>
     </p:extLst>
   </p:cSld>
@@ -6555,10 +6891,10 @@
       </p:grpSpPr>
       <p:sp>
         <p:nvSpPr>
-          <p:cNvPr id="9" name="slide-title">
-            <a:extLst xmlns:a="http://schemas.openxmlformats.org/drawingml/2006/main">
-              <a:ext uri="{FF2B5EF4-FFF2-40B4-BE49-F238E27FC236}">
-                <a16:creationId xmlns:a16="http://schemas.microsoft.com/office/drawing/2014/main" id="{6FF5DA5C-8010-496D-97B8-C149BFC13766}"/>
+          <p:cNvPr id="11" name="slide-title">
+            <a:extLst xmlns:a="http://schemas.openxmlformats.org/drawingml/2006/main">
+              <a:ext uri="{FF2B5EF4-FFF2-40B4-BE49-F238E27FC236}">
+                <a16:creationId xmlns:a16="http://schemas.microsoft.com/office/drawing/2014/main" id="{6D077EBC-E3BF-4655-AF08-C2718E820D1E}"/>
               </a:ext>
             </a:extLst>
           </p:cNvPr>
@@ -6609,7 +6945,7 @@
           <p:cNvPr id="2" name="code-surface">
             <a:extLst xmlns:a="http://schemas.openxmlformats.org/drawingml/2006/main">
               <a:ext uri="{FF2B5EF4-FFF2-40B4-BE49-F238E27FC236}">
-                <a16:creationId xmlns:a16="http://schemas.microsoft.com/office/drawing/2014/main" id="{6057C99C-4479-4835-90E0-460D777C0AB6}"/>
+                <a16:creationId xmlns:a16="http://schemas.microsoft.com/office/drawing/2014/main" id="{D69B72AC-5ADD-43F2-9365-3E46AB25DE55}"/>
               </a:ext>
             </a:extLst>
           </p:cNvPr>
@@ -6644,7 +6980,7 @@
           <p:cNvPr id="3" name="command">
             <a:extLst xmlns:a="http://schemas.openxmlformats.org/drawingml/2006/main">
               <a:ext uri="{FF2B5EF4-FFF2-40B4-BE49-F238E27FC236}">
-                <a16:creationId xmlns:a16="http://schemas.microsoft.com/office/drawing/2014/main" id="{EADE8322-684F-4CEA-B8A5-24F5BFD4E57F}"/>
+                <a16:creationId xmlns:a16="http://schemas.microsoft.com/office/drawing/2014/main" id="{F82A712F-0EF7-4B68-8D7D-3BF0302FA7F2}"/>
               </a:ext>
             </a:extLst>
           </p:cNvPr>
@@ -6695,7 +7031,7 @@
           <p:cNvPr id="4" name="command-help">
             <a:extLst xmlns:a="http://schemas.openxmlformats.org/drawingml/2006/main">
               <a:ext uri="{FF2B5EF4-FFF2-40B4-BE49-F238E27FC236}">
-                <a16:creationId xmlns:a16="http://schemas.microsoft.com/office/drawing/2014/main" id="{E16700A7-678A-48B7-AF1A-9F02C5F9B6DC}"/>
+                <a16:creationId xmlns:a16="http://schemas.microsoft.com/office/drawing/2014/main" id="{EF673D62-48B4-413C-8C0C-86669F92B24F}"/>
               </a:ext>
             </a:extLst>
           </p:cNvPr>
@@ -6746,7 +7082,7 @@
           <p:cNvPr id="5" name="eyebrow">
             <a:extLst xmlns:a="http://schemas.openxmlformats.org/drawingml/2006/main">
               <a:ext uri="{FF2B5EF4-FFF2-40B4-BE49-F238E27FC236}">
-                <a16:creationId xmlns:a16="http://schemas.microsoft.com/office/drawing/2014/main" id="{7C589221-511E-4DF4-A2BE-D4F825671536}"/>
+                <a16:creationId xmlns:a16="http://schemas.microsoft.com/office/drawing/2014/main" id="{C756CB51-FCCF-43B8-AE07-06C4B7993AA5}"/>
               </a:ext>
             </a:extLst>
           </p:cNvPr>
@@ -6794,10 +7130,69 @@
       </p:sp>
       <p:sp>
         <p:nvSpPr>
-          <p:cNvPr id="6" name="footer-rule">
-            <a:extLst xmlns:a="http://schemas.openxmlformats.org/drawingml/2006/main">
-              <a:ext uri="{FF2B5EF4-FFF2-40B4-BE49-F238E27FC236}">
-                <a16:creationId xmlns:a16="http://schemas.microsoft.com/office/drawing/2014/main" id="{687DD045-FE57-482B-965F-1D6537246C80}"/>
+          <p:cNvPr id="6" name="rescue-point-logo-background">
+            <a:extLst xmlns:a="http://schemas.openxmlformats.org/drawingml/2006/main">
+              <a:ext uri="{FF2B5EF4-FFF2-40B4-BE49-F238E27FC236}">
+                <a16:creationId xmlns:a16="http://schemas.microsoft.com/office/drawing/2014/main" id="{BB411DF4-EAE4-46A5-8491-513D41866C17}"/>
+              </a:ext>
+            </a:extLst>
+          </p:cNvPr>
+          <p:cNvSpPr>
+            <a:spLocks xmlns:a="http://schemas.openxmlformats.org/drawingml/2006/main" noGrp="1"/>
+          </p:cNvSpPr>
+          <p:nvPr/>
+        </p:nvSpPr>
+        <p:spPr>
+          <a:xfrm xmlns:a="http://schemas.openxmlformats.org/drawingml/2006/main">
+            <a:off x="9772650" y="133350"/>
+            <a:ext cx="1733550" cy="457200"/>
+          </a:xfrm>
+          <a:prstGeom xmlns:a="http://schemas.openxmlformats.org/drawingml/2006/main" prst="roundRect">
+            <a:avLst>
+              <a:gd name="adj" fmla="val 16667"/>
+            </a:avLst>
+          </a:prstGeom>
+          <a:solidFill xmlns:a="http://schemas.openxmlformats.org/drawingml/2006/main">
+            <a:srgbClr val="06142E"/>
+          </a:solidFill>
+          <a:ln xmlns:a="http://schemas.openxmlformats.org/drawingml/2006/main" w="9525">
+            <a:solidFill>
+              <a:srgbClr val="1EC5FF">
+                <a:alpha val="33333"/>
+              </a:srgbClr>
+            </a:solidFill>
+            <a:prstDash val="solid"/>
+          </a:ln>
+        </p:spPr>
+      </p:sp>
+      <p:pic>
+        <p:nvPicPr>
+          <p:cNvPr id="19" name="" descr="Figura oficial da documentação dbt usada para explicar: Demonstração — execute — python course.py checkpoint 07."/>
+          <p:cNvPicPr>
+            <a:picLocks xmlns:a="http://schemas.openxmlformats.org/drawingml/2006/main" noChangeAspect="1"/>
+          </p:cNvPicPr>
+          <p:nvPr/>
+        </p:nvPicPr>
+        <p:blipFill>
+          <a:blip xmlns:r="http://schemas.openxmlformats.org/officeDocument/2006/relationships" xmlns:a="http://schemas.openxmlformats.org/drawingml/2006/main" r:embed="R58d6ef70d685441f"/>
+          <a:stretch xmlns:a="http://schemas.openxmlformats.org/drawingml/2006/main"/>
+        </p:blipFill>
+        <p:spPr>
+          <a:xfrm xmlns:a="http://schemas.openxmlformats.org/drawingml/2006/main">
+            <a:off x="9893718" y="209550"/>
+            <a:ext cx="1491414" cy="323850"/>
+          </a:xfrm>
+          <a:prstGeom xmlns:a="http://schemas.openxmlformats.org/drawingml/2006/main" prst="rect">
+            <a:avLst/>
+          </a:prstGeom>
+        </p:spPr>
+      </p:pic>
+      <p:sp>
+        <p:nvSpPr>
+          <p:cNvPr id="8" name="footer-rule">
+            <a:extLst xmlns:a="http://schemas.openxmlformats.org/drawingml/2006/main">
+              <a:ext uri="{FF2B5EF4-FFF2-40B4-BE49-F238E27FC236}">
+                <a16:creationId xmlns:a16="http://schemas.microsoft.com/office/drawing/2014/main" id="{AB5EE750-5BAB-4CE2-B6CD-682B29CA73E7}"/>
               </a:ext>
             </a:extLst>
           </p:cNvPr>
@@ -6827,10 +7222,10 @@
       </p:sp>
       <p:sp>
         <p:nvSpPr>
-          <p:cNvPr id="7" name="footer">
-            <a:extLst xmlns:a="http://schemas.openxmlformats.org/drawingml/2006/main">
-              <a:ext uri="{FF2B5EF4-FFF2-40B4-BE49-F238E27FC236}">
-                <a16:creationId xmlns:a16="http://schemas.microsoft.com/office/drawing/2014/main" id="{B6E6E6CC-8E57-425D-84A8-104C5BBD3798}"/>
+          <p:cNvPr id="9" name="footer">
+            <a:extLst xmlns:a="http://schemas.openxmlformats.org/drawingml/2006/main">
+              <a:ext uri="{FF2B5EF4-FFF2-40B4-BE49-F238E27FC236}">
+                <a16:creationId xmlns:a16="http://schemas.microsoft.com/office/drawing/2014/main" id="{7E9FE19B-A9A2-4C9C-895E-38C5AB3D15C9}"/>
               </a:ext>
             </a:extLst>
           </p:cNvPr>
@@ -6882,10 +7277,10 @@
       </p:sp>
       <p:sp>
         <p:nvSpPr>
-          <p:cNvPr id="8" name="page-number">
-            <a:extLst xmlns:a="http://schemas.openxmlformats.org/drawingml/2006/main">
-              <a:ext uri="{FF2B5EF4-FFF2-40B4-BE49-F238E27FC236}">
-                <a16:creationId xmlns:a16="http://schemas.microsoft.com/office/drawing/2014/main" id="{3D53FBE1-8B37-4641-8313-1B6EEEB1B875}"/>
+          <p:cNvPr id="10" name="page-number">
+            <a:extLst xmlns:a="http://schemas.openxmlformats.org/drawingml/2006/main">
+              <a:ext uri="{FF2B5EF4-FFF2-40B4-BE49-F238E27FC236}">
+                <a16:creationId xmlns:a16="http://schemas.microsoft.com/office/drawing/2014/main" id="{B146F2D6-0CB5-4BFE-8AA9-A8F982BFB70B}"/>
               </a:ext>
             </a:extLst>
           </p:cNvPr>
@@ -6938,7 +7333,7 @@
     </p:spTree>
     <p:extLst>
       <p:ext uri="{BB962C8B-B14F-4D97-AF65-F5344CB8AC3E}">
-        <p14:creationId xmlns:p14="http://schemas.microsoft.com/office/powerpoint/2010/main" val="1483596297"/>
+        <p14:creationId xmlns:p14="http://schemas.microsoft.com/office/powerpoint/2010/main" val="709669922"/>
       </p:ext>
     </p:extLst>
   </p:cSld>
@@ -6966,10 +7361,10 @@
       </p:grpSpPr>
       <p:sp>
         <p:nvSpPr>
-          <p:cNvPr id="14" name="slide-title">
-            <a:extLst xmlns:a="http://schemas.openxmlformats.org/drawingml/2006/main">
-              <a:ext uri="{FF2B5EF4-FFF2-40B4-BE49-F238E27FC236}">
-                <a16:creationId xmlns:a16="http://schemas.microsoft.com/office/drawing/2014/main" id="{51EDC443-D5D4-4228-8B1D-44FC0B3C4ED8}"/>
+          <p:cNvPr id="16" name="slide-title">
+            <a:extLst xmlns:a="http://schemas.openxmlformats.org/drawingml/2006/main">
+              <a:ext uri="{FF2B5EF4-FFF2-40B4-BE49-F238E27FC236}">
+                <a16:creationId xmlns:a16="http://schemas.microsoft.com/office/drawing/2014/main" id="{0D821C40-CFD3-4F49-93C1-5DD86987F1B9}"/>
               </a:ext>
             </a:extLst>
           </p:cNvPr>
@@ -7020,7 +7415,7 @@
           <p:cNvPr id="2" name="step-num-1">
             <a:extLst xmlns:a="http://schemas.openxmlformats.org/drawingml/2006/main">
               <a:ext uri="{FF2B5EF4-FFF2-40B4-BE49-F238E27FC236}">
-                <a16:creationId xmlns:a16="http://schemas.microsoft.com/office/drawing/2014/main" id="{B4893569-0751-4BC0-B8E1-358E1E5BF113}"/>
+                <a16:creationId xmlns:a16="http://schemas.microsoft.com/office/drawing/2014/main" id="{34360C33-9A62-49AC-884D-F2FFF9310A85}"/>
               </a:ext>
             </a:extLst>
           </p:cNvPr>
@@ -7071,7 +7466,7 @@
           <p:cNvPr id="3" name="step-label-1">
             <a:extLst xmlns:a="http://schemas.openxmlformats.org/drawingml/2006/main">
               <a:ext uri="{FF2B5EF4-FFF2-40B4-BE49-F238E27FC236}">
-                <a16:creationId xmlns:a16="http://schemas.microsoft.com/office/drawing/2014/main" id="{F5AABBCD-6219-4738-9E32-5C8439E6A96A}"/>
+                <a16:creationId xmlns:a16="http://schemas.microsoft.com/office/drawing/2014/main" id="{FB448537-A69D-4ED2-8EE0-944F4E06BB40}"/>
               </a:ext>
             </a:extLst>
           </p:cNvPr>
@@ -7122,7 +7517,7 @@
           <p:cNvPr id="4" name="step-line-1">
             <a:extLst xmlns:a="http://schemas.openxmlformats.org/drawingml/2006/main">
               <a:ext uri="{FF2B5EF4-FFF2-40B4-BE49-F238E27FC236}">
-                <a16:creationId xmlns:a16="http://schemas.microsoft.com/office/drawing/2014/main" id="{8E325C1A-8A55-44D1-BD98-7052F5BE56CB}"/>
+                <a16:creationId xmlns:a16="http://schemas.microsoft.com/office/drawing/2014/main" id="{DDE42D4C-DD5C-4167-90C4-90D123A2D738}"/>
               </a:ext>
             </a:extLst>
           </p:cNvPr>
@@ -7153,7 +7548,7 @@
           <p:cNvPr id="5" name="step-num-2">
             <a:extLst xmlns:a="http://schemas.openxmlformats.org/drawingml/2006/main">
               <a:ext uri="{FF2B5EF4-FFF2-40B4-BE49-F238E27FC236}">
-                <a16:creationId xmlns:a16="http://schemas.microsoft.com/office/drawing/2014/main" id="{5DF5E0FC-2306-4DDE-BE55-6DA13EAA172C}"/>
+                <a16:creationId xmlns:a16="http://schemas.microsoft.com/office/drawing/2014/main" id="{687A1A78-84B0-4668-ADD0-86075B25C74D}"/>
               </a:ext>
             </a:extLst>
           </p:cNvPr>
@@ -7204,7 +7599,7 @@
           <p:cNvPr id="6" name="step-label-2">
             <a:extLst xmlns:a="http://schemas.openxmlformats.org/drawingml/2006/main">
               <a:ext uri="{FF2B5EF4-FFF2-40B4-BE49-F238E27FC236}">
-                <a16:creationId xmlns:a16="http://schemas.microsoft.com/office/drawing/2014/main" id="{F43350A8-C479-44E2-A359-670131137A29}"/>
+                <a16:creationId xmlns:a16="http://schemas.microsoft.com/office/drawing/2014/main" id="{878D1A6A-D8D8-45AE-A12E-BA0EC8251B4F}"/>
               </a:ext>
             </a:extLst>
           </p:cNvPr>
@@ -7255,7 +7650,7 @@
           <p:cNvPr id="7" name="step-line-2">
             <a:extLst xmlns:a="http://schemas.openxmlformats.org/drawingml/2006/main">
               <a:ext uri="{FF2B5EF4-FFF2-40B4-BE49-F238E27FC236}">
-                <a16:creationId xmlns:a16="http://schemas.microsoft.com/office/drawing/2014/main" id="{29C2B846-820D-4329-955C-231C1C9896F1}"/>
+                <a16:creationId xmlns:a16="http://schemas.microsoft.com/office/drawing/2014/main" id="{C8B66049-6875-48F3-B1B9-2707EF4DB497}"/>
               </a:ext>
             </a:extLst>
           </p:cNvPr>
@@ -7286,7 +7681,7 @@
           <p:cNvPr id="8" name="step-num-3">
             <a:extLst xmlns:a="http://schemas.openxmlformats.org/drawingml/2006/main">
               <a:ext uri="{FF2B5EF4-FFF2-40B4-BE49-F238E27FC236}">
-                <a16:creationId xmlns:a16="http://schemas.microsoft.com/office/drawing/2014/main" id="{439DEAD9-35C8-4E81-9F33-42E770F28924}"/>
+                <a16:creationId xmlns:a16="http://schemas.microsoft.com/office/drawing/2014/main" id="{9A067F27-7FC3-4027-B079-9A53E71086C9}"/>
               </a:ext>
             </a:extLst>
           </p:cNvPr>
@@ -7337,7 +7732,7 @@
           <p:cNvPr id="9" name="step-label-3">
             <a:extLst xmlns:a="http://schemas.openxmlformats.org/drawingml/2006/main">
               <a:ext uri="{FF2B5EF4-FFF2-40B4-BE49-F238E27FC236}">
-                <a16:creationId xmlns:a16="http://schemas.microsoft.com/office/drawing/2014/main" id="{2C93C406-7EC3-4DC7-80C4-1C415A672774}"/>
+                <a16:creationId xmlns:a16="http://schemas.microsoft.com/office/drawing/2014/main" id="{56BE0207-D6A2-421A-9D6D-F934B152BBA2}"/>
               </a:ext>
             </a:extLst>
           </p:cNvPr>
@@ -7388,7 +7783,7 @@
           <p:cNvPr id="10" name="eyebrow">
             <a:extLst xmlns:a="http://schemas.openxmlformats.org/drawingml/2006/main">
               <a:ext uri="{FF2B5EF4-FFF2-40B4-BE49-F238E27FC236}">
-                <a16:creationId xmlns:a16="http://schemas.microsoft.com/office/drawing/2014/main" id="{26AF8400-9491-47F3-BBB3-702B1F58DA51}"/>
+                <a16:creationId xmlns:a16="http://schemas.microsoft.com/office/drawing/2014/main" id="{54D7F6C8-C7DE-444E-977F-2B1BF0852C65}"/>
               </a:ext>
             </a:extLst>
           </p:cNvPr>
@@ -7436,10 +7831,69 @@
       </p:sp>
       <p:sp>
         <p:nvSpPr>
-          <p:cNvPr id="11" name="footer-rule">
-            <a:extLst xmlns:a="http://schemas.openxmlformats.org/drawingml/2006/main">
-              <a:ext uri="{FF2B5EF4-FFF2-40B4-BE49-F238E27FC236}">
-                <a16:creationId xmlns:a16="http://schemas.microsoft.com/office/drawing/2014/main" id="{A1F8D5AB-3E4F-4B84-9CAC-2CBB23FD35CC}"/>
+          <p:cNvPr id="11" name="rescue-point-logo-background">
+            <a:extLst xmlns:a="http://schemas.openxmlformats.org/drawingml/2006/main">
+              <a:ext uri="{FF2B5EF4-FFF2-40B4-BE49-F238E27FC236}">
+                <a16:creationId xmlns:a16="http://schemas.microsoft.com/office/drawing/2014/main" id="{563B892E-498A-4F8F-8834-6C5A08ABBF18}"/>
+              </a:ext>
+            </a:extLst>
+          </p:cNvPr>
+          <p:cNvSpPr>
+            <a:spLocks xmlns:a="http://schemas.openxmlformats.org/drawingml/2006/main" noGrp="1"/>
+          </p:cNvSpPr>
+          <p:nvPr/>
+        </p:nvSpPr>
+        <p:spPr>
+          <a:xfrm xmlns:a="http://schemas.openxmlformats.org/drawingml/2006/main">
+            <a:off x="9772650" y="133350"/>
+            <a:ext cx="1733550" cy="457200"/>
+          </a:xfrm>
+          <a:prstGeom xmlns:a="http://schemas.openxmlformats.org/drawingml/2006/main" prst="roundRect">
+            <a:avLst>
+              <a:gd name="adj" fmla="val 16667"/>
+            </a:avLst>
+          </a:prstGeom>
+          <a:solidFill xmlns:a="http://schemas.openxmlformats.org/drawingml/2006/main">
+            <a:srgbClr val="06142E"/>
+          </a:solidFill>
+          <a:ln xmlns:a="http://schemas.openxmlformats.org/drawingml/2006/main" w="9525">
+            <a:solidFill>
+              <a:srgbClr val="1EC5FF">
+                <a:alpha val="33333"/>
+              </a:srgbClr>
+            </a:solidFill>
+            <a:prstDash val="solid"/>
+          </a:ln>
+        </p:spPr>
+      </p:sp>
+      <p:pic>
+        <p:nvPicPr>
+          <p:cNvPr id="29" name="" descr="Figura oficial da documentação dbt usada para explicar: Demonstração — observe — 01."/>
+          <p:cNvPicPr>
+            <a:picLocks xmlns:a="http://schemas.openxmlformats.org/drawingml/2006/main" noChangeAspect="1"/>
+          </p:cNvPicPr>
+          <p:nvPr/>
+        </p:nvPicPr>
+        <p:blipFill>
+          <a:blip xmlns:r="http://schemas.openxmlformats.org/officeDocument/2006/relationships" xmlns:a="http://schemas.openxmlformats.org/drawingml/2006/main" r:embed="R125f237a05e446cb"/>
+          <a:stretch xmlns:a="http://schemas.openxmlformats.org/drawingml/2006/main"/>
+        </p:blipFill>
+        <p:spPr>
+          <a:xfrm xmlns:a="http://schemas.openxmlformats.org/drawingml/2006/main">
+            <a:off x="9893718" y="209550"/>
+            <a:ext cx="1491414" cy="323850"/>
+          </a:xfrm>
+          <a:prstGeom xmlns:a="http://schemas.openxmlformats.org/drawingml/2006/main" prst="rect">
+            <a:avLst/>
+          </a:prstGeom>
+        </p:spPr>
+      </p:pic>
+      <p:sp>
+        <p:nvSpPr>
+          <p:cNvPr id="13" name="footer-rule">
+            <a:extLst xmlns:a="http://schemas.openxmlformats.org/drawingml/2006/main">
+              <a:ext uri="{FF2B5EF4-FFF2-40B4-BE49-F238E27FC236}">
+                <a16:creationId xmlns:a16="http://schemas.microsoft.com/office/drawing/2014/main" id="{047D876B-CDA5-40E8-AC04-08FD37BE9824}"/>
               </a:ext>
             </a:extLst>
           </p:cNvPr>
@@ -7469,10 +7923,10 @@
       </p:sp>
       <p:sp>
         <p:nvSpPr>
-          <p:cNvPr id="12" name="footer">
-            <a:extLst xmlns:a="http://schemas.openxmlformats.org/drawingml/2006/main">
-              <a:ext uri="{FF2B5EF4-FFF2-40B4-BE49-F238E27FC236}">
-                <a16:creationId xmlns:a16="http://schemas.microsoft.com/office/drawing/2014/main" id="{B281C163-A413-4C98-98FD-73D913F21CDB}"/>
+          <p:cNvPr id="14" name="footer">
+            <a:extLst xmlns:a="http://schemas.openxmlformats.org/drawingml/2006/main">
+              <a:ext uri="{FF2B5EF4-FFF2-40B4-BE49-F238E27FC236}">
+                <a16:creationId xmlns:a16="http://schemas.microsoft.com/office/drawing/2014/main" id="{011800EC-D65B-4F8B-95E7-32259F2BEBB6}"/>
               </a:ext>
             </a:extLst>
           </p:cNvPr>
@@ -7524,10 +7978,10 @@
       </p:sp>
       <p:sp>
         <p:nvSpPr>
-          <p:cNvPr id="13" name="page-number">
-            <a:extLst xmlns:a="http://schemas.openxmlformats.org/drawingml/2006/main">
-              <a:ext uri="{FF2B5EF4-FFF2-40B4-BE49-F238E27FC236}">
-                <a16:creationId xmlns:a16="http://schemas.microsoft.com/office/drawing/2014/main" id="{3FCE9F61-F042-48D4-86DF-D9671523D83E}"/>
+          <p:cNvPr id="15" name="page-number">
+            <a:extLst xmlns:a="http://schemas.openxmlformats.org/drawingml/2006/main">
+              <a:ext uri="{FF2B5EF4-FFF2-40B4-BE49-F238E27FC236}">
+                <a16:creationId xmlns:a16="http://schemas.microsoft.com/office/drawing/2014/main" id="{0DF7FEF4-2B19-47D1-923B-34EF17CCF6D2}"/>
               </a:ext>
             </a:extLst>
           </p:cNvPr>
@@ -7580,7 +8034,7 @@
     </p:spTree>
     <p:extLst>
       <p:ext uri="{BB962C8B-B14F-4D97-AF65-F5344CB8AC3E}">
-        <p14:creationId xmlns:p14="http://schemas.microsoft.com/office/powerpoint/2010/main" val="1621065321"/>
+        <p14:creationId xmlns:p14="http://schemas.microsoft.com/office/powerpoint/2010/main" val="1076391515"/>
       </p:ext>
     </p:extLst>
   </p:cSld>
@@ -7616,10 +8070,10 @@
       </p:grpSpPr>
       <p:sp>
         <p:nvSpPr>
-          <p:cNvPr id="10" name="result-label">
-            <a:extLst xmlns:a="http://schemas.openxmlformats.org/drawingml/2006/main">
-              <a:ext uri="{FF2B5EF4-FFF2-40B4-BE49-F238E27FC236}">
-                <a16:creationId xmlns:a16="http://schemas.microsoft.com/office/drawing/2014/main" id="{AD1966EB-9547-4F48-A46F-7A559BC90BC5}"/>
+          <p:cNvPr id="12" name="result-label">
+            <a:extLst xmlns:a="http://schemas.openxmlformats.org/drawingml/2006/main">
+              <a:ext uri="{FF2B5EF4-FFF2-40B4-BE49-F238E27FC236}">
+                <a16:creationId xmlns:a16="http://schemas.microsoft.com/office/drawing/2014/main" id="{7C2D1053-C0D6-4F0B-B9FA-BB599227419C}"/>
               </a:ext>
             </a:extLst>
           </p:cNvPr>
@@ -7670,7 +8124,7 @@
           <p:cNvPr id="2" name="result">
             <a:extLst xmlns:a="http://schemas.openxmlformats.org/drawingml/2006/main">
               <a:ext uri="{FF2B5EF4-FFF2-40B4-BE49-F238E27FC236}">
-                <a16:creationId xmlns:a16="http://schemas.microsoft.com/office/drawing/2014/main" id="{17DD5CB9-16C1-4351-90C3-55CC0F2B73A9}"/>
+                <a16:creationId xmlns:a16="http://schemas.microsoft.com/office/drawing/2014/main" id="{43BD6E41-EC9F-4E64-90E3-307D241880E3}"/>
               </a:ext>
             </a:extLst>
           </p:cNvPr>
@@ -7721,7 +8175,7 @@
           <p:cNvPr id="3" name="result-meta">
             <a:extLst xmlns:a="http://schemas.openxmlformats.org/drawingml/2006/main">
               <a:ext uri="{FF2B5EF4-FFF2-40B4-BE49-F238E27FC236}">
-                <a16:creationId xmlns:a16="http://schemas.microsoft.com/office/drawing/2014/main" id="{30EEE164-663E-4D7D-99D3-C0B5503CEB05}"/>
+                <a16:creationId xmlns:a16="http://schemas.microsoft.com/office/drawing/2014/main" id="{86EE7F78-C197-46E9-9609-DC0A10B7D7E6}"/>
               </a:ext>
             </a:extLst>
           </p:cNvPr>
@@ -7772,7 +8226,7 @@
           <p:cNvPr id="4" name="ambient-glow">
             <a:extLst xmlns:a="http://schemas.openxmlformats.org/drawingml/2006/main">
               <a:ext uri="{FF2B5EF4-FFF2-40B4-BE49-F238E27FC236}">
-                <a16:creationId xmlns:a16="http://schemas.microsoft.com/office/drawing/2014/main" id="{278B168C-0B73-4714-8E6E-2EB7820BE156}"/>
+                <a16:creationId xmlns:a16="http://schemas.microsoft.com/office/drawing/2014/main" id="{C8C490CF-2250-4361-80C3-ECE1970E8254}"/>
               </a:ext>
             </a:extLst>
           </p:cNvPr>
@@ -7809,7 +8263,7 @@
           <p:cNvPr id="5" name="ambient-core">
             <a:extLst xmlns:a="http://schemas.openxmlformats.org/drawingml/2006/main">
               <a:ext uri="{FF2B5EF4-FFF2-40B4-BE49-F238E27FC236}">
-                <a16:creationId xmlns:a16="http://schemas.microsoft.com/office/drawing/2014/main" id="{D2CA62B9-61B8-4BE2-A3C9-FC9596ECA36B}"/>
+                <a16:creationId xmlns:a16="http://schemas.microsoft.com/office/drawing/2014/main" id="{ED1904EC-0789-4399-B228-51D4701E5FC0}"/>
               </a:ext>
             </a:extLst>
           </p:cNvPr>
@@ -7846,7 +8300,7 @@
           <p:cNvPr id="6" name="eyebrow">
             <a:extLst xmlns:a="http://schemas.openxmlformats.org/drawingml/2006/main">
               <a:ext uri="{FF2B5EF4-FFF2-40B4-BE49-F238E27FC236}">
-                <a16:creationId xmlns:a16="http://schemas.microsoft.com/office/drawing/2014/main" id="{BA3517F8-6D30-4804-A8DD-038256CA94CE}"/>
+                <a16:creationId xmlns:a16="http://schemas.microsoft.com/office/drawing/2014/main" id="{55710072-0514-4E8F-9FE0-3E842BFC8E3D}"/>
               </a:ext>
             </a:extLst>
           </p:cNvPr>
@@ -7894,10 +8348,69 @@
       </p:sp>
       <p:sp>
         <p:nvSpPr>
-          <p:cNvPr id="7" name="footer-rule">
-            <a:extLst xmlns:a="http://schemas.openxmlformats.org/drawingml/2006/main">
-              <a:ext uri="{FF2B5EF4-FFF2-40B4-BE49-F238E27FC236}">
-                <a16:creationId xmlns:a16="http://schemas.microsoft.com/office/drawing/2014/main" id="{6BD1BCFA-03BF-46F6-B933-FF16CBD3472B}"/>
+          <p:cNvPr id="7" name="rescue-point-logo-background">
+            <a:extLst xmlns:a="http://schemas.openxmlformats.org/drawingml/2006/main">
+              <a:ext uri="{FF2B5EF4-FFF2-40B4-BE49-F238E27FC236}">
+                <a16:creationId xmlns:a16="http://schemas.microsoft.com/office/drawing/2014/main" id="{F1C7172D-61F1-4B21-81EC-9ED9523F722D}"/>
+              </a:ext>
+            </a:extLst>
+          </p:cNvPr>
+          <p:cNvSpPr>
+            <a:spLocks xmlns:a="http://schemas.openxmlformats.org/drawingml/2006/main" noGrp="1"/>
+          </p:cNvSpPr>
+          <p:nvPr/>
+        </p:nvSpPr>
+        <p:spPr>
+          <a:xfrm xmlns:a="http://schemas.openxmlformats.org/drawingml/2006/main">
+            <a:off x="9772650" y="133350"/>
+            <a:ext cx="1733550" cy="457200"/>
+          </a:xfrm>
+          <a:prstGeom xmlns:a="http://schemas.openxmlformats.org/drawingml/2006/main" prst="roundRect">
+            <a:avLst>
+              <a:gd name="adj" fmla="val 16667"/>
+            </a:avLst>
+          </a:prstGeom>
+          <a:solidFill xmlns:a="http://schemas.openxmlformats.org/drawingml/2006/main">
+            <a:srgbClr val="06142E"/>
+          </a:solidFill>
+          <a:ln xmlns:a="http://schemas.openxmlformats.org/drawingml/2006/main" w="9525">
+            <a:solidFill>
+              <a:srgbClr val="1EC5FF">
+                <a:alpha val="33333"/>
+              </a:srgbClr>
+            </a:solidFill>
+            <a:prstDash val="solid"/>
+          </a:ln>
+        </p:spPr>
+      </p:sp>
+      <p:pic>
+        <p:nvPicPr>
+          <p:cNvPr id="21" name="" descr="Figura oficial da documentação dbt usada para explicar: RESULTADO ESPERADO — Metadados governados no manifest."/>
+          <p:cNvPicPr>
+            <a:picLocks xmlns:a="http://schemas.openxmlformats.org/drawingml/2006/main" noChangeAspect="1"/>
+          </p:cNvPicPr>
+          <p:nvPr/>
+        </p:nvPicPr>
+        <p:blipFill>
+          <a:blip xmlns:r="http://schemas.openxmlformats.org/officeDocument/2006/relationships" xmlns:a="http://schemas.openxmlformats.org/drawingml/2006/main" r:embed="R3e9934b0c7cd4474"/>
+          <a:stretch xmlns:a="http://schemas.openxmlformats.org/drawingml/2006/main"/>
+        </p:blipFill>
+        <p:spPr>
+          <a:xfrm xmlns:a="http://schemas.openxmlformats.org/drawingml/2006/main">
+            <a:off x="9893718" y="209550"/>
+            <a:ext cx="1491414" cy="323850"/>
+          </a:xfrm>
+          <a:prstGeom xmlns:a="http://schemas.openxmlformats.org/drawingml/2006/main" prst="rect">
+            <a:avLst/>
+          </a:prstGeom>
+        </p:spPr>
+      </p:pic>
+      <p:sp>
+        <p:nvSpPr>
+          <p:cNvPr id="9" name="footer-rule">
+            <a:extLst xmlns:a="http://schemas.openxmlformats.org/drawingml/2006/main">
+              <a:ext uri="{FF2B5EF4-FFF2-40B4-BE49-F238E27FC236}">
+                <a16:creationId xmlns:a16="http://schemas.microsoft.com/office/drawing/2014/main" id="{46597E38-B8A0-4B17-BD80-16126F600DA6}"/>
               </a:ext>
             </a:extLst>
           </p:cNvPr>
@@ -7927,10 +8440,10 @@
       </p:sp>
       <p:sp>
         <p:nvSpPr>
-          <p:cNvPr id="8" name="footer">
-            <a:extLst xmlns:a="http://schemas.openxmlformats.org/drawingml/2006/main">
-              <a:ext uri="{FF2B5EF4-FFF2-40B4-BE49-F238E27FC236}">
-                <a16:creationId xmlns:a16="http://schemas.microsoft.com/office/drawing/2014/main" id="{A9FB2E5E-F596-48F8-ABAC-07D49B31EB0B}"/>
+          <p:cNvPr id="10" name="footer">
+            <a:extLst xmlns:a="http://schemas.openxmlformats.org/drawingml/2006/main">
+              <a:ext uri="{FF2B5EF4-FFF2-40B4-BE49-F238E27FC236}">
+                <a16:creationId xmlns:a16="http://schemas.microsoft.com/office/drawing/2014/main" id="{BFD4CE4B-A2CD-4AED-9FC9-5F14C246F05C}"/>
               </a:ext>
             </a:extLst>
           </p:cNvPr>
@@ -7982,10 +8495,10 @@
       </p:sp>
       <p:sp>
         <p:nvSpPr>
-          <p:cNvPr id="9" name="page-number">
-            <a:extLst xmlns:a="http://schemas.openxmlformats.org/drawingml/2006/main">
-              <a:ext uri="{FF2B5EF4-FFF2-40B4-BE49-F238E27FC236}">
-                <a16:creationId xmlns:a16="http://schemas.microsoft.com/office/drawing/2014/main" id="{6843C722-AC75-4F81-B0F0-F072DE8646FE}"/>
+          <p:cNvPr id="11" name="page-number">
+            <a:extLst xmlns:a="http://schemas.openxmlformats.org/drawingml/2006/main">
+              <a:ext uri="{FF2B5EF4-FFF2-40B4-BE49-F238E27FC236}">
+                <a16:creationId xmlns:a16="http://schemas.microsoft.com/office/drawing/2014/main" id="{DA460AAF-3D1B-402A-AB88-7ECF40185ECF}"/>
               </a:ext>
             </a:extLst>
           </p:cNvPr>
@@ -8038,7 +8551,7 @@
     </p:spTree>
     <p:extLst>
       <p:ext uri="{BB962C8B-B14F-4D97-AF65-F5344CB8AC3E}">
-        <p14:creationId xmlns:p14="http://schemas.microsoft.com/office/powerpoint/2010/main" val="150756192"/>
+        <p14:creationId xmlns:p14="http://schemas.microsoft.com/office/powerpoint/2010/main" val="1883519027"/>
       </p:ext>
     </p:extLst>
   </p:cSld>
@@ -8066,10 +8579,10 @@
       </p:grpSpPr>
       <p:sp>
         <p:nvSpPr>
-          <p:cNvPr id="14" name="slide-title">
-            <a:extLst xmlns:a="http://schemas.openxmlformats.org/drawingml/2006/main">
-              <a:ext uri="{FF2B5EF4-FFF2-40B4-BE49-F238E27FC236}">
-                <a16:creationId xmlns:a16="http://schemas.microsoft.com/office/drawing/2014/main" id="{77A98389-CC4F-470E-9C4B-91D912F4664F}"/>
+          <p:cNvPr id="16" name="slide-title">
+            <a:extLst xmlns:a="http://schemas.openxmlformats.org/drawingml/2006/main">
+              <a:ext uri="{FF2B5EF4-FFF2-40B4-BE49-F238E27FC236}">
+                <a16:creationId xmlns:a16="http://schemas.microsoft.com/office/drawing/2014/main" id="{C09EC5FF-9429-4FB8-A1D5-C96D015CA478}"/>
               </a:ext>
             </a:extLst>
           </p:cNvPr>
@@ -8120,7 +8633,7 @@
           <p:cNvPr id="2" name="step-num-1">
             <a:extLst xmlns:a="http://schemas.openxmlformats.org/drawingml/2006/main">
               <a:ext uri="{FF2B5EF4-FFF2-40B4-BE49-F238E27FC236}">
-                <a16:creationId xmlns:a16="http://schemas.microsoft.com/office/drawing/2014/main" id="{308650E8-22E2-4C13-BF51-E39351254B12}"/>
+                <a16:creationId xmlns:a16="http://schemas.microsoft.com/office/drawing/2014/main" id="{C7814ECE-B0E7-42AA-9BEB-88A0BD8882EE}"/>
               </a:ext>
             </a:extLst>
           </p:cNvPr>
@@ -8171,7 +8684,7 @@
           <p:cNvPr id="3" name="step-label-1">
             <a:extLst xmlns:a="http://schemas.openxmlformats.org/drawingml/2006/main">
               <a:ext uri="{FF2B5EF4-FFF2-40B4-BE49-F238E27FC236}">
-                <a16:creationId xmlns:a16="http://schemas.microsoft.com/office/drawing/2014/main" id="{04BA2B48-C86B-440E-9639-950A6BF84351}"/>
+                <a16:creationId xmlns:a16="http://schemas.microsoft.com/office/drawing/2014/main" id="{F97B1277-83A3-4114-BFBF-6B9CEC73D4AC}"/>
               </a:ext>
             </a:extLst>
           </p:cNvPr>
@@ -8222,7 +8735,7 @@
           <p:cNvPr id="4" name="step-line-1">
             <a:extLst xmlns:a="http://schemas.openxmlformats.org/drawingml/2006/main">
               <a:ext uri="{FF2B5EF4-FFF2-40B4-BE49-F238E27FC236}">
-                <a16:creationId xmlns:a16="http://schemas.microsoft.com/office/drawing/2014/main" id="{58A3C8DF-0E1C-4F8B-B51B-7D1242BF6B86}"/>
+                <a16:creationId xmlns:a16="http://schemas.microsoft.com/office/drawing/2014/main" id="{10FDCF77-CCC8-4F4C-A9D4-A7A91C40DDD8}"/>
               </a:ext>
             </a:extLst>
           </p:cNvPr>
@@ -8253,7 +8766,7 @@
           <p:cNvPr id="5" name="step-num-2">
             <a:extLst xmlns:a="http://schemas.openxmlformats.org/drawingml/2006/main">
               <a:ext uri="{FF2B5EF4-FFF2-40B4-BE49-F238E27FC236}">
-                <a16:creationId xmlns:a16="http://schemas.microsoft.com/office/drawing/2014/main" id="{ACB1CD4E-9824-4D9B-B3BC-64517413BF59}"/>
+                <a16:creationId xmlns:a16="http://schemas.microsoft.com/office/drawing/2014/main" id="{50635F31-909F-4E6F-A538-EA7B1CEB821B}"/>
               </a:ext>
             </a:extLst>
           </p:cNvPr>
@@ -8304,7 +8817,7 @@
           <p:cNvPr id="6" name="step-label-2">
             <a:extLst xmlns:a="http://schemas.openxmlformats.org/drawingml/2006/main">
               <a:ext uri="{FF2B5EF4-FFF2-40B4-BE49-F238E27FC236}">
-                <a16:creationId xmlns:a16="http://schemas.microsoft.com/office/drawing/2014/main" id="{6F784EE8-6BB9-4AAA-B121-950C904D304F}"/>
+                <a16:creationId xmlns:a16="http://schemas.microsoft.com/office/drawing/2014/main" id="{CE8D9441-9ED2-414A-868A-76D59F3758C5}"/>
               </a:ext>
             </a:extLst>
           </p:cNvPr>
@@ -8355,7 +8868,7 @@
           <p:cNvPr id="7" name="step-line-2">
             <a:extLst xmlns:a="http://schemas.openxmlformats.org/drawingml/2006/main">
               <a:ext uri="{FF2B5EF4-FFF2-40B4-BE49-F238E27FC236}">
-                <a16:creationId xmlns:a16="http://schemas.microsoft.com/office/drawing/2014/main" id="{1AF42DFC-30FD-4BC5-99C6-66A1C8A9F89C}"/>
+                <a16:creationId xmlns:a16="http://schemas.microsoft.com/office/drawing/2014/main" id="{80B177D4-3010-4B3F-A973-DFBB2319C2BB}"/>
               </a:ext>
             </a:extLst>
           </p:cNvPr>
@@ -8386,7 +8899,7 @@
           <p:cNvPr id="8" name="step-num-3">
             <a:extLst xmlns:a="http://schemas.openxmlformats.org/drawingml/2006/main">
               <a:ext uri="{FF2B5EF4-FFF2-40B4-BE49-F238E27FC236}">
-                <a16:creationId xmlns:a16="http://schemas.microsoft.com/office/drawing/2014/main" id="{1CA6DA20-6F1D-453C-B92E-CF4244100744}"/>
+                <a16:creationId xmlns:a16="http://schemas.microsoft.com/office/drawing/2014/main" id="{EEFD85DD-6F7A-4EA1-9652-2D8D50D88078}"/>
               </a:ext>
             </a:extLst>
           </p:cNvPr>
@@ -8437,7 +8950,7 @@
           <p:cNvPr id="9" name="step-label-3">
             <a:extLst xmlns:a="http://schemas.openxmlformats.org/drawingml/2006/main">
               <a:ext uri="{FF2B5EF4-FFF2-40B4-BE49-F238E27FC236}">
-                <a16:creationId xmlns:a16="http://schemas.microsoft.com/office/drawing/2014/main" id="{096533C5-0148-4879-B2AF-0096BC7189CF}"/>
+                <a16:creationId xmlns:a16="http://schemas.microsoft.com/office/drawing/2014/main" id="{9B4A7C2A-B9C0-4F46-910A-7E912401396C}"/>
               </a:ext>
             </a:extLst>
           </p:cNvPr>
@@ -8488,7 +9001,7 @@
           <p:cNvPr id="10" name="eyebrow">
             <a:extLst xmlns:a="http://schemas.openxmlformats.org/drawingml/2006/main">
               <a:ext uri="{FF2B5EF4-FFF2-40B4-BE49-F238E27FC236}">
-                <a16:creationId xmlns:a16="http://schemas.microsoft.com/office/drawing/2014/main" id="{A9F04214-2EB2-4146-9FBE-A1D952E661C0}"/>
+                <a16:creationId xmlns:a16="http://schemas.microsoft.com/office/drawing/2014/main" id="{353B927E-7382-4D0A-93C4-669C2D57F875}"/>
               </a:ext>
             </a:extLst>
           </p:cNvPr>
@@ -8536,10 +9049,69 @@
       </p:sp>
       <p:sp>
         <p:nvSpPr>
-          <p:cNvPr id="11" name="footer-rule">
-            <a:extLst xmlns:a="http://schemas.openxmlformats.org/drawingml/2006/main">
-              <a:ext uri="{FF2B5EF4-FFF2-40B4-BE49-F238E27FC236}">
-                <a16:creationId xmlns:a16="http://schemas.microsoft.com/office/drawing/2014/main" id="{BFA2CE19-0532-4761-A20E-CE2719A0EA6A}"/>
+          <p:cNvPr id="11" name="rescue-point-logo-background">
+            <a:extLst xmlns:a="http://schemas.openxmlformats.org/drawingml/2006/main">
+              <a:ext uri="{FF2B5EF4-FFF2-40B4-BE49-F238E27FC236}">
+                <a16:creationId xmlns:a16="http://schemas.microsoft.com/office/drawing/2014/main" id="{835E659F-0149-4024-9274-30BC2AC88026}"/>
+              </a:ext>
+            </a:extLst>
+          </p:cNvPr>
+          <p:cNvSpPr>
+            <a:spLocks xmlns:a="http://schemas.openxmlformats.org/drawingml/2006/main" noGrp="1"/>
+          </p:cNvSpPr>
+          <p:nvPr/>
+        </p:nvSpPr>
+        <p:spPr>
+          <a:xfrm xmlns:a="http://schemas.openxmlformats.org/drawingml/2006/main">
+            <a:off x="9772650" y="133350"/>
+            <a:ext cx="1733550" cy="457200"/>
+          </a:xfrm>
+          <a:prstGeom xmlns:a="http://schemas.openxmlformats.org/drawingml/2006/main" prst="roundRect">
+            <a:avLst>
+              <a:gd name="adj" fmla="val 16667"/>
+            </a:avLst>
+          </a:prstGeom>
+          <a:solidFill xmlns:a="http://schemas.openxmlformats.org/drawingml/2006/main">
+            <a:srgbClr val="06142E"/>
+          </a:solidFill>
+          <a:ln xmlns:a="http://schemas.openxmlformats.org/drawingml/2006/main" w="9525">
+            <a:solidFill>
+              <a:srgbClr val="1EC5FF">
+                <a:alpha val="33333"/>
+              </a:srgbClr>
+            </a:solidFill>
+            <a:prstDash val="solid"/>
+          </a:ln>
+        </p:spPr>
+      </p:sp>
+      <p:pic>
+        <p:nvPicPr>
+          <p:cNvPr id="29" name="" descr="Figura oficial da documentação dbt usada para explicar: O mesmo recurso afeta três decisões — 01."/>
+          <p:cNvPicPr>
+            <a:picLocks xmlns:a="http://schemas.openxmlformats.org/drawingml/2006/main" noChangeAspect="1"/>
+          </p:cNvPicPr>
+          <p:nvPr/>
+        </p:nvPicPr>
+        <p:blipFill>
+          <a:blip xmlns:r="http://schemas.openxmlformats.org/officeDocument/2006/relationships" xmlns:a="http://schemas.openxmlformats.org/drawingml/2006/main" r:embed="R640fa147ed6948c3"/>
+          <a:stretch xmlns:a="http://schemas.openxmlformats.org/drawingml/2006/main"/>
+        </p:blipFill>
+        <p:spPr>
+          <a:xfrm xmlns:a="http://schemas.openxmlformats.org/drawingml/2006/main">
+            <a:off x="9893718" y="209550"/>
+            <a:ext cx="1491414" cy="323850"/>
+          </a:xfrm>
+          <a:prstGeom xmlns:a="http://schemas.openxmlformats.org/drawingml/2006/main" prst="rect">
+            <a:avLst/>
+          </a:prstGeom>
+        </p:spPr>
+      </p:pic>
+      <p:sp>
+        <p:nvSpPr>
+          <p:cNvPr id="13" name="footer-rule">
+            <a:extLst xmlns:a="http://schemas.openxmlformats.org/drawingml/2006/main">
+              <a:ext uri="{FF2B5EF4-FFF2-40B4-BE49-F238E27FC236}">
+                <a16:creationId xmlns:a16="http://schemas.microsoft.com/office/drawing/2014/main" id="{C938D33D-5982-485C-A934-7260BA843141}"/>
               </a:ext>
             </a:extLst>
           </p:cNvPr>
@@ -8569,10 +9141,10 @@
       </p:sp>
       <p:sp>
         <p:nvSpPr>
-          <p:cNvPr id="12" name="footer">
-            <a:extLst xmlns:a="http://schemas.openxmlformats.org/drawingml/2006/main">
-              <a:ext uri="{FF2B5EF4-FFF2-40B4-BE49-F238E27FC236}">
-                <a16:creationId xmlns:a16="http://schemas.microsoft.com/office/drawing/2014/main" id="{ADA5D3FD-C221-4BC0-9772-8D4FC4EE3C99}"/>
+          <p:cNvPr id="14" name="footer">
+            <a:extLst xmlns:a="http://schemas.openxmlformats.org/drawingml/2006/main">
+              <a:ext uri="{FF2B5EF4-FFF2-40B4-BE49-F238E27FC236}">
+                <a16:creationId xmlns:a16="http://schemas.microsoft.com/office/drawing/2014/main" id="{C321BB54-5B68-42D9-816F-83B180A781B9}"/>
               </a:ext>
             </a:extLst>
           </p:cNvPr>
@@ -8624,10 +9196,10 @@
       </p:sp>
       <p:sp>
         <p:nvSpPr>
-          <p:cNvPr id="13" name="page-number">
-            <a:extLst xmlns:a="http://schemas.openxmlformats.org/drawingml/2006/main">
-              <a:ext uri="{FF2B5EF4-FFF2-40B4-BE49-F238E27FC236}">
-                <a16:creationId xmlns:a16="http://schemas.microsoft.com/office/drawing/2014/main" id="{30983EF1-7468-44BD-AC2A-429906A3A54C}"/>
+          <p:cNvPr id="15" name="page-number">
+            <a:extLst xmlns:a="http://schemas.openxmlformats.org/drawingml/2006/main">
+              <a:ext uri="{FF2B5EF4-FFF2-40B4-BE49-F238E27FC236}">
+                <a16:creationId xmlns:a16="http://schemas.microsoft.com/office/drawing/2014/main" id="{8D075A63-2DC5-4577-B002-93773B571936}"/>
               </a:ext>
             </a:extLst>
           </p:cNvPr>
@@ -8680,7 +9252,7 @@
     </p:spTree>
     <p:extLst>
       <p:ext uri="{BB962C8B-B14F-4D97-AF65-F5344CB8AC3E}">
-        <p14:creationId xmlns:p14="http://schemas.microsoft.com/office/powerpoint/2010/main" val="1578703468"/>
+        <p14:creationId xmlns:p14="http://schemas.microsoft.com/office/powerpoint/2010/main" val="1153924072"/>
       </p:ext>
     </p:extLst>
   </p:cSld>
@@ -8716,10 +9288,10 @@
       </p:grpSpPr>
       <p:sp>
         <p:nvSpPr>
-          <p:cNvPr id="9" name="case-number">
-            <a:extLst xmlns:a="http://schemas.openxmlformats.org/drawingml/2006/main">
-              <a:ext uri="{FF2B5EF4-FFF2-40B4-BE49-F238E27FC236}">
-                <a16:creationId xmlns:a16="http://schemas.microsoft.com/office/drawing/2014/main" id="{87B08487-A5E3-4A5C-AA30-0B5B316F23D4}"/>
+          <p:cNvPr id="11" name="case-number">
+            <a:extLst xmlns:a="http://schemas.openxmlformats.org/drawingml/2006/main">
+              <a:ext uri="{FF2B5EF4-FFF2-40B4-BE49-F238E27FC236}">
+                <a16:creationId xmlns:a16="http://schemas.microsoft.com/office/drawing/2014/main" id="{85E3D077-A077-400B-9C44-7D9FC0DDC2C6}"/>
               </a:ext>
             </a:extLst>
           </p:cNvPr>
@@ -8770,7 +9342,7 @@
           <p:cNvPr id="2" name="case-label">
             <a:extLst xmlns:a="http://schemas.openxmlformats.org/drawingml/2006/main">
               <a:ext uri="{FF2B5EF4-FFF2-40B4-BE49-F238E27FC236}">
-                <a16:creationId xmlns:a16="http://schemas.microsoft.com/office/drawing/2014/main" id="{EE170E58-6A63-4CC4-A9BB-ABAF5C5CE982}"/>
+                <a16:creationId xmlns:a16="http://schemas.microsoft.com/office/drawing/2014/main" id="{BB9442B3-4B16-4EE3-AFA9-9621C74DADA7}"/>
               </a:ext>
             </a:extLst>
           </p:cNvPr>
@@ -8821,7 +9393,7 @@
           <p:cNvPr id="3" name="case-divider">
             <a:extLst xmlns:a="http://schemas.openxmlformats.org/drawingml/2006/main">
               <a:ext uri="{FF2B5EF4-FFF2-40B4-BE49-F238E27FC236}">
-                <a16:creationId xmlns:a16="http://schemas.microsoft.com/office/drawing/2014/main" id="{CAE0B6C9-1491-496B-B30B-B3995387BE65}"/>
+                <a16:creationId xmlns:a16="http://schemas.microsoft.com/office/drawing/2014/main" id="{6152C64D-D434-4C1E-B847-89A372E69A1F}"/>
               </a:ext>
             </a:extLst>
           </p:cNvPr>
@@ -8854,7 +9426,7 @@
           <p:cNvPr id="4" name="case-caveat">
             <a:extLst xmlns:a="http://schemas.openxmlformats.org/drawingml/2006/main">
               <a:ext uri="{FF2B5EF4-FFF2-40B4-BE49-F238E27FC236}">
-                <a16:creationId xmlns:a16="http://schemas.microsoft.com/office/drawing/2014/main" id="{E2AAB392-E19D-4FC3-A30C-724085F70D46}"/>
+                <a16:creationId xmlns:a16="http://schemas.microsoft.com/office/drawing/2014/main" id="{C3F569AD-27B7-4FA5-ACFD-433FAD742A11}"/>
               </a:ext>
             </a:extLst>
           </p:cNvPr>
@@ -8905,7 +9477,7 @@
           <p:cNvPr id="5" name="eyebrow">
             <a:extLst xmlns:a="http://schemas.openxmlformats.org/drawingml/2006/main">
               <a:ext uri="{FF2B5EF4-FFF2-40B4-BE49-F238E27FC236}">
-                <a16:creationId xmlns:a16="http://schemas.microsoft.com/office/drawing/2014/main" id="{661058AE-6D7D-4217-9625-119B20DF1D6A}"/>
+                <a16:creationId xmlns:a16="http://schemas.microsoft.com/office/drawing/2014/main" id="{D123F962-0EAF-4805-8069-66DBB45DA217}"/>
               </a:ext>
             </a:extLst>
           </p:cNvPr>
@@ -8953,10 +9525,69 @@
       </p:sp>
       <p:sp>
         <p:nvSpPr>
-          <p:cNvPr id="6" name="footer-rule">
-            <a:extLst xmlns:a="http://schemas.openxmlformats.org/drawingml/2006/main">
-              <a:ext uri="{FF2B5EF4-FFF2-40B4-BE49-F238E27FC236}">
-                <a16:creationId xmlns:a16="http://schemas.microsoft.com/office/drawing/2014/main" id="{AAE9B856-700B-4172-9D7C-667CEA9489E2}"/>
+          <p:cNvPr id="6" name="rescue-point-logo-background">
+            <a:extLst xmlns:a="http://schemas.openxmlformats.org/drawingml/2006/main">
+              <a:ext uri="{FF2B5EF4-FFF2-40B4-BE49-F238E27FC236}">
+                <a16:creationId xmlns:a16="http://schemas.microsoft.com/office/drawing/2014/main" id="{4FC4CA8D-1B51-4C94-8E56-0755B3DCA67D}"/>
+              </a:ext>
+            </a:extLst>
+          </p:cNvPr>
+          <p:cNvSpPr>
+            <a:spLocks xmlns:a="http://schemas.openxmlformats.org/drawingml/2006/main" noGrp="1"/>
+          </p:cNvSpPr>
+          <p:nvPr/>
+        </p:nvSpPr>
+        <p:spPr>
+          <a:xfrm xmlns:a="http://schemas.openxmlformats.org/drawingml/2006/main">
+            <a:off x="9772650" y="133350"/>
+            <a:ext cx="1733550" cy="457200"/>
+          </a:xfrm>
+          <a:prstGeom xmlns:a="http://schemas.openxmlformats.org/drawingml/2006/main" prst="roundRect">
+            <a:avLst>
+              <a:gd name="adj" fmla="val 16667"/>
+            </a:avLst>
+          </a:prstGeom>
+          <a:solidFill xmlns:a="http://schemas.openxmlformats.org/drawingml/2006/main">
+            <a:srgbClr val="06142E"/>
+          </a:solidFill>
+          <a:ln xmlns:a="http://schemas.openxmlformats.org/drawingml/2006/main" w="9525">
+            <a:solidFill>
+              <a:srgbClr val="1EC5FF">
+                <a:alpha val="33333"/>
+              </a:srgbClr>
+            </a:solidFill>
+            <a:prstDash val="solid"/>
+          </a:ln>
+        </p:spPr>
+      </p:sp>
+      <p:pic>
+        <p:nvPicPr>
+          <p:cNvPr id="19" name="" descr="Figura oficial da documentação dbt usada para explicar: 2 exposures — dashboard e agente no grafo."/>
+          <p:cNvPicPr>
+            <a:picLocks xmlns:a="http://schemas.openxmlformats.org/drawingml/2006/main" noChangeAspect="1"/>
+          </p:cNvPicPr>
+          <p:nvPr/>
+        </p:nvPicPr>
+        <p:blipFill>
+          <a:blip xmlns:r="http://schemas.openxmlformats.org/officeDocument/2006/relationships" xmlns:a="http://schemas.openxmlformats.org/drawingml/2006/main" r:embed="R231ee099cd7f4f42"/>
+          <a:stretch xmlns:a="http://schemas.openxmlformats.org/drawingml/2006/main"/>
+        </p:blipFill>
+        <p:spPr>
+          <a:xfrm xmlns:a="http://schemas.openxmlformats.org/drawingml/2006/main">
+            <a:off x="9893718" y="209550"/>
+            <a:ext cx="1491414" cy="323850"/>
+          </a:xfrm>
+          <a:prstGeom xmlns:a="http://schemas.openxmlformats.org/drawingml/2006/main" prst="rect">
+            <a:avLst/>
+          </a:prstGeom>
+        </p:spPr>
+      </p:pic>
+      <p:sp>
+        <p:nvSpPr>
+          <p:cNvPr id="8" name="footer-rule">
+            <a:extLst xmlns:a="http://schemas.openxmlformats.org/drawingml/2006/main">
+              <a:ext uri="{FF2B5EF4-FFF2-40B4-BE49-F238E27FC236}">
+                <a16:creationId xmlns:a16="http://schemas.microsoft.com/office/drawing/2014/main" id="{4F9CB509-A5A7-4561-8147-D3B2A7C6C6CC}"/>
               </a:ext>
             </a:extLst>
           </p:cNvPr>
@@ -8986,10 +9617,10 @@
       </p:sp>
       <p:sp>
         <p:nvSpPr>
-          <p:cNvPr id="7" name="footer">
-            <a:extLst xmlns:a="http://schemas.openxmlformats.org/drawingml/2006/main">
-              <a:ext uri="{FF2B5EF4-FFF2-40B4-BE49-F238E27FC236}">
-                <a16:creationId xmlns:a16="http://schemas.microsoft.com/office/drawing/2014/main" id="{A0DAF3C3-935E-4A3C-A1E7-72B9FE2400F1}"/>
+          <p:cNvPr id="9" name="footer">
+            <a:extLst xmlns:a="http://schemas.openxmlformats.org/drawingml/2006/main">
+              <a:ext uri="{FF2B5EF4-FFF2-40B4-BE49-F238E27FC236}">
+                <a16:creationId xmlns:a16="http://schemas.microsoft.com/office/drawing/2014/main" id="{7FE763F6-C415-45D9-AC12-DDEBF7565B33}"/>
               </a:ext>
             </a:extLst>
           </p:cNvPr>
@@ -9041,10 +9672,10 @@
       </p:sp>
       <p:sp>
         <p:nvSpPr>
-          <p:cNvPr id="8" name="page-number">
-            <a:extLst xmlns:a="http://schemas.openxmlformats.org/drawingml/2006/main">
-              <a:ext uri="{FF2B5EF4-FFF2-40B4-BE49-F238E27FC236}">
-                <a16:creationId xmlns:a16="http://schemas.microsoft.com/office/drawing/2014/main" id="{CA2EDB04-FF39-440A-83D7-532ED7700BD1}"/>
+          <p:cNvPr id="10" name="page-number">
+            <a:extLst xmlns:a="http://schemas.openxmlformats.org/drawingml/2006/main">
+              <a:ext uri="{FF2B5EF4-FFF2-40B4-BE49-F238E27FC236}">
+                <a16:creationId xmlns:a16="http://schemas.microsoft.com/office/drawing/2014/main" id="{10F0108C-B2E9-4310-B5D8-DE317DA09533}"/>
               </a:ext>
             </a:extLst>
           </p:cNvPr>
@@ -9097,7 +9728,7 @@
     </p:spTree>
     <p:extLst>
       <p:ext uri="{BB962C8B-B14F-4D97-AF65-F5344CB8AC3E}">
-        <p14:creationId xmlns:p14="http://schemas.microsoft.com/office/powerpoint/2010/main" val="1684202340"/>
+        <p14:creationId xmlns:p14="http://schemas.microsoft.com/office/powerpoint/2010/main" val="473757521"/>
       </p:ext>
     </p:extLst>
   </p:cSld>
@@ -9125,10 +9756,10 @@
       </p:grpSpPr>
       <p:sp>
         <p:nvSpPr>
-          <p:cNvPr id="7" name="slide-title">
-            <a:extLst xmlns:a="http://schemas.openxmlformats.org/drawingml/2006/main">
-              <a:ext uri="{FF2B5EF4-FFF2-40B4-BE49-F238E27FC236}">
-                <a16:creationId xmlns:a16="http://schemas.microsoft.com/office/drawing/2014/main" id="{742B3D21-ED89-437C-A62A-1110C10EA7E1}"/>
+          <p:cNvPr id="9" name="slide-title">
+            <a:extLst xmlns:a="http://schemas.openxmlformats.org/drawingml/2006/main">
+              <a:ext uri="{FF2B5EF4-FFF2-40B4-BE49-F238E27FC236}">
+                <a16:creationId xmlns:a16="http://schemas.microsoft.com/office/drawing/2014/main" id="{70212DED-A90D-45CA-B05B-DCAC90A83F73}"/>
               </a:ext>
             </a:extLst>
           </p:cNvPr>
@@ -9179,7 +9810,7 @@
           <p:cNvPr id="2" name="bullets">
             <a:extLst xmlns:a="http://schemas.openxmlformats.org/drawingml/2006/main">
               <a:ext uri="{FF2B5EF4-FFF2-40B4-BE49-F238E27FC236}">
-                <a16:creationId xmlns:a16="http://schemas.microsoft.com/office/drawing/2014/main" id="{FFFA2559-D508-45FE-B625-C6AEDA3EBB4F}"/>
+                <a16:creationId xmlns:a16="http://schemas.microsoft.com/office/drawing/2014/main" id="{56B7B47D-153F-4A6C-BF94-753709CFFA37}"/>
               </a:ext>
             </a:extLst>
           </p:cNvPr>
@@ -9266,7 +9897,7 @@
           <p:cNvPr id="3" name="eyebrow">
             <a:extLst xmlns:a="http://schemas.openxmlformats.org/drawingml/2006/main">
               <a:ext uri="{FF2B5EF4-FFF2-40B4-BE49-F238E27FC236}">
-                <a16:creationId xmlns:a16="http://schemas.microsoft.com/office/drawing/2014/main" id="{55DB43C5-F365-48C8-A855-B78581936A89}"/>
+                <a16:creationId xmlns:a16="http://schemas.microsoft.com/office/drawing/2014/main" id="{F0240D9E-F5DA-4A6F-8214-2248FECF8A09}"/>
               </a:ext>
             </a:extLst>
           </p:cNvPr>
@@ -9314,10 +9945,69 @@
       </p:sp>
       <p:sp>
         <p:nvSpPr>
-          <p:cNvPr id="4" name="footer-rule">
-            <a:extLst xmlns:a="http://schemas.openxmlformats.org/drawingml/2006/main">
-              <a:ext uri="{FF2B5EF4-FFF2-40B4-BE49-F238E27FC236}">
-                <a16:creationId xmlns:a16="http://schemas.microsoft.com/office/drawing/2014/main" id="{AD75D19E-26D2-4189-909F-9F4DCBAE4035}"/>
+          <p:cNvPr id="4" name="rescue-point-logo-background">
+            <a:extLst xmlns:a="http://schemas.openxmlformats.org/drawingml/2006/main">
+              <a:ext uri="{FF2B5EF4-FFF2-40B4-BE49-F238E27FC236}">
+                <a16:creationId xmlns:a16="http://schemas.microsoft.com/office/drawing/2014/main" id="{B648A02F-1FEB-4CAF-A297-4E9D8B6AA0D0}"/>
+              </a:ext>
+            </a:extLst>
+          </p:cNvPr>
+          <p:cNvSpPr>
+            <a:spLocks xmlns:a="http://schemas.openxmlformats.org/drawingml/2006/main" noGrp="1"/>
+          </p:cNvSpPr>
+          <p:nvPr/>
+        </p:nvSpPr>
+        <p:spPr>
+          <a:xfrm xmlns:a="http://schemas.openxmlformats.org/drawingml/2006/main">
+            <a:off x="9772650" y="133350"/>
+            <a:ext cx="1733550" cy="457200"/>
+          </a:xfrm>
+          <a:prstGeom xmlns:a="http://schemas.openxmlformats.org/drawingml/2006/main" prst="roundRect">
+            <a:avLst>
+              <a:gd name="adj" fmla="val 16667"/>
+            </a:avLst>
+          </a:prstGeom>
+          <a:solidFill xmlns:a="http://schemas.openxmlformats.org/drawingml/2006/main">
+            <a:srgbClr val="06142E"/>
+          </a:solidFill>
+          <a:ln xmlns:a="http://schemas.openxmlformats.org/drawingml/2006/main" w="9525">
+            <a:solidFill>
+              <a:srgbClr val="1EC5FF">
+                <a:alpha val="33333"/>
+              </a:srgbClr>
+            </a:solidFill>
+            <a:prstDash val="solid"/>
+          </a:ln>
+        </p:spPr>
+      </p:sp>
+      <p:pic>
+        <p:nvPicPr>
+          <p:cNvPr id="15" name="" descr="Figura oficial da documentação dbt usada para explicar: Limitações que precisam permanecer visíveis — • Meta não aplica segurança física."/>
+          <p:cNvPicPr>
+            <a:picLocks xmlns:a="http://schemas.openxmlformats.org/drawingml/2006/main" noChangeAspect="1"/>
+          </p:cNvPicPr>
+          <p:nvPr/>
+        </p:nvPicPr>
+        <p:blipFill>
+          <a:blip xmlns:r="http://schemas.openxmlformats.org/officeDocument/2006/relationships" xmlns:a="http://schemas.openxmlformats.org/drawingml/2006/main" r:embed="R6f67fd0ed0f84091"/>
+          <a:stretch xmlns:a="http://schemas.openxmlformats.org/drawingml/2006/main"/>
+        </p:blipFill>
+        <p:spPr>
+          <a:xfrm xmlns:a="http://schemas.openxmlformats.org/drawingml/2006/main">
+            <a:off x="9893718" y="209550"/>
+            <a:ext cx="1491414" cy="323850"/>
+          </a:xfrm>
+          <a:prstGeom xmlns:a="http://schemas.openxmlformats.org/drawingml/2006/main" prst="rect">
+            <a:avLst/>
+          </a:prstGeom>
+        </p:spPr>
+      </p:pic>
+      <p:sp>
+        <p:nvSpPr>
+          <p:cNvPr id="6" name="footer-rule">
+            <a:extLst xmlns:a="http://schemas.openxmlformats.org/drawingml/2006/main">
+              <a:ext uri="{FF2B5EF4-FFF2-40B4-BE49-F238E27FC236}">
+                <a16:creationId xmlns:a16="http://schemas.microsoft.com/office/drawing/2014/main" id="{42FA9090-946D-4116-A31B-56D94D0CE231}"/>
               </a:ext>
             </a:extLst>
           </p:cNvPr>
@@ -9347,10 +10037,10 @@
       </p:sp>
       <p:sp>
         <p:nvSpPr>
-          <p:cNvPr id="5" name="footer">
-            <a:extLst xmlns:a="http://schemas.openxmlformats.org/drawingml/2006/main">
-              <a:ext uri="{FF2B5EF4-FFF2-40B4-BE49-F238E27FC236}">
-                <a16:creationId xmlns:a16="http://schemas.microsoft.com/office/drawing/2014/main" id="{39110C16-626F-4F8E-9B7A-11CA20936712}"/>
+          <p:cNvPr id="7" name="footer">
+            <a:extLst xmlns:a="http://schemas.openxmlformats.org/drawingml/2006/main">
+              <a:ext uri="{FF2B5EF4-FFF2-40B4-BE49-F238E27FC236}">
+                <a16:creationId xmlns:a16="http://schemas.microsoft.com/office/drawing/2014/main" id="{09A826DF-E69E-417D-AE97-7A253D63F099}"/>
               </a:ext>
             </a:extLst>
           </p:cNvPr>
@@ -9402,10 +10092,10 @@
       </p:sp>
       <p:sp>
         <p:nvSpPr>
-          <p:cNvPr id="6" name="page-number">
-            <a:extLst xmlns:a="http://schemas.openxmlformats.org/drawingml/2006/main">
-              <a:ext uri="{FF2B5EF4-FFF2-40B4-BE49-F238E27FC236}">
-                <a16:creationId xmlns:a16="http://schemas.microsoft.com/office/drawing/2014/main" id="{3A177245-3FEC-413F-9056-A38EA5F42F73}"/>
+          <p:cNvPr id="8" name="page-number">
+            <a:extLst xmlns:a="http://schemas.openxmlformats.org/drawingml/2006/main">
+              <a:ext uri="{FF2B5EF4-FFF2-40B4-BE49-F238E27FC236}">
+                <a16:creationId xmlns:a16="http://schemas.microsoft.com/office/drawing/2014/main" id="{E144DD17-1DE9-48AE-836B-A4720A6DCAFA}"/>
               </a:ext>
             </a:extLst>
           </p:cNvPr>
@@ -9458,7 +10148,7 @@
     </p:spTree>
     <p:extLst>
       <p:ext uri="{BB962C8B-B14F-4D97-AF65-F5344CB8AC3E}">
-        <p14:creationId xmlns:p14="http://schemas.microsoft.com/office/powerpoint/2010/main" val="363884895"/>
+        <p14:creationId xmlns:p14="http://schemas.microsoft.com/office/powerpoint/2010/main" val="698545634"/>
       </p:ext>
     </p:extLst>
   </p:cSld>
@@ -9494,10 +10184,10 @@
       </p:grpSpPr>
       <p:sp>
         <p:nvSpPr>
-          <p:cNvPr id="10" name="radar-label">
-            <a:extLst xmlns:a="http://schemas.openxmlformats.org/drawingml/2006/main">
-              <a:ext uri="{FF2B5EF4-FFF2-40B4-BE49-F238E27FC236}">
-                <a16:creationId xmlns:a16="http://schemas.microsoft.com/office/drawing/2014/main" id="{6A6FAA00-5FDA-44BC-BA28-6CD9771123CA}"/>
+          <p:cNvPr id="12" name="radar-label">
+            <a:extLst xmlns:a="http://schemas.openxmlformats.org/drawingml/2006/main">
+              <a:ext uri="{FF2B5EF4-FFF2-40B4-BE49-F238E27FC236}">
+                <a16:creationId xmlns:a16="http://schemas.microsoft.com/office/drawing/2014/main" id="{F45E1220-DA36-488C-AA77-C1CA84DBC363}"/>
               </a:ext>
             </a:extLst>
           </p:cNvPr>
@@ -9548,7 +10238,7 @@
           <p:cNvPr id="2" name="radar-text">
             <a:extLst xmlns:a="http://schemas.openxmlformats.org/drawingml/2006/main">
               <a:ext uri="{FF2B5EF4-FFF2-40B4-BE49-F238E27FC236}">
-                <a16:creationId xmlns:a16="http://schemas.microsoft.com/office/drawing/2014/main" id="{3394BFB3-E609-48F4-BC9B-062DD8E53706}"/>
+                <a16:creationId xmlns:a16="http://schemas.microsoft.com/office/drawing/2014/main" id="{16BD8025-1715-4EB6-993A-1DFF5650F3DD}"/>
               </a:ext>
             </a:extLst>
           </p:cNvPr>
@@ -9599,7 +10289,7 @@
           <p:cNvPr id="3" name="radar-rule">
             <a:extLst xmlns:a="http://schemas.openxmlformats.org/drawingml/2006/main">
               <a:ext uri="{FF2B5EF4-FFF2-40B4-BE49-F238E27FC236}">
-                <a16:creationId xmlns:a16="http://schemas.microsoft.com/office/drawing/2014/main" id="{3B53BAF5-8BA5-4A56-BD01-570A489CC007}"/>
+                <a16:creationId xmlns:a16="http://schemas.microsoft.com/office/drawing/2014/main" id="{332A68EA-7802-4036-BB5A-15280D05E4D9}"/>
               </a:ext>
             </a:extLst>
           </p:cNvPr>
@@ -9650,7 +10340,7 @@
           <p:cNvPr id="4" name="ambient-glow">
             <a:extLst xmlns:a="http://schemas.openxmlformats.org/drawingml/2006/main">
               <a:ext uri="{FF2B5EF4-FFF2-40B4-BE49-F238E27FC236}">
-                <a16:creationId xmlns:a16="http://schemas.microsoft.com/office/drawing/2014/main" id="{CF6E2A06-90F7-49F1-9A5F-E84C33481610}"/>
+                <a16:creationId xmlns:a16="http://schemas.microsoft.com/office/drawing/2014/main" id="{2EE2AD72-AAED-47F2-87E8-8679C89BDD70}"/>
               </a:ext>
             </a:extLst>
           </p:cNvPr>
@@ -9687,7 +10377,7 @@
           <p:cNvPr id="5" name="ambient-core">
             <a:extLst xmlns:a="http://schemas.openxmlformats.org/drawingml/2006/main">
               <a:ext uri="{FF2B5EF4-FFF2-40B4-BE49-F238E27FC236}">
-                <a16:creationId xmlns:a16="http://schemas.microsoft.com/office/drawing/2014/main" id="{CAC99219-EE09-411C-8405-01C74708F4FA}"/>
+                <a16:creationId xmlns:a16="http://schemas.microsoft.com/office/drawing/2014/main" id="{A157EA5B-FC63-4E86-AC21-50D2FDDF35A0}"/>
               </a:ext>
             </a:extLst>
           </p:cNvPr>
@@ -9724,7 +10414,7 @@
           <p:cNvPr id="6" name="eyebrow">
             <a:extLst xmlns:a="http://schemas.openxmlformats.org/drawingml/2006/main">
               <a:ext uri="{FF2B5EF4-FFF2-40B4-BE49-F238E27FC236}">
-                <a16:creationId xmlns:a16="http://schemas.microsoft.com/office/drawing/2014/main" id="{50CBE451-9FD1-489C-8AE0-CC109C5E109A}"/>
+                <a16:creationId xmlns:a16="http://schemas.microsoft.com/office/drawing/2014/main" id="{E5730F42-84D0-4383-BFEB-9ED7EE48B008}"/>
               </a:ext>
             </a:extLst>
           </p:cNvPr>
@@ -9772,10 +10462,69 @@
       </p:sp>
       <p:sp>
         <p:nvSpPr>
-          <p:cNvPr id="7" name="footer-rule">
-            <a:extLst xmlns:a="http://schemas.openxmlformats.org/drawingml/2006/main">
-              <a:ext uri="{FF2B5EF4-FFF2-40B4-BE49-F238E27FC236}">
-                <a16:creationId xmlns:a16="http://schemas.microsoft.com/office/drawing/2014/main" id="{C63C0700-A8FD-4C25-A8D4-33799D798487}"/>
+          <p:cNvPr id="7" name="rescue-point-logo-background">
+            <a:extLst xmlns:a="http://schemas.openxmlformats.org/drawingml/2006/main">
+              <a:ext uri="{FF2B5EF4-FFF2-40B4-BE49-F238E27FC236}">
+                <a16:creationId xmlns:a16="http://schemas.microsoft.com/office/drawing/2014/main" id="{729E1693-C5ED-4425-AA99-F391B2E3BABF}"/>
+              </a:ext>
+            </a:extLst>
+          </p:cNvPr>
+          <p:cNvSpPr>
+            <a:spLocks xmlns:a="http://schemas.openxmlformats.org/drawingml/2006/main" noGrp="1"/>
+          </p:cNvSpPr>
+          <p:nvPr/>
+        </p:nvSpPr>
+        <p:spPr>
+          <a:xfrm xmlns:a="http://schemas.openxmlformats.org/drawingml/2006/main">
+            <a:off x="9772650" y="133350"/>
+            <a:ext cx="1733550" cy="457200"/>
+          </a:xfrm>
+          <a:prstGeom xmlns:a="http://schemas.openxmlformats.org/drawingml/2006/main" prst="roundRect">
+            <a:avLst>
+              <a:gd name="adj" fmla="val 16667"/>
+            </a:avLst>
+          </a:prstGeom>
+          <a:solidFill xmlns:a="http://schemas.openxmlformats.org/drawingml/2006/main">
+            <a:srgbClr val="06142E"/>
+          </a:solidFill>
+          <a:ln xmlns:a="http://schemas.openxmlformats.org/drawingml/2006/main" w="9525">
+            <a:solidFill>
+              <a:srgbClr val="1EC5FF">
+                <a:alpha val="33333"/>
+              </a:srgbClr>
+            </a:solidFill>
+            <a:prstDash val="solid"/>
+          </a:ln>
+        </p:spPr>
+      </p:sp>
+      <p:pic>
+        <p:nvPicPr>
+          <p:cNvPr id="21" name="" descr="Figura oficial da documentação dbt usada para explicar: RADAR — Catálogo avançado amplia experiência, mas o contrato open já é executável.."/>
+          <p:cNvPicPr>
+            <a:picLocks xmlns:a="http://schemas.openxmlformats.org/drawingml/2006/main" noChangeAspect="1"/>
+          </p:cNvPicPr>
+          <p:nvPr/>
+        </p:nvPicPr>
+        <p:blipFill>
+          <a:blip xmlns:r="http://schemas.openxmlformats.org/officeDocument/2006/relationships" xmlns:a="http://schemas.openxmlformats.org/drawingml/2006/main" r:embed="R4c7fdcabb20c43be"/>
+          <a:stretch xmlns:a="http://schemas.openxmlformats.org/drawingml/2006/main"/>
+        </p:blipFill>
+        <p:spPr>
+          <a:xfrm xmlns:a="http://schemas.openxmlformats.org/drawingml/2006/main">
+            <a:off x="9893718" y="209550"/>
+            <a:ext cx="1491414" cy="323850"/>
+          </a:xfrm>
+          <a:prstGeom xmlns:a="http://schemas.openxmlformats.org/drawingml/2006/main" prst="rect">
+            <a:avLst/>
+          </a:prstGeom>
+        </p:spPr>
+      </p:pic>
+      <p:sp>
+        <p:nvSpPr>
+          <p:cNvPr id="9" name="footer-rule">
+            <a:extLst xmlns:a="http://schemas.openxmlformats.org/drawingml/2006/main">
+              <a:ext uri="{FF2B5EF4-FFF2-40B4-BE49-F238E27FC236}">
+                <a16:creationId xmlns:a16="http://schemas.microsoft.com/office/drawing/2014/main" id="{112820D2-D29C-41A8-90B8-0DF14F62B881}"/>
               </a:ext>
             </a:extLst>
           </p:cNvPr>
@@ -9805,10 +10554,10 @@
       </p:sp>
       <p:sp>
         <p:nvSpPr>
-          <p:cNvPr id="8" name="footer">
-            <a:extLst xmlns:a="http://schemas.openxmlformats.org/drawingml/2006/main">
-              <a:ext uri="{FF2B5EF4-FFF2-40B4-BE49-F238E27FC236}">
-                <a16:creationId xmlns:a16="http://schemas.microsoft.com/office/drawing/2014/main" id="{A0A50B0E-8D57-4E6C-8EB5-D2DF17089558}"/>
+          <p:cNvPr id="10" name="footer">
+            <a:extLst xmlns:a="http://schemas.openxmlformats.org/drawingml/2006/main">
+              <a:ext uri="{FF2B5EF4-FFF2-40B4-BE49-F238E27FC236}">
+                <a16:creationId xmlns:a16="http://schemas.microsoft.com/office/drawing/2014/main" id="{7063A5CB-49AD-44DE-A877-1DD37D52E2F5}"/>
               </a:ext>
             </a:extLst>
           </p:cNvPr>
@@ -9860,10 +10609,10 @@
       </p:sp>
       <p:sp>
         <p:nvSpPr>
-          <p:cNvPr id="9" name="page-number">
-            <a:extLst xmlns:a="http://schemas.openxmlformats.org/drawingml/2006/main">
-              <a:ext uri="{FF2B5EF4-FFF2-40B4-BE49-F238E27FC236}">
-                <a16:creationId xmlns:a16="http://schemas.microsoft.com/office/drawing/2014/main" id="{F2CAAC8D-9044-4F7D-B62D-C58FCECD6A07}"/>
+          <p:cNvPr id="11" name="page-number">
+            <a:extLst xmlns:a="http://schemas.openxmlformats.org/drawingml/2006/main">
+              <a:ext uri="{FF2B5EF4-FFF2-40B4-BE49-F238E27FC236}">
+                <a16:creationId xmlns:a16="http://schemas.microsoft.com/office/drawing/2014/main" id="{7B59AAA2-B0DF-488F-9E47-4E18C03DEF57}"/>
               </a:ext>
             </a:extLst>
           </p:cNvPr>
@@ -9916,7 +10665,7 @@
     </p:spTree>
     <p:extLst>
       <p:ext uri="{BB962C8B-B14F-4D97-AF65-F5344CB8AC3E}">
-        <p14:creationId xmlns:p14="http://schemas.microsoft.com/office/powerpoint/2010/main" val="1685794090"/>
+        <p14:creationId xmlns:p14="http://schemas.microsoft.com/office/powerpoint/2010/main" val="2073493659"/>
       </p:ext>
     </p:extLst>
   </p:cSld>
@@ -9944,10 +10693,10 @@
       </p:grpSpPr>
       <p:sp>
         <p:nvSpPr>
-          <p:cNvPr id="10" name="hook">
-            <a:extLst xmlns:a="http://schemas.openxmlformats.org/drawingml/2006/main">
-              <a:ext uri="{FF2B5EF4-FFF2-40B4-BE49-F238E27FC236}">
-                <a16:creationId xmlns:a16="http://schemas.microsoft.com/office/drawing/2014/main" id="{F449247B-A1E2-4E3D-8FAB-1664AA3F96A0}"/>
+          <p:cNvPr id="12" name="hook">
+            <a:extLst xmlns:a="http://schemas.openxmlformats.org/drawingml/2006/main">
+              <a:ext uri="{FF2B5EF4-FFF2-40B4-BE49-F238E27FC236}">
+                <a16:creationId xmlns:a16="http://schemas.microsoft.com/office/drawing/2014/main" id="{29C2ED67-5930-4141-BC8C-0A2C0E9ECAEE}"/>
               </a:ext>
             </a:extLst>
           </p:cNvPr>
@@ -9998,7 +10747,7 @@
           <p:cNvPr id="2" name="hook-rule">
             <a:extLst xmlns:a="http://schemas.openxmlformats.org/drawingml/2006/main">
               <a:ext uri="{FF2B5EF4-FFF2-40B4-BE49-F238E27FC236}">
-                <a16:creationId xmlns:a16="http://schemas.microsoft.com/office/drawing/2014/main" id="{B438FB8E-C056-4F81-9C7B-35DD09C4AA89}"/>
+                <a16:creationId xmlns:a16="http://schemas.microsoft.com/office/drawing/2014/main" id="{89E1B166-8158-4531-AC2F-B11A98910FE7}"/>
               </a:ext>
             </a:extLst>
           </p:cNvPr>
@@ -10029,7 +10778,7 @@
           <p:cNvPr id="3" name="hook-label">
             <a:extLst xmlns:a="http://schemas.openxmlformats.org/drawingml/2006/main">
               <a:ext uri="{FF2B5EF4-FFF2-40B4-BE49-F238E27FC236}">
-                <a16:creationId xmlns:a16="http://schemas.microsoft.com/office/drawing/2014/main" id="{729721E9-F586-4F6E-89F3-00533F5AF550}"/>
+                <a16:creationId xmlns:a16="http://schemas.microsoft.com/office/drawing/2014/main" id="{F148CB80-F927-415A-8453-36797280C434}"/>
               </a:ext>
             </a:extLst>
           </p:cNvPr>
@@ -10080,7 +10829,7 @@
           <p:cNvPr id="4" name="diagram-surface">
             <a:extLst xmlns:a="http://schemas.openxmlformats.org/drawingml/2006/main">
               <a:ext uri="{FF2B5EF4-FFF2-40B4-BE49-F238E27FC236}">
-                <a16:creationId xmlns:a16="http://schemas.microsoft.com/office/drawing/2014/main" id="{F66E3A41-48DB-4E1C-BD87-268C8BFA4D9A}"/>
+                <a16:creationId xmlns:a16="http://schemas.microsoft.com/office/drawing/2014/main" id="{7C823585-6873-4ABD-BA3E-27006B5BEBFC}"/>
               </a:ext>
             </a:extLst>
           </p:cNvPr>
@@ -10112,14 +10861,14 @@
       </p:sp>
       <p:pic>
         <p:nvPicPr>
-          <p:cNvPr id="16" name="" descr="Diagrama didático autoral que apresenta: Owner sem alerta e tag sem seleção são apenas decoração no YAML. — A pergunta que guia a aula."/>
+          <p:cNvPr id="19" name="" descr="Diagrama didático autoral que apresenta: Owner sem alerta e tag sem seleção são apenas decoração no YAML. — A pergunta que guia a aula."/>
           <p:cNvPicPr>
             <a:picLocks xmlns:a="http://schemas.openxmlformats.org/drawingml/2006/main" noChangeAspect="1"/>
           </p:cNvPicPr>
           <p:nvPr/>
         </p:nvPicPr>
         <p:blipFill>
-          <a:blip xmlns:r="http://schemas.openxmlformats.org/officeDocument/2006/relationships" xmlns:a="http://schemas.openxmlformats.org/drawingml/2006/main" r:embed="Ra3a4ce14934a4732"/>
+          <a:blip xmlns:r="http://schemas.openxmlformats.org/officeDocument/2006/relationships" xmlns:a="http://schemas.openxmlformats.org/drawingml/2006/main" r:embed="Rf366364f7ae74315"/>
           <a:stretch xmlns:a="http://schemas.openxmlformats.org/drawingml/2006/main"/>
         </p:blipFill>
         <p:spPr>
@@ -10137,7 +10886,7 @@
           <p:cNvPr id="6" name="eyebrow">
             <a:extLst xmlns:a="http://schemas.openxmlformats.org/drawingml/2006/main">
               <a:ext uri="{FF2B5EF4-FFF2-40B4-BE49-F238E27FC236}">
-                <a16:creationId xmlns:a16="http://schemas.microsoft.com/office/drawing/2014/main" id="{C24BBE01-95BA-406C-90AF-574E690D2DA6}"/>
+                <a16:creationId xmlns:a16="http://schemas.microsoft.com/office/drawing/2014/main" id="{27343C52-DADB-4335-A5D3-1A14941826FD}"/>
               </a:ext>
             </a:extLst>
           </p:cNvPr>
@@ -10185,10 +10934,69 @@
       </p:sp>
       <p:sp>
         <p:nvSpPr>
-          <p:cNvPr id="7" name="footer-rule">
-            <a:extLst xmlns:a="http://schemas.openxmlformats.org/drawingml/2006/main">
-              <a:ext uri="{FF2B5EF4-FFF2-40B4-BE49-F238E27FC236}">
-                <a16:creationId xmlns:a16="http://schemas.microsoft.com/office/drawing/2014/main" id="{FC34D942-49F4-4A77-B758-BA64E39229BA}"/>
+          <p:cNvPr id="7" name="rescue-point-logo-background">
+            <a:extLst xmlns:a="http://schemas.openxmlformats.org/drawingml/2006/main">
+              <a:ext uri="{FF2B5EF4-FFF2-40B4-BE49-F238E27FC236}">
+                <a16:creationId xmlns:a16="http://schemas.microsoft.com/office/drawing/2014/main" id="{E04B2441-4EDB-4048-B204-A60A153BDB94}"/>
+              </a:ext>
+            </a:extLst>
+          </p:cNvPr>
+          <p:cNvSpPr>
+            <a:spLocks xmlns:a="http://schemas.openxmlformats.org/drawingml/2006/main" noGrp="1"/>
+          </p:cNvSpPr>
+          <p:nvPr/>
+        </p:nvSpPr>
+        <p:spPr>
+          <a:xfrm xmlns:a="http://schemas.openxmlformats.org/drawingml/2006/main">
+            <a:off x="9772650" y="133350"/>
+            <a:ext cx="1733550" cy="457200"/>
+          </a:xfrm>
+          <a:prstGeom xmlns:a="http://schemas.openxmlformats.org/drawingml/2006/main" prst="roundRect">
+            <a:avLst>
+              <a:gd name="adj" fmla="val 16667"/>
+            </a:avLst>
+          </a:prstGeom>
+          <a:solidFill xmlns:a="http://schemas.openxmlformats.org/drawingml/2006/main">
+            <a:srgbClr val="06142E"/>
+          </a:solidFill>
+          <a:ln xmlns:a="http://schemas.openxmlformats.org/drawingml/2006/main" w="9525">
+            <a:solidFill>
+              <a:srgbClr val="1EC5FF">
+                <a:alpha val="33333"/>
+              </a:srgbClr>
+            </a:solidFill>
+            <a:prstDash val="solid"/>
+          </a:ln>
+        </p:spPr>
+      </p:sp>
+      <p:pic>
+        <p:nvPicPr>
+          <p:cNvPr id="22" name="" descr="Diagrama didático autoral que apresenta: Owner sem alerta e tag sem seleção são apenas decoração no YAML. — A pergunta que guia a aula."/>
+          <p:cNvPicPr>
+            <a:picLocks xmlns:a="http://schemas.openxmlformats.org/drawingml/2006/main" noChangeAspect="1"/>
+          </p:cNvPicPr>
+          <p:nvPr/>
+        </p:nvPicPr>
+        <p:blipFill>
+          <a:blip xmlns:r="http://schemas.openxmlformats.org/officeDocument/2006/relationships" xmlns:a="http://schemas.openxmlformats.org/drawingml/2006/main" r:embed="R0728ab0653514fdf"/>
+          <a:stretch xmlns:a="http://schemas.openxmlformats.org/drawingml/2006/main"/>
+        </p:blipFill>
+        <p:spPr>
+          <a:xfrm xmlns:a="http://schemas.openxmlformats.org/drawingml/2006/main">
+            <a:off x="9893718" y="209550"/>
+            <a:ext cx="1491414" cy="323850"/>
+          </a:xfrm>
+          <a:prstGeom xmlns:a="http://schemas.openxmlformats.org/drawingml/2006/main" prst="rect">
+            <a:avLst/>
+          </a:prstGeom>
+        </p:spPr>
+      </p:pic>
+      <p:sp>
+        <p:nvSpPr>
+          <p:cNvPr id="9" name="footer-rule">
+            <a:extLst xmlns:a="http://schemas.openxmlformats.org/drawingml/2006/main">
+              <a:ext uri="{FF2B5EF4-FFF2-40B4-BE49-F238E27FC236}">
+                <a16:creationId xmlns:a16="http://schemas.microsoft.com/office/drawing/2014/main" id="{FB8D8D14-7A11-4A43-A8CF-5900A01F65A5}"/>
               </a:ext>
             </a:extLst>
           </p:cNvPr>
@@ -10218,10 +11026,10 @@
       </p:sp>
       <p:sp>
         <p:nvSpPr>
-          <p:cNvPr id="8" name="footer">
-            <a:extLst xmlns:a="http://schemas.openxmlformats.org/drawingml/2006/main">
-              <a:ext uri="{FF2B5EF4-FFF2-40B4-BE49-F238E27FC236}">
-                <a16:creationId xmlns:a16="http://schemas.microsoft.com/office/drawing/2014/main" id="{3998F9E8-D4D1-413F-B366-72025F7FD3CF}"/>
+          <p:cNvPr id="10" name="footer">
+            <a:extLst xmlns:a="http://schemas.openxmlformats.org/drawingml/2006/main">
+              <a:ext uri="{FF2B5EF4-FFF2-40B4-BE49-F238E27FC236}">
+                <a16:creationId xmlns:a16="http://schemas.microsoft.com/office/drawing/2014/main" id="{257BB461-1D77-4756-8C56-659285668A05}"/>
               </a:ext>
             </a:extLst>
           </p:cNvPr>
@@ -10273,10 +11081,10 @@
       </p:sp>
       <p:sp>
         <p:nvSpPr>
-          <p:cNvPr id="9" name="page-number">
-            <a:extLst xmlns:a="http://schemas.openxmlformats.org/drawingml/2006/main">
-              <a:ext uri="{FF2B5EF4-FFF2-40B4-BE49-F238E27FC236}">
-                <a16:creationId xmlns:a16="http://schemas.microsoft.com/office/drawing/2014/main" id="{5C9F9DF5-395D-4BBA-8B87-42DADD2670EC}"/>
+          <p:cNvPr id="11" name="page-number">
+            <a:extLst xmlns:a="http://schemas.openxmlformats.org/drawingml/2006/main">
+              <a:ext uri="{FF2B5EF4-FFF2-40B4-BE49-F238E27FC236}">
+                <a16:creationId xmlns:a16="http://schemas.microsoft.com/office/drawing/2014/main" id="{609F5321-D120-4F14-8A04-45C0A87142F7}"/>
               </a:ext>
             </a:extLst>
           </p:cNvPr>
@@ -10329,7 +11137,7 @@
     </p:spTree>
     <p:extLst>
       <p:ext uri="{BB962C8B-B14F-4D97-AF65-F5344CB8AC3E}">
-        <p14:creationId xmlns:p14="http://schemas.microsoft.com/office/powerpoint/2010/main" val="1837596999"/>
+        <p14:creationId xmlns:p14="http://schemas.microsoft.com/office/powerpoint/2010/main" val="825986284"/>
       </p:ext>
     </p:extLst>
   </p:cSld>
@@ -10357,10 +11165,10 @@
       </p:grpSpPr>
       <p:sp>
         <p:nvSpPr>
-          <p:cNvPr id="8" name="cta-label">
-            <a:extLst xmlns:a="http://schemas.openxmlformats.org/drawingml/2006/main">
-              <a:ext uri="{FF2B5EF4-FFF2-40B4-BE49-F238E27FC236}">
-                <a16:creationId xmlns:a16="http://schemas.microsoft.com/office/drawing/2014/main" id="{F3D693B7-891B-450C-B592-E335D0E5A8CD}"/>
+          <p:cNvPr id="10" name="cta-label">
+            <a:extLst xmlns:a="http://schemas.openxmlformats.org/drawingml/2006/main">
+              <a:ext uri="{FF2B5EF4-FFF2-40B4-BE49-F238E27FC236}">
+                <a16:creationId xmlns:a16="http://schemas.microsoft.com/office/drawing/2014/main" id="{2DCFA6CF-47D0-48E3-B7FF-5C58D23181FA}"/>
               </a:ext>
             </a:extLst>
           </p:cNvPr>
@@ -10411,7 +11219,7 @@
           <p:cNvPr id="2" name="cta">
             <a:extLst xmlns:a="http://schemas.openxmlformats.org/drawingml/2006/main">
               <a:ext uri="{FF2B5EF4-FFF2-40B4-BE49-F238E27FC236}">
-                <a16:creationId xmlns:a16="http://schemas.microsoft.com/office/drawing/2014/main" id="{51F04A0F-5C79-44E9-99F2-5CE9BFA6619E}"/>
+                <a16:creationId xmlns:a16="http://schemas.microsoft.com/office/drawing/2014/main" id="{B65DBB4C-C3DC-434F-A437-5B3E26296C45}"/>
               </a:ext>
             </a:extLst>
           </p:cNvPr>
@@ -10462,7 +11270,7 @@
           <p:cNvPr id="3" name="cta-meta">
             <a:extLst xmlns:a="http://schemas.openxmlformats.org/drawingml/2006/main">
               <a:ext uri="{FF2B5EF4-FFF2-40B4-BE49-F238E27FC236}">
-                <a16:creationId xmlns:a16="http://schemas.microsoft.com/office/drawing/2014/main" id="{E1548E0D-1935-4A1A-B2C9-DC25C07F6DD1}"/>
+                <a16:creationId xmlns:a16="http://schemas.microsoft.com/office/drawing/2014/main" id="{D7E942C0-44D9-41E4-960C-3CDBC6158901}"/>
               </a:ext>
             </a:extLst>
           </p:cNvPr>
@@ -10513,7 +11321,7 @@
           <p:cNvPr id="4" name="eyebrow">
             <a:extLst xmlns:a="http://schemas.openxmlformats.org/drawingml/2006/main">
               <a:ext uri="{FF2B5EF4-FFF2-40B4-BE49-F238E27FC236}">
-                <a16:creationId xmlns:a16="http://schemas.microsoft.com/office/drawing/2014/main" id="{716C92CF-EE21-4192-96F6-E9C4A5E96F4A}"/>
+                <a16:creationId xmlns:a16="http://schemas.microsoft.com/office/drawing/2014/main" id="{32E3042E-F1D5-4845-9DE4-082B55AB1C87}"/>
               </a:ext>
             </a:extLst>
           </p:cNvPr>
@@ -10561,10 +11369,69 @@
       </p:sp>
       <p:sp>
         <p:nvSpPr>
-          <p:cNvPr id="5" name="footer-rule">
-            <a:extLst xmlns:a="http://schemas.openxmlformats.org/drawingml/2006/main">
-              <a:ext uri="{FF2B5EF4-FFF2-40B4-BE49-F238E27FC236}">
-                <a16:creationId xmlns:a16="http://schemas.microsoft.com/office/drawing/2014/main" id="{2A51320A-A61B-4556-9165-2573BCC6F2F7}"/>
+          <p:cNvPr id="5" name="rescue-point-logo-background">
+            <a:extLst xmlns:a="http://schemas.openxmlformats.org/drawingml/2006/main">
+              <a:ext uri="{FF2B5EF4-FFF2-40B4-BE49-F238E27FC236}">
+                <a16:creationId xmlns:a16="http://schemas.microsoft.com/office/drawing/2014/main" id="{77BAA056-2171-42C0-8568-CDAE403E1CB9}"/>
+              </a:ext>
+            </a:extLst>
+          </p:cNvPr>
+          <p:cNvSpPr>
+            <a:spLocks xmlns:a="http://schemas.openxmlformats.org/drawingml/2006/main" noGrp="1"/>
+          </p:cNvSpPr>
+          <p:nvPr/>
+        </p:nvSpPr>
+        <p:spPr>
+          <a:xfrm xmlns:a="http://schemas.openxmlformats.org/drawingml/2006/main">
+            <a:off x="9772650" y="133350"/>
+            <a:ext cx="1733550" cy="457200"/>
+          </a:xfrm>
+          <a:prstGeom xmlns:a="http://schemas.openxmlformats.org/drawingml/2006/main" prst="roundRect">
+            <a:avLst>
+              <a:gd name="adj" fmla="val 16667"/>
+            </a:avLst>
+          </a:prstGeom>
+          <a:solidFill xmlns:a="http://schemas.openxmlformats.org/drawingml/2006/main">
+            <a:srgbClr val="06142E"/>
+          </a:solidFill>
+          <a:ln xmlns:a="http://schemas.openxmlformats.org/drawingml/2006/main" w="9525">
+            <a:solidFill>
+              <a:srgbClr val="1EC5FF">
+                <a:alpha val="33333"/>
+              </a:srgbClr>
+            </a:solidFill>
+            <a:prstDash val="solid"/>
+          </a:ln>
+        </p:spPr>
+      </p:sp>
+      <p:pic>
+        <p:nvPicPr>
+          <p:cNvPr id="17" name="" descr="Figura oficial da documentação dbt usada para explicar: PRÓXIMO PASSO — Escolha um produto Gold e declare owner, group, access e exposure.."/>
+          <p:cNvPicPr>
+            <a:picLocks xmlns:a="http://schemas.openxmlformats.org/drawingml/2006/main" noChangeAspect="1"/>
+          </p:cNvPicPr>
+          <p:nvPr/>
+        </p:nvPicPr>
+        <p:blipFill>
+          <a:blip xmlns:r="http://schemas.openxmlformats.org/officeDocument/2006/relationships" xmlns:a="http://schemas.openxmlformats.org/drawingml/2006/main" r:embed="R4775502e06724c5a"/>
+          <a:stretch xmlns:a="http://schemas.openxmlformats.org/drawingml/2006/main"/>
+        </p:blipFill>
+        <p:spPr>
+          <a:xfrm xmlns:a="http://schemas.openxmlformats.org/drawingml/2006/main">
+            <a:off x="9893718" y="209550"/>
+            <a:ext cx="1491414" cy="323850"/>
+          </a:xfrm>
+          <a:prstGeom xmlns:a="http://schemas.openxmlformats.org/drawingml/2006/main" prst="rect">
+            <a:avLst/>
+          </a:prstGeom>
+        </p:spPr>
+      </p:pic>
+      <p:sp>
+        <p:nvSpPr>
+          <p:cNvPr id="7" name="footer-rule">
+            <a:extLst xmlns:a="http://schemas.openxmlformats.org/drawingml/2006/main">
+              <a:ext uri="{FF2B5EF4-FFF2-40B4-BE49-F238E27FC236}">
+                <a16:creationId xmlns:a16="http://schemas.microsoft.com/office/drawing/2014/main" id="{64140DC7-0EDE-42AB-AF75-A2B4538086F5}"/>
               </a:ext>
             </a:extLst>
           </p:cNvPr>
@@ -10594,10 +11461,10 @@
       </p:sp>
       <p:sp>
         <p:nvSpPr>
-          <p:cNvPr id="6" name="footer">
-            <a:extLst xmlns:a="http://schemas.openxmlformats.org/drawingml/2006/main">
-              <a:ext uri="{FF2B5EF4-FFF2-40B4-BE49-F238E27FC236}">
-                <a16:creationId xmlns:a16="http://schemas.microsoft.com/office/drawing/2014/main" id="{D9D7234B-F137-4ED6-91F9-7D87CBA52423}"/>
+          <p:cNvPr id="8" name="footer">
+            <a:extLst xmlns:a="http://schemas.openxmlformats.org/drawingml/2006/main">
+              <a:ext uri="{FF2B5EF4-FFF2-40B4-BE49-F238E27FC236}">
+                <a16:creationId xmlns:a16="http://schemas.microsoft.com/office/drawing/2014/main" id="{4DBAA3FA-AA3E-4184-ADB7-9E8040114673}"/>
               </a:ext>
             </a:extLst>
           </p:cNvPr>
@@ -10649,10 +11516,10 @@
       </p:sp>
       <p:sp>
         <p:nvSpPr>
-          <p:cNvPr id="7" name="page-number">
-            <a:extLst xmlns:a="http://schemas.openxmlformats.org/drawingml/2006/main">
-              <a:ext uri="{FF2B5EF4-FFF2-40B4-BE49-F238E27FC236}">
-                <a16:creationId xmlns:a16="http://schemas.microsoft.com/office/drawing/2014/main" id="{AA06A270-1C36-4551-97E0-DED905481A92}"/>
+          <p:cNvPr id="9" name="page-number">
+            <a:extLst xmlns:a="http://schemas.openxmlformats.org/drawingml/2006/main">
+              <a:ext uri="{FF2B5EF4-FFF2-40B4-BE49-F238E27FC236}">
+                <a16:creationId xmlns:a16="http://schemas.microsoft.com/office/drawing/2014/main" id="{24FD8DF4-F8FB-44A6-8A3D-CD06B2710E3B}"/>
               </a:ext>
             </a:extLst>
           </p:cNvPr>
@@ -10705,7 +11572,7 @@
     </p:spTree>
     <p:extLst>
       <p:ext uri="{BB962C8B-B14F-4D97-AF65-F5344CB8AC3E}">
-        <p14:creationId xmlns:p14="http://schemas.microsoft.com/office/powerpoint/2010/main" val="769995192"/>
+        <p14:creationId xmlns:p14="http://schemas.microsoft.com/office/powerpoint/2010/main" val="1454526216"/>
       </p:ext>
     </p:extLst>
   </p:cSld>
@@ -10741,10 +11608,10 @@
       </p:grpSpPr>
       <p:sp>
         <p:nvSpPr>
-          <p:cNvPr id="14" name="slide-title">
-            <a:extLst xmlns:a="http://schemas.openxmlformats.org/drawingml/2006/main">
-              <a:ext uri="{FF2B5EF4-FFF2-40B4-BE49-F238E27FC236}">
-                <a16:creationId xmlns:a16="http://schemas.microsoft.com/office/drawing/2014/main" id="{242A576A-DDCA-45EB-9917-3F6B8F84B606}"/>
+          <p:cNvPr id="16" name="slide-title">
+            <a:extLst xmlns:a="http://schemas.openxmlformats.org/drawingml/2006/main">
+              <a:ext uri="{FF2B5EF4-FFF2-40B4-BE49-F238E27FC236}">
+                <a16:creationId xmlns:a16="http://schemas.microsoft.com/office/drawing/2014/main" id="{1FCDBCEA-DED6-4A86-AAD7-8B9E6DF043A5}"/>
               </a:ext>
             </a:extLst>
           </p:cNvPr>
@@ -10795,7 +11662,7 @@
           <p:cNvPr id="2" name="step-num-1">
             <a:extLst xmlns:a="http://schemas.openxmlformats.org/drawingml/2006/main">
               <a:ext uri="{FF2B5EF4-FFF2-40B4-BE49-F238E27FC236}">
-                <a16:creationId xmlns:a16="http://schemas.microsoft.com/office/drawing/2014/main" id="{96A70D07-7751-43DB-866D-B3B0CECE7FC7}"/>
+                <a16:creationId xmlns:a16="http://schemas.microsoft.com/office/drawing/2014/main" id="{521B8613-EAE0-4309-B070-95D345721B9E}"/>
               </a:ext>
             </a:extLst>
           </p:cNvPr>
@@ -10846,7 +11713,7 @@
           <p:cNvPr id="3" name="step-label-1">
             <a:extLst xmlns:a="http://schemas.openxmlformats.org/drawingml/2006/main">
               <a:ext uri="{FF2B5EF4-FFF2-40B4-BE49-F238E27FC236}">
-                <a16:creationId xmlns:a16="http://schemas.microsoft.com/office/drawing/2014/main" id="{D0369784-10C2-4452-9406-552355EE9C94}"/>
+                <a16:creationId xmlns:a16="http://schemas.microsoft.com/office/drawing/2014/main" id="{692C918C-BDF1-452C-B3C5-B1297759F9AE}"/>
               </a:ext>
             </a:extLst>
           </p:cNvPr>
@@ -10897,7 +11764,7 @@
           <p:cNvPr id="4" name="step-line-1">
             <a:extLst xmlns:a="http://schemas.openxmlformats.org/drawingml/2006/main">
               <a:ext uri="{FF2B5EF4-FFF2-40B4-BE49-F238E27FC236}">
-                <a16:creationId xmlns:a16="http://schemas.microsoft.com/office/drawing/2014/main" id="{E36905B3-8DF6-4FBB-A996-3F9D5063BF78}"/>
+                <a16:creationId xmlns:a16="http://schemas.microsoft.com/office/drawing/2014/main" id="{6F027C76-B7F3-444D-91A1-3FEB5E05D64A}"/>
               </a:ext>
             </a:extLst>
           </p:cNvPr>
@@ -10928,7 +11795,7 @@
           <p:cNvPr id="5" name="step-num-2">
             <a:extLst xmlns:a="http://schemas.openxmlformats.org/drawingml/2006/main">
               <a:ext uri="{FF2B5EF4-FFF2-40B4-BE49-F238E27FC236}">
-                <a16:creationId xmlns:a16="http://schemas.microsoft.com/office/drawing/2014/main" id="{1D8CFF76-15B5-4F3F-AD92-540B5C8AFE55}"/>
+                <a16:creationId xmlns:a16="http://schemas.microsoft.com/office/drawing/2014/main" id="{25BF3CF6-584E-4EC7-BB17-9CDE291BAE54}"/>
               </a:ext>
             </a:extLst>
           </p:cNvPr>
@@ -10979,7 +11846,7 @@
           <p:cNvPr id="6" name="step-label-2">
             <a:extLst xmlns:a="http://schemas.openxmlformats.org/drawingml/2006/main">
               <a:ext uri="{FF2B5EF4-FFF2-40B4-BE49-F238E27FC236}">
-                <a16:creationId xmlns:a16="http://schemas.microsoft.com/office/drawing/2014/main" id="{B0C12FEB-7D25-4006-90E5-55AAF6310FC8}"/>
+                <a16:creationId xmlns:a16="http://schemas.microsoft.com/office/drawing/2014/main" id="{2C622983-C53F-4B8E-916B-E33BBE00A35E}"/>
               </a:ext>
             </a:extLst>
           </p:cNvPr>
@@ -11030,7 +11897,7 @@
           <p:cNvPr id="7" name="step-line-2">
             <a:extLst xmlns:a="http://schemas.openxmlformats.org/drawingml/2006/main">
               <a:ext uri="{FF2B5EF4-FFF2-40B4-BE49-F238E27FC236}">
-                <a16:creationId xmlns:a16="http://schemas.microsoft.com/office/drawing/2014/main" id="{A2FA9A9C-8284-4597-829D-B7C6DED1AF8C}"/>
+                <a16:creationId xmlns:a16="http://schemas.microsoft.com/office/drawing/2014/main" id="{472B3C68-09C2-4365-AA24-23D4E5987A2C}"/>
               </a:ext>
             </a:extLst>
           </p:cNvPr>
@@ -11061,7 +11928,7 @@
           <p:cNvPr id="8" name="step-num-3">
             <a:extLst xmlns:a="http://schemas.openxmlformats.org/drawingml/2006/main">
               <a:ext uri="{FF2B5EF4-FFF2-40B4-BE49-F238E27FC236}">
-                <a16:creationId xmlns:a16="http://schemas.microsoft.com/office/drawing/2014/main" id="{7D6CB022-C557-4287-98D2-AB4458784D8D}"/>
+                <a16:creationId xmlns:a16="http://schemas.microsoft.com/office/drawing/2014/main" id="{47E743F1-68DF-422B-AC04-465D771CF932}"/>
               </a:ext>
             </a:extLst>
           </p:cNvPr>
@@ -11112,7 +11979,7 @@
           <p:cNvPr id="9" name="step-label-3">
             <a:extLst xmlns:a="http://schemas.openxmlformats.org/drawingml/2006/main">
               <a:ext uri="{FF2B5EF4-FFF2-40B4-BE49-F238E27FC236}">
-                <a16:creationId xmlns:a16="http://schemas.microsoft.com/office/drawing/2014/main" id="{7BA43F02-D3A4-4257-9DC0-1AFA4EFA7F62}"/>
+                <a16:creationId xmlns:a16="http://schemas.microsoft.com/office/drawing/2014/main" id="{1ADD5EAA-3CC8-433F-AE0E-AD36B7B1FDBD}"/>
               </a:ext>
             </a:extLst>
           </p:cNvPr>
@@ -11163,7 +12030,7 @@
           <p:cNvPr id="10" name="eyebrow">
             <a:extLst xmlns:a="http://schemas.openxmlformats.org/drawingml/2006/main">
               <a:ext uri="{FF2B5EF4-FFF2-40B4-BE49-F238E27FC236}">
-                <a16:creationId xmlns:a16="http://schemas.microsoft.com/office/drawing/2014/main" id="{18FEC939-44C8-408E-8605-12F0E0093FB0}"/>
+                <a16:creationId xmlns:a16="http://schemas.microsoft.com/office/drawing/2014/main" id="{A8B9CA39-079F-4C80-A51F-9CEAF9C303E6}"/>
               </a:ext>
             </a:extLst>
           </p:cNvPr>
@@ -11211,10 +12078,69 @@
       </p:sp>
       <p:sp>
         <p:nvSpPr>
-          <p:cNvPr id="11" name="footer-rule">
-            <a:extLst xmlns:a="http://schemas.openxmlformats.org/drawingml/2006/main">
-              <a:ext uri="{FF2B5EF4-FFF2-40B4-BE49-F238E27FC236}">
-                <a16:creationId xmlns:a16="http://schemas.microsoft.com/office/drawing/2014/main" id="{A28AD84B-DA55-4D2B-AA58-C374CC398606}"/>
+          <p:cNvPr id="11" name="rescue-point-logo-background">
+            <a:extLst xmlns:a="http://schemas.openxmlformats.org/drawingml/2006/main">
+              <a:ext uri="{FF2B5EF4-FFF2-40B4-BE49-F238E27FC236}">
+                <a16:creationId xmlns:a16="http://schemas.microsoft.com/office/drawing/2014/main" id="{5254E732-6DBF-44A5-A481-6106E13EAB6A}"/>
+              </a:ext>
+            </a:extLst>
+          </p:cNvPr>
+          <p:cNvSpPr>
+            <a:spLocks xmlns:a="http://schemas.openxmlformats.org/drawingml/2006/main" noGrp="1"/>
+          </p:cNvSpPr>
+          <p:nvPr/>
+        </p:nvSpPr>
+        <p:spPr>
+          <a:xfrm xmlns:a="http://schemas.openxmlformats.org/drawingml/2006/main">
+            <a:off x="9772650" y="133350"/>
+            <a:ext cx="1733550" cy="457200"/>
+          </a:xfrm>
+          <a:prstGeom xmlns:a="http://schemas.openxmlformats.org/drawingml/2006/main" prst="roundRect">
+            <a:avLst>
+              <a:gd name="adj" fmla="val 16667"/>
+            </a:avLst>
+          </a:prstGeom>
+          <a:solidFill xmlns:a="http://schemas.openxmlformats.org/drawingml/2006/main">
+            <a:srgbClr val="06142E"/>
+          </a:solidFill>
+          <a:ln xmlns:a="http://schemas.openxmlformats.org/drawingml/2006/main" w="9525">
+            <a:solidFill>
+              <a:srgbClr val="1EC5FF">
+                <a:alpha val="33333"/>
+              </a:srgbClr>
+            </a:solidFill>
+            <a:prstDash val="solid"/>
+          </a:ln>
+        </p:spPr>
+      </p:sp>
+      <p:pic>
+        <p:nvPicPr>
+          <p:cNvPr id="29" name="" descr="Figura oficial da documentação dbt usada para explicar: Ao final, você consegue... — 01."/>
+          <p:cNvPicPr>
+            <a:picLocks xmlns:a="http://schemas.openxmlformats.org/drawingml/2006/main" noChangeAspect="1"/>
+          </p:cNvPicPr>
+          <p:nvPr/>
+        </p:nvPicPr>
+        <p:blipFill>
+          <a:blip xmlns:r="http://schemas.openxmlformats.org/officeDocument/2006/relationships" xmlns:a="http://schemas.openxmlformats.org/drawingml/2006/main" r:embed="R14162fd2902f4818"/>
+          <a:stretch xmlns:a="http://schemas.openxmlformats.org/drawingml/2006/main"/>
+        </p:blipFill>
+        <p:spPr>
+          <a:xfrm xmlns:a="http://schemas.openxmlformats.org/drawingml/2006/main">
+            <a:off x="9893718" y="209550"/>
+            <a:ext cx="1491414" cy="323850"/>
+          </a:xfrm>
+          <a:prstGeom xmlns:a="http://schemas.openxmlformats.org/drawingml/2006/main" prst="rect">
+            <a:avLst/>
+          </a:prstGeom>
+        </p:spPr>
+      </p:pic>
+      <p:sp>
+        <p:nvSpPr>
+          <p:cNvPr id="13" name="footer-rule">
+            <a:extLst xmlns:a="http://schemas.openxmlformats.org/drawingml/2006/main">
+              <a:ext uri="{FF2B5EF4-FFF2-40B4-BE49-F238E27FC236}">
+                <a16:creationId xmlns:a16="http://schemas.microsoft.com/office/drawing/2014/main" id="{B14373A9-5D96-41E2-9C73-F3355AD41974}"/>
               </a:ext>
             </a:extLst>
           </p:cNvPr>
@@ -11244,10 +12170,10 @@
       </p:sp>
       <p:sp>
         <p:nvSpPr>
-          <p:cNvPr id="12" name="footer">
-            <a:extLst xmlns:a="http://schemas.openxmlformats.org/drawingml/2006/main">
-              <a:ext uri="{FF2B5EF4-FFF2-40B4-BE49-F238E27FC236}">
-                <a16:creationId xmlns:a16="http://schemas.microsoft.com/office/drawing/2014/main" id="{D087F791-CB60-4B57-BBD3-863F155EB012}"/>
+          <p:cNvPr id="14" name="footer">
+            <a:extLst xmlns:a="http://schemas.openxmlformats.org/drawingml/2006/main">
+              <a:ext uri="{FF2B5EF4-FFF2-40B4-BE49-F238E27FC236}">
+                <a16:creationId xmlns:a16="http://schemas.microsoft.com/office/drawing/2014/main" id="{A63A0E80-C62F-4967-BF42-688690B12C6B}"/>
               </a:ext>
             </a:extLst>
           </p:cNvPr>
@@ -11299,10 +12225,10 @@
       </p:sp>
       <p:sp>
         <p:nvSpPr>
-          <p:cNvPr id="13" name="page-number">
-            <a:extLst xmlns:a="http://schemas.openxmlformats.org/drawingml/2006/main">
-              <a:ext uri="{FF2B5EF4-FFF2-40B4-BE49-F238E27FC236}">
-                <a16:creationId xmlns:a16="http://schemas.microsoft.com/office/drawing/2014/main" id="{E17EA2B1-ED16-437B-A0C3-9CA12AE4C764}"/>
+          <p:cNvPr id="15" name="page-number">
+            <a:extLst xmlns:a="http://schemas.openxmlformats.org/drawingml/2006/main">
+              <a:ext uri="{FF2B5EF4-FFF2-40B4-BE49-F238E27FC236}">
+                <a16:creationId xmlns:a16="http://schemas.microsoft.com/office/drawing/2014/main" id="{E85C628E-B6B2-47DF-9019-E25499D00C0F}"/>
               </a:ext>
             </a:extLst>
           </p:cNvPr>
@@ -11355,7 +12281,7 @@
     </p:spTree>
     <p:extLst>
       <p:ext uri="{BB962C8B-B14F-4D97-AF65-F5344CB8AC3E}">
-        <p14:creationId xmlns:p14="http://schemas.microsoft.com/office/powerpoint/2010/main" val="276550005"/>
+        <p14:creationId xmlns:p14="http://schemas.microsoft.com/office/powerpoint/2010/main" val="1231965421"/>
       </p:ext>
     </p:extLst>
   </p:cSld>
@@ -11391,10 +12317,10 @@
       </p:grpSpPr>
       <p:sp>
         <p:nvSpPr>
-          <p:cNvPr id="11" name="slide-title">
-            <a:extLst xmlns:a="http://schemas.openxmlformats.org/drawingml/2006/main">
-              <a:ext uri="{FF2B5EF4-FFF2-40B4-BE49-F238E27FC236}">
-                <a16:creationId xmlns:a16="http://schemas.microsoft.com/office/drawing/2014/main" id="{20A51481-6533-468E-A926-3A309F1E2714}"/>
+          <p:cNvPr id="13" name="slide-title">
+            <a:extLst xmlns:a="http://schemas.openxmlformats.org/drawingml/2006/main">
+              <a:ext uri="{FF2B5EF4-FFF2-40B4-BE49-F238E27FC236}">
+                <a16:creationId xmlns:a16="http://schemas.microsoft.com/office/drawing/2014/main" id="{02B67901-7565-4DB8-B3A4-3E671CD9C211}"/>
               </a:ext>
             </a:extLst>
           </p:cNvPr>
@@ -11445,7 +12371,7 @@
           <p:cNvPr id="2" name="slide-subtitle">
             <a:extLst xmlns:a="http://schemas.openxmlformats.org/drawingml/2006/main">
               <a:ext uri="{FF2B5EF4-FFF2-40B4-BE49-F238E27FC236}">
-                <a16:creationId xmlns:a16="http://schemas.microsoft.com/office/drawing/2014/main" id="{6F4FDEF1-81AB-4A5A-BBD1-2034FDF9A4C9}"/>
+                <a16:creationId xmlns:a16="http://schemas.microsoft.com/office/drawing/2014/main" id="{902F861E-6658-40D3-85AC-78504C693D11}"/>
               </a:ext>
             </a:extLst>
           </p:cNvPr>
@@ -11496,7 +12422,7 @@
           <p:cNvPr id="3" name="bullets">
             <a:extLst xmlns:a="http://schemas.openxmlformats.org/drawingml/2006/main">
               <a:ext uri="{FF2B5EF4-FFF2-40B4-BE49-F238E27FC236}">
-                <a16:creationId xmlns:a16="http://schemas.microsoft.com/office/drawing/2014/main" id="{655D6F55-83D2-4643-9530-BAE2C21C02F4}"/>
+                <a16:creationId xmlns:a16="http://schemas.microsoft.com/office/drawing/2014/main" id="{DB60AB55-3F06-4F25-9D6D-F227900968B2}"/>
               </a:ext>
             </a:extLst>
           </p:cNvPr>
@@ -11601,7 +12527,7 @@
           <p:cNvPr id="4" name="ambient-glow">
             <a:extLst xmlns:a="http://schemas.openxmlformats.org/drawingml/2006/main">
               <a:ext uri="{FF2B5EF4-FFF2-40B4-BE49-F238E27FC236}">
-                <a16:creationId xmlns:a16="http://schemas.microsoft.com/office/drawing/2014/main" id="{B59746F6-BCAB-4A8D-B0FB-907BEBFF50C0}"/>
+                <a16:creationId xmlns:a16="http://schemas.microsoft.com/office/drawing/2014/main" id="{4EE54D90-6CD6-4870-9F16-64C80F39B703}"/>
               </a:ext>
             </a:extLst>
           </p:cNvPr>
@@ -11638,7 +12564,7 @@
           <p:cNvPr id="5" name="ambient-core">
             <a:extLst xmlns:a="http://schemas.openxmlformats.org/drawingml/2006/main">
               <a:ext uri="{FF2B5EF4-FFF2-40B4-BE49-F238E27FC236}">
-                <a16:creationId xmlns:a16="http://schemas.microsoft.com/office/drawing/2014/main" id="{149F5522-61F6-45C0-9F23-0F42F6C05E04}"/>
+                <a16:creationId xmlns:a16="http://schemas.microsoft.com/office/drawing/2014/main" id="{3CD2D31B-E415-4FBB-B053-7FC376C878A8}"/>
               </a:ext>
             </a:extLst>
           </p:cNvPr>
@@ -11675,7 +12601,7 @@
           <p:cNvPr id="6" name="section-number">
             <a:extLst xmlns:a="http://schemas.openxmlformats.org/drawingml/2006/main">
               <a:ext uri="{FF2B5EF4-FFF2-40B4-BE49-F238E27FC236}">
-                <a16:creationId xmlns:a16="http://schemas.microsoft.com/office/drawing/2014/main" id="{A93344F8-5EEB-4E4A-9037-875D130E1147}"/>
+                <a16:creationId xmlns:a16="http://schemas.microsoft.com/office/drawing/2014/main" id="{9AE69F82-A4E5-4923-8373-C34F536E9374}"/>
               </a:ext>
             </a:extLst>
           </p:cNvPr>
@@ -11726,7 +12652,7 @@
           <p:cNvPr id="7" name="eyebrow">
             <a:extLst xmlns:a="http://schemas.openxmlformats.org/drawingml/2006/main">
               <a:ext uri="{FF2B5EF4-FFF2-40B4-BE49-F238E27FC236}">
-                <a16:creationId xmlns:a16="http://schemas.microsoft.com/office/drawing/2014/main" id="{3244167B-F587-4EF2-8183-947651FB3C1A}"/>
+                <a16:creationId xmlns:a16="http://schemas.microsoft.com/office/drawing/2014/main" id="{3CC8D2B6-CEA3-4E11-A3A8-3FA12E646860}"/>
               </a:ext>
             </a:extLst>
           </p:cNvPr>
@@ -11774,10 +12700,69 @@
       </p:sp>
       <p:sp>
         <p:nvSpPr>
-          <p:cNvPr id="8" name="footer-rule">
-            <a:extLst xmlns:a="http://schemas.openxmlformats.org/drawingml/2006/main">
-              <a:ext uri="{FF2B5EF4-FFF2-40B4-BE49-F238E27FC236}">
-                <a16:creationId xmlns:a16="http://schemas.microsoft.com/office/drawing/2014/main" id="{45F7281C-6869-42F4-83C2-0FFAF28924A1}"/>
+          <p:cNvPr id="8" name="rescue-point-logo-background">
+            <a:extLst xmlns:a="http://schemas.openxmlformats.org/drawingml/2006/main">
+              <a:ext uri="{FF2B5EF4-FFF2-40B4-BE49-F238E27FC236}">
+                <a16:creationId xmlns:a16="http://schemas.microsoft.com/office/drawing/2014/main" id="{02D87B94-B2B0-445C-AF51-14A58CD67DA1}"/>
+              </a:ext>
+            </a:extLst>
+          </p:cNvPr>
+          <p:cNvSpPr>
+            <a:spLocks xmlns:a="http://schemas.openxmlformats.org/drawingml/2006/main" noGrp="1"/>
+          </p:cNvSpPr>
+          <p:nvPr/>
+        </p:nvSpPr>
+        <p:spPr>
+          <a:xfrm xmlns:a="http://schemas.openxmlformats.org/drawingml/2006/main">
+            <a:off x="9772650" y="133350"/>
+            <a:ext cx="1733550" cy="457200"/>
+          </a:xfrm>
+          <a:prstGeom xmlns:a="http://schemas.openxmlformats.org/drawingml/2006/main" prst="roundRect">
+            <a:avLst>
+              <a:gd name="adj" fmla="val 16667"/>
+            </a:avLst>
+          </a:prstGeom>
+          <a:solidFill xmlns:a="http://schemas.openxmlformats.org/drawingml/2006/main">
+            <a:srgbClr val="06142E"/>
+          </a:solidFill>
+          <a:ln xmlns:a="http://schemas.openxmlformats.org/drawingml/2006/main" w="9525">
+            <a:solidFill>
+              <a:srgbClr val="1EC5FF">
+                <a:alpha val="33333"/>
+              </a:srgbClr>
+            </a:solidFill>
+            <a:prstDash val="solid"/>
+          </a:ln>
+        </p:spPr>
+      </p:sp>
+      <p:pic>
+        <p:nvPicPr>
+          <p:cNvPr id="23" name="" descr="Figura oficial da documentação dbt usada para explicar: Todo metadado precisa produzir uma ação — Owner roteia alerta; access bloqueia ref; exposure revela impacto.."/>
+          <p:cNvPicPr>
+            <a:picLocks xmlns:a="http://schemas.openxmlformats.org/drawingml/2006/main" noChangeAspect="1"/>
+          </p:cNvPicPr>
+          <p:nvPr/>
+        </p:nvPicPr>
+        <p:blipFill>
+          <a:blip xmlns:r="http://schemas.openxmlformats.org/officeDocument/2006/relationships" xmlns:a="http://schemas.openxmlformats.org/drawingml/2006/main" r:embed="R37aa4749c9c34466"/>
+          <a:stretch xmlns:a="http://schemas.openxmlformats.org/drawingml/2006/main"/>
+        </p:blipFill>
+        <p:spPr>
+          <a:xfrm xmlns:a="http://schemas.openxmlformats.org/drawingml/2006/main">
+            <a:off x="9893718" y="209550"/>
+            <a:ext cx="1491414" cy="323850"/>
+          </a:xfrm>
+          <a:prstGeom xmlns:a="http://schemas.openxmlformats.org/drawingml/2006/main" prst="rect">
+            <a:avLst/>
+          </a:prstGeom>
+        </p:spPr>
+      </p:pic>
+      <p:sp>
+        <p:nvSpPr>
+          <p:cNvPr id="10" name="footer-rule">
+            <a:extLst xmlns:a="http://schemas.openxmlformats.org/drawingml/2006/main">
+              <a:ext uri="{FF2B5EF4-FFF2-40B4-BE49-F238E27FC236}">
+                <a16:creationId xmlns:a16="http://schemas.microsoft.com/office/drawing/2014/main" id="{7306EFCB-F388-4CCD-8CAC-834486F4EE6B}"/>
               </a:ext>
             </a:extLst>
           </p:cNvPr>
@@ -11807,10 +12792,10 @@
       </p:sp>
       <p:sp>
         <p:nvSpPr>
-          <p:cNvPr id="9" name="footer">
-            <a:extLst xmlns:a="http://schemas.openxmlformats.org/drawingml/2006/main">
-              <a:ext uri="{FF2B5EF4-FFF2-40B4-BE49-F238E27FC236}">
-                <a16:creationId xmlns:a16="http://schemas.microsoft.com/office/drawing/2014/main" id="{0B2B5938-09D1-4254-B746-D834ED8F3D75}"/>
+          <p:cNvPr id="11" name="footer">
+            <a:extLst xmlns:a="http://schemas.openxmlformats.org/drawingml/2006/main">
+              <a:ext uri="{FF2B5EF4-FFF2-40B4-BE49-F238E27FC236}">
+                <a16:creationId xmlns:a16="http://schemas.microsoft.com/office/drawing/2014/main" id="{466AACBA-2EC5-4E89-9457-258E4F25AB1D}"/>
               </a:ext>
             </a:extLst>
           </p:cNvPr>
@@ -11862,10 +12847,10 @@
       </p:sp>
       <p:sp>
         <p:nvSpPr>
-          <p:cNvPr id="10" name="page-number">
-            <a:extLst xmlns:a="http://schemas.openxmlformats.org/drawingml/2006/main">
-              <a:ext uri="{FF2B5EF4-FFF2-40B4-BE49-F238E27FC236}">
-                <a16:creationId xmlns:a16="http://schemas.microsoft.com/office/drawing/2014/main" id="{F762A19B-7911-4863-BA1E-591A89B4203E}"/>
+          <p:cNvPr id="12" name="page-number">
+            <a:extLst xmlns:a="http://schemas.openxmlformats.org/drawingml/2006/main">
+              <a:ext uri="{FF2B5EF4-FFF2-40B4-BE49-F238E27FC236}">
+                <a16:creationId xmlns:a16="http://schemas.microsoft.com/office/drawing/2014/main" id="{AEAE060D-792E-4815-ACA1-4B3C23F00E94}"/>
               </a:ext>
             </a:extLst>
           </p:cNvPr>
@@ -11918,7 +12903,7 @@
     </p:spTree>
     <p:extLst>
       <p:ext uri="{BB962C8B-B14F-4D97-AF65-F5344CB8AC3E}">
-        <p14:creationId xmlns:p14="http://schemas.microsoft.com/office/powerpoint/2010/main" val="1336109412"/>
+        <p14:creationId xmlns:p14="http://schemas.microsoft.com/office/powerpoint/2010/main" val="733402279"/>
       </p:ext>
     </p:extLst>
   </p:cSld>
@@ -11946,10 +12931,10 @@
       </p:grpSpPr>
       <p:sp>
         <p:nvSpPr>
-          <p:cNvPr id="11" name="slide-title">
-            <a:extLst xmlns:a="http://schemas.openxmlformats.org/drawingml/2006/main">
-              <a:ext uri="{FF2B5EF4-FFF2-40B4-BE49-F238E27FC236}">
-                <a16:creationId xmlns:a16="http://schemas.microsoft.com/office/drawing/2014/main" id="{B9F8F2E8-9021-4D6A-88FC-F4A4D61508B2}"/>
+          <p:cNvPr id="13" name="slide-title">
+            <a:extLst xmlns:a="http://schemas.openxmlformats.org/drawingml/2006/main">
+              <a:ext uri="{FF2B5EF4-FFF2-40B4-BE49-F238E27FC236}">
+                <a16:creationId xmlns:a16="http://schemas.microsoft.com/office/drawing/2014/main" id="{B24841E6-AF02-4AD4-B95B-C0D3ECBAEEB3}"/>
               </a:ext>
             </a:extLst>
           </p:cNvPr>
@@ -12000,7 +12985,7 @@
           <p:cNvPr id="2" name="slide-subtitle">
             <a:extLst xmlns:a="http://schemas.openxmlformats.org/drawingml/2006/main">
               <a:ext uri="{FF2B5EF4-FFF2-40B4-BE49-F238E27FC236}">
-                <a16:creationId xmlns:a16="http://schemas.microsoft.com/office/drawing/2014/main" id="{0E68D225-55CE-4A19-A293-C4E0CEA7A74E}"/>
+                <a16:creationId xmlns:a16="http://schemas.microsoft.com/office/drawing/2014/main" id="{F86D0E6D-23C5-4E9D-99CE-DD0B79E91883}"/>
               </a:ext>
             </a:extLst>
           </p:cNvPr>
@@ -12051,7 +13036,7 @@
           <p:cNvPr id="3" name="bullets">
             <a:extLst xmlns:a="http://schemas.openxmlformats.org/drawingml/2006/main">
               <a:ext uri="{FF2B5EF4-FFF2-40B4-BE49-F238E27FC236}">
-                <a16:creationId xmlns:a16="http://schemas.microsoft.com/office/drawing/2014/main" id="{5988A62F-5D65-499C-B994-2F0A21E1F23B}"/>
+                <a16:creationId xmlns:a16="http://schemas.microsoft.com/office/drawing/2014/main" id="{1E74B08D-0FDE-42A0-B976-4F379883BD5E}"/>
               </a:ext>
             </a:extLst>
           </p:cNvPr>
@@ -12138,7 +13123,7 @@
           <p:cNvPr id="4" name="ambient-glow">
             <a:extLst xmlns:a="http://schemas.openxmlformats.org/drawingml/2006/main">
               <a:ext uri="{FF2B5EF4-FFF2-40B4-BE49-F238E27FC236}">
-                <a16:creationId xmlns:a16="http://schemas.microsoft.com/office/drawing/2014/main" id="{0E95C718-3D58-4C10-8571-E362552F2E85}"/>
+                <a16:creationId xmlns:a16="http://schemas.microsoft.com/office/drawing/2014/main" id="{916CE0B9-8129-4EEA-BC9D-A7D2EC0F019B}"/>
               </a:ext>
             </a:extLst>
           </p:cNvPr>
@@ -12175,7 +13160,7 @@
           <p:cNvPr id="5" name="ambient-core">
             <a:extLst xmlns:a="http://schemas.openxmlformats.org/drawingml/2006/main">
               <a:ext uri="{FF2B5EF4-FFF2-40B4-BE49-F238E27FC236}">
-                <a16:creationId xmlns:a16="http://schemas.microsoft.com/office/drawing/2014/main" id="{817B773E-85C6-49D8-A1F2-5740CCCD46F0}"/>
+                <a16:creationId xmlns:a16="http://schemas.microsoft.com/office/drawing/2014/main" id="{33DB8A0F-8945-4A17-9B07-C0FA9AF4C990}"/>
               </a:ext>
             </a:extLst>
           </p:cNvPr>
@@ -12212,7 +13197,7 @@
           <p:cNvPr id="6" name="section-number">
             <a:extLst xmlns:a="http://schemas.openxmlformats.org/drawingml/2006/main">
               <a:ext uri="{FF2B5EF4-FFF2-40B4-BE49-F238E27FC236}">
-                <a16:creationId xmlns:a16="http://schemas.microsoft.com/office/drawing/2014/main" id="{77CBCB0B-650A-44E2-9039-0CE621074997}"/>
+                <a16:creationId xmlns:a16="http://schemas.microsoft.com/office/drawing/2014/main" id="{12DBFC80-7CE2-45B6-8259-3F2C0F5BD557}"/>
               </a:ext>
             </a:extLst>
           </p:cNvPr>
@@ -12263,7 +13248,7 @@
           <p:cNvPr id="7" name="eyebrow">
             <a:extLst xmlns:a="http://schemas.openxmlformats.org/drawingml/2006/main">
               <a:ext uri="{FF2B5EF4-FFF2-40B4-BE49-F238E27FC236}">
-                <a16:creationId xmlns:a16="http://schemas.microsoft.com/office/drawing/2014/main" id="{73D63231-37FB-489B-A9F5-FFC82C629910}"/>
+                <a16:creationId xmlns:a16="http://schemas.microsoft.com/office/drawing/2014/main" id="{BBECBBED-4036-4DFE-A0CB-EB9BD702F358}"/>
               </a:ext>
             </a:extLst>
           </p:cNvPr>
@@ -12311,10 +13296,69 @@
       </p:sp>
       <p:sp>
         <p:nvSpPr>
-          <p:cNvPr id="8" name="footer-rule">
-            <a:extLst xmlns:a="http://schemas.openxmlformats.org/drawingml/2006/main">
-              <a:ext uri="{FF2B5EF4-FFF2-40B4-BE49-F238E27FC236}">
-                <a16:creationId xmlns:a16="http://schemas.microsoft.com/office/drawing/2014/main" id="{8A165F3A-F219-490A-8B6F-A188E06B9DD4}"/>
+          <p:cNvPr id="8" name="rescue-point-logo-background">
+            <a:extLst xmlns:a="http://schemas.openxmlformats.org/drawingml/2006/main">
+              <a:ext uri="{FF2B5EF4-FFF2-40B4-BE49-F238E27FC236}">
+                <a16:creationId xmlns:a16="http://schemas.microsoft.com/office/drawing/2014/main" id="{6060EB98-C0A6-4B0F-AC3A-AE2EC90D8E20}"/>
+              </a:ext>
+            </a:extLst>
+          </p:cNvPr>
+          <p:cNvSpPr>
+            <a:spLocks xmlns:a="http://schemas.openxmlformats.org/drawingml/2006/main" noGrp="1"/>
+          </p:cNvSpPr>
+          <p:nvPr/>
+        </p:nvSpPr>
+        <p:spPr>
+          <a:xfrm xmlns:a="http://schemas.openxmlformats.org/drawingml/2006/main">
+            <a:off x="9772650" y="133350"/>
+            <a:ext cx="1733550" cy="457200"/>
+          </a:xfrm>
+          <a:prstGeom xmlns:a="http://schemas.openxmlformats.org/drawingml/2006/main" prst="roundRect">
+            <a:avLst>
+              <a:gd name="adj" fmla="val 16667"/>
+            </a:avLst>
+          </a:prstGeom>
+          <a:solidFill xmlns:a="http://schemas.openxmlformats.org/drawingml/2006/main">
+            <a:srgbClr val="06142E"/>
+          </a:solidFill>
+          <a:ln xmlns:a="http://schemas.openxmlformats.org/drawingml/2006/main" w="9525">
+            <a:solidFill>
+              <a:srgbClr val="1EC5FF">
+                <a:alpha val="33333"/>
+              </a:srgbClr>
+            </a:solidFill>
+            <a:prstDash val="solid"/>
+          </a:ln>
+        </p:spPr>
+      </p:sp>
+      <p:pic>
+        <p:nvPicPr>
+          <p:cNvPr id="23" name="" descr="Figura oficial da documentação dbt usada para explicar: Group e access criam uma fronteira — Modelos privados evoluem dentro do domínio; públicos viram interface.."/>
+          <p:cNvPicPr>
+            <a:picLocks xmlns:a="http://schemas.openxmlformats.org/drawingml/2006/main" noChangeAspect="1"/>
+          </p:cNvPicPr>
+          <p:nvPr/>
+        </p:nvPicPr>
+        <p:blipFill>
+          <a:blip xmlns:r="http://schemas.openxmlformats.org/officeDocument/2006/relationships" xmlns:a="http://schemas.openxmlformats.org/drawingml/2006/main" r:embed="Rcb5e0a9187dd4385"/>
+          <a:stretch xmlns:a="http://schemas.openxmlformats.org/drawingml/2006/main"/>
+        </p:blipFill>
+        <p:spPr>
+          <a:xfrm xmlns:a="http://schemas.openxmlformats.org/drawingml/2006/main">
+            <a:off x="9893718" y="209550"/>
+            <a:ext cx="1491414" cy="323850"/>
+          </a:xfrm>
+          <a:prstGeom xmlns:a="http://schemas.openxmlformats.org/drawingml/2006/main" prst="rect">
+            <a:avLst/>
+          </a:prstGeom>
+        </p:spPr>
+      </p:pic>
+      <p:sp>
+        <p:nvSpPr>
+          <p:cNvPr id="10" name="footer-rule">
+            <a:extLst xmlns:a="http://schemas.openxmlformats.org/drawingml/2006/main">
+              <a:ext uri="{FF2B5EF4-FFF2-40B4-BE49-F238E27FC236}">
+                <a16:creationId xmlns:a16="http://schemas.microsoft.com/office/drawing/2014/main" id="{C4C3B3F2-5BE7-486C-B66D-C491DFE3C135}"/>
               </a:ext>
             </a:extLst>
           </p:cNvPr>
@@ -12344,10 +13388,10 @@
       </p:sp>
       <p:sp>
         <p:nvSpPr>
-          <p:cNvPr id="9" name="footer">
-            <a:extLst xmlns:a="http://schemas.openxmlformats.org/drawingml/2006/main">
-              <a:ext uri="{FF2B5EF4-FFF2-40B4-BE49-F238E27FC236}">
-                <a16:creationId xmlns:a16="http://schemas.microsoft.com/office/drawing/2014/main" id="{4B3FA129-92C7-4DF0-90AF-8142A8CA7C6C}"/>
+          <p:cNvPr id="11" name="footer">
+            <a:extLst xmlns:a="http://schemas.openxmlformats.org/drawingml/2006/main">
+              <a:ext uri="{FF2B5EF4-FFF2-40B4-BE49-F238E27FC236}">
+                <a16:creationId xmlns:a16="http://schemas.microsoft.com/office/drawing/2014/main" id="{7952331A-282C-4F36-A917-ADCDC8D84E05}"/>
               </a:ext>
             </a:extLst>
           </p:cNvPr>
@@ -12399,10 +13443,10 @@
       </p:sp>
       <p:sp>
         <p:nvSpPr>
-          <p:cNvPr id="10" name="page-number">
-            <a:extLst xmlns:a="http://schemas.openxmlformats.org/drawingml/2006/main">
-              <a:ext uri="{FF2B5EF4-FFF2-40B4-BE49-F238E27FC236}">
-                <a16:creationId xmlns:a16="http://schemas.microsoft.com/office/drawing/2014/main" id="{ADD65D39-9530-4728-9143-BAF28F0D893B}"/>
+          <p:cNvPr id="12" name="page-number">
+            <a:extLst xmlns:a="http://schemas.openxmlformats.org/drawingml/2006/main">
+              <a:ext uri="{FF2B5EF4-FFF2-40B4-BE49-F238E27FC236}">
+                <a16:creationId xmlns:a16="http://schemas.microsoft.com/office/drawing/2014/main" id="{BAD2545A-7A8B-4677-BA3D-4B439BF0B891}"/>
               </a:ext>
             </a:extLst>
           </p:cNvPr>
@@ -12455,7 +13499,7 @@
     </p:spTree>
     <p:extLst>
       <p:ext uri="{BB962C8B-B14F-4D97-AF65-F5344CB8AC3E}">
-        <p14:creationId xmlns:p14="http://schemas.microsoft.com/office/powerpoint/2010/main" val="7657289"/>
+        <p14:creationId xmlns:p14="http://schemas.microsoft.com/office/powerpoint/2010/main" val="1245552977"/>
       </p:ext>
     </p:extLst>
   </p:cSld>
@@ -12491,10 +13535,10 @@
       </p:grpSpPr>
       <p:sp>
         <p:nvSpPr>
-          <p:cNvPr id="9" name="slide-title">
-            <a:extLst xmlns:a="http://schemas.openxmlformats.org/drawingml/2006/main">
-              <a:ext uri="{FF2B5EF4-FFF2-40B4-BE49-F238E27FC236}">
-                <a16:creationId xmlns:a16="http://schemas.microsoft.com/office/drawing/2014/main" id="{0E0653F1-35B0-4264-9C16-ED610AC54EDF}"/>
+          <p:cNvPr id="11" name="slide-title">
+            <a:extLst xmlns:a="http://schemas.openxmlformats.org/drawingml/2006/main">
+              <a:ext uri="{FF2B5EF4-FFF2-40B4-BE49-F238E27FC236}">
+                <a16:creationId xmlns:a16="http://schemas.microsoft.com/office/drawing/2014/main" id="{5A218B31-3F4B-4BFA-9D67-8BD9AEB66C3F}"/>
               </a:ext>
             </a:extLst>
           </p:cNvPr>
@@ -12545,7 +13589,7 @@
           <p:cNvPr id="2" name="layer-1">
             <a:extLst xmlns:a="http://schemas.openxmlformats.org/drawingml/2006/main">
               <a:ext uri="{FF2B5EF4-FFF2-40B4-BE49-F238E27FC236}">
-                <a16:creationId xmlns:a16="http://schemas.microsoft.com/office/drawing/2014/main" id="{D9528F03-3CBA-4F29-8EBC-570AD6EF949D}"/>
+                <a16:creationId xmlns:a16="http://schemas.microsoft.com/office/drawing/2014/main" id="{D4EBAD59-1C02-472F-ADDA-FE05EEDA884E}"/>
               </a:ext>
             </a:extLst>
           </p:cNvPr>
@@ -12604,7 +13648,7 @@
           <p:cNvPr id="3" name="layer-2">
             <a:extLst xmlns:a="http://schemas.openxmlformats.org/drawingml/2006/main">
               <a:ext uri="{FF2B5EF4-FFF2-40B4-BE49-F238E27FC236}">
-                <a16:creationId xmlns:a16="http://schemas.microsoft.com/office/drawing/2014/main" id="{A6A1BF9A-9244-4B56-93B4-5E90E02FE2F8}"/>
+                <a16:creationId xmlns:a16="http://schemas.microsoft.com/office/drawing/2014/main" id="{5EC761C9-A1E0-4F8C-B642-273C41945E1B}"/>
               </a:ext>
             </a:extLst>
           </p:cNvPr>
@@ -12663,7 +13707,7 @@
           <p:cNvPr id="4" name="layer-3">
             <a:extLst xmlns:a="http://schemas.openxmlformats.org/drawingml/2006/main">
               <a:ext uri="{FF2B5EF4-FFF2-40B4-BE49-F238E27FC236}">
-                <a16:creationId xmlns:a16="http://schemas.microsoft.com/office/drawing/2014/main" id="{C996F655-8A4E-4D92-8537-72900A4F3C0F}"/>
+                <a16:creationId xmlns:a16="http://schemas.microsoft.com/office/drawing/2014/main" id="{7772D485-8C22-4F20-A00F-147F54CF3964}"/>
               </a:ext>
             </a:extLst>
           </p:cNvPr>
@@ -12722,7 +13766,7 @@
           <p:cNvPr id="5" name="eyebrow">
             <a:extLst xmlns:a="http://schemas.openxmlformats.org/drawingml/2006/main">
               <a:ext uri="{FF2B5EF4-FFF2-40B4-BE49-F238E27FC236}">
-                <a16:creationId xmlns:a16="http://schemas.microsoft.com/office/drawing/2014/main" id="{66ECB752-4E6D-43EA-834E-97E45E951FD2}"/>
+                <a16:creationId xmlns:a16="http://schemas.microsoft.com/office/drawing/2014/main" id="{6BE216A7-9C1D-4770-900A-13CCA933E39E}"/>
               </a:ext>
             </a:extLst>
           </p:cNvPr>
@@ -12770,10 +13814,69 @@
       </p:sp>
       <p:sp>
         <p:nvSpPr>
-          <p:cNvPr id="6" name="footer-rule">
-            <a:extLst xmlns:a="http://schemas.openxmlformats.org/drawingml/2006/main">
-              <a:ext uri="{FF2B5EF4-FFF2-40B4-BE49-F238E27FC236}">
-                <a16:creationId xmlns:a16="http://schemas.microsoft.com/office/drawing/2014/main" id="{C59C8F27-0A01-4BDF-A015-D5C72ED12ADC}"/>
+          <p:cNvPr id="6" name="rescue-point-logo-background">
+            <a:extLst xmlns:a="http://schemas.openxmlformats.org/drawingml/2006/main">
+              <a:ext uri="{FF2B5EF4-FFF2-40B4-BE49-F238E27FC236}">
+                <a16:creationId xmlns:a16="http://schemas.microsoft.com/office/drawing/2014/main" id="{D80AAE3C-9C1E-40AF-B319-245567EB785B}"/>
+              </a:ext>
+            </a:extLst>
+          </p:cNvPr>
+          <p:cNvSpPr>
+            <a:spLocks xmlns:a="http://schemas.openxmlformats.org/drawingml/2006/main" noGrp="1"/>
+          </p:cNvSpPr>
+          <p:nvPr/>
+        </p:nvSpPr>
+        <p:spPr>
+          <a:xfrm xmlns:a="http://schemas.openxmlformats.org/drawingml/2006/main">
+            <a:off x="9772650" y="133350"/>
+            <a:ext cx="1733550" cy="457200"/>
+          </a:xfrm>
+          <a:prstGeom xmlns:a="http://schemas.openxmlformats.org/drawingml/2006/main" prst="roundRect">
+            <a:avLst>
+              <a:gd name="adj" fmla="val 16667"/>
+            </a:avLst>
+          </a:prstGeom>
+          <a:solidFill xmlns:a="http://schemas.openxmlformats.org/drawingml/2006/main">
+            <a:srgbClr val="06142E"/>
+          </a:solidFill>
+          <a:ln xmlns:a="http://schemas.openxmlformats.org/drawingml/2006/main" w="9525">
+            <a:solidFill>
+              <a:srgbClr val="1EC5FF">
+                <a:alpha val="33333"/>
+              </a:srgbClr>
+            </a:solidFill>
+            <a:prstDash val="solid"/>
+          </a:ln>
+        </p:spPr>
+      </p:sp>
+      <p:pic>
+        <p:nvPicPr>
+          <p:cNvPr id="19" name="" descr="Figura oficial da documentação dbt usada para explicar: Group e access criam uma fronteira — private."/>
+          <p:cNvPicPr>
+            <a:picLocks xmlns:a="http://schemas.openxmlformats.org/drawingml/2006/main" noChangeAspect="1"/>
+          </p:cNvPicPr>
+          <p:nvPr/>
+        </p:nvPicPr>
+        <p:blipFill>
+          <a:blip xmlns:r="http://schemas.openxmlformats.org/officeDocument/2006/relationships" xmlns:a="http://schemas.openxmlformats.org/drawingml/2006/main" r:embed="Rb09b8b3140db463c"/>
+          <a:stretch xmlns:a="http://schemas.openxmlformats.org/drawingml/2006/main"/>
+        </p:blipFill>
+        <p:spPr>
+          <a:xfrm xmlns:a="http://schemas.openxmlformats.org/drawingml/2006/main">
+            <a:off x="9893718" y="209550"/>
+            <a:ext cx="1491414" cy="323850"/>
+          </a:xfrm>
+          <a:prstGeom xmlns:a="http://schemas.openxmlformats.org/drawingml/2006/main" prst="rect">
+            <a:avLst/>
+          </a:prstGeom>
+        </p:spPr>
+      </p:pic>
+      <p:sp>
+        <p:nvSpPr>
+          <p:cNvPr id="8" name="footer-rule">
+            <a:extLst xmlns:a="http://schemas.openxmlformats.org/drawingml/2006/main">
+              <a:ext uri="{FF2B5EF4-FFF2-40B4-BE49-F238E27FC236}">
+                <a16:creationId xmlns:a16="http://schemas.microsoft.com/office/drawing/2014/main" id="{9743AD81-07E1-4E76-A6AE-DF8C05142549}"/>
               </a:ext>
             </a:extLst>
           </p:cNvPr>
@@ -12803,10 +13906,10 @@
       </p:sp>
       <p:sp>
         <p:nvSpPr>
-          <p:cNvPr id="7" name="footer">
-            <a:extLst xmlns:a="http://schemas.openxmlformats.org/drawingml/2006/main">
-              <a:ext uri="{FF2B5EF4-FFF2-40B4-BE49-F238E27FC236}">
-                <a16:creationId xmlns:a16="http://schemas.microsoft.com/office/drawing/2014/main" id="{2C912D82-F6A0-45E3-93C3-ABE258F4FB94}"/>
+          <p:cNvPr id="9" name="footer">
+            <a:extLst xmlns:a="http://schemas.openxmlformats.org/drawingml/2006/main">
+              <a:ext uri="{FF2B5EF4-FFF2-40B4-BE49-F238E27FC236}">
+                <a16:creationId xmlns:a16="http://schemas.microsoft.com/office/drawing/2014/main" id="{73041A07-FB46-4818-B501-4568ADA5FE3A}"/>
               </a:ext>
             </a:extLst>
           </p:cNvPr>
@@ -12858,10 +13961,10 @@
       </p:sp>
       <p:sp>
         <p:nvSpPr>
-          <p:cNvPr id="8" name="page-number">
-            <a:extLst xmlns:a="http://schemas.openxmlformats.org/drawingml/2006/main">
-              <a:ext uri="{FF2B5EF4-FFF2-40B4-BE49-F238E27FC236}">
-                <a16:creationId xmlns:a16="http://schemas.microsoft.com/office/drawing/2014/main" id="{6CC30346-9344-40D4-8926-DE48FDD63B95}"/>
+          <p:cNvPr id="10" name="page-number">
+            <a:extLst xmlns:a="http://schemas.openxmlformats.org/drawingml/2006/main">
+              <a:ext uri="{FF2B5EF4-FFF2-40B4-BE49-F238E27FC236}">
+                <a16:creationId xmlns:a16="http://schemas.microsoft.com/office/drawing/2014/main" id="{7073331C-3008-4F29-BA3F-A089D99435F8}"/>
               </a:ext>
             </a:extLst>
           </p:cNvPr>
@@ -12914,7 +14017,7 @@
     </p:spTree>
     <p:extLst>
       <p:ext uri="{BB962C8B-B14F-4D97-AF65-F5344CB8AC3E}">
-        <p14:creationId xmlns:p14="http://schemas.microsoft.com/office/powerpoint/2010/main" val="662898776"/>
+        <p14:creationId xmlns:p14="http://schemas.microsoft.com/office/powerpoint/2010/main" val="831248799"/>
       </p:ext>
     </p:extLst>
   </p:cSld>
@@ -12950,10 +14053,10 @@
       </p:grpSpPr>
       <p:sp>
         <p:nvSpPr>
-          <p:cNvPr id="11" name="slide-title">
-            <a:extLst xmlns:a="http://schemas.openxmlformats.org/drawingml/2006/main">
-              <a:ext uri="{FF2B5EF4-FFF2-40B4-BE49-F238E27FC236}">
-                <a16:creationId xmlns:a16="http://schemas.microsoft.com/office/drawing/2014/main" id="{06ADAACF-52F4-4358-A24E-281CE0363A43}"/>
+          <p:cNvPr id="13" name="slide-title">
+            <a:extLst xmlns:a="http://schemas.openxmlformats.org/drawingml/2006/main">
+              <a:ext uri="{FF2B5EF4-FFF2-40B4-BE49-F238E27FC236}">
+                <a16:creationId xmlns:a16="http://schemas.microsoft.com/office/drawing/2014/main" id="{59AD43B1-757F-4DF3-B0BF-21139C9CE35F}"/>
               </a:ext>
             </a:extLst>
           </p:cNvPr>
@@ -13004,7 +14107,7 @@
           <p:cNvPr id="2" name="slide-subtitle">
             <a:extLst xmlns:a="http://schemas.openxmlformats.org/drawingml/2006/main">
               <a:ext uri="{FF2B5EF4-FFF2-40B4-BE49-F238E27FC236}">
-                <a16:creationId xmlns:a16="http://schemas.microsoft.com/office/drawing/2014/main" id="{3A155DFF-4427-49B1-BAB9-8B7C17832A8D}"/>
+                <a16:creationId xmlns:a16="http://schemas.microsoft.com/office/drawing/2014/main" id="{0FA3690C-A581-487A-B125-4B5A29AD93A3}"/>
               </a:ext>
             </a:extLst>
           </p:cNvPr>
@@ -13055,7 +14158,7 @@
           <p:cNvPr id="3" name="bullets">
             <a:extLst xmlns:a="http://schemas.openxmlformats.org/drawingml/2006/main">
               <a:ext uri="{FF2B5EF4-FFF2-40B4-BE49-F238E27FC236}">
-                <a16:creationId xmlns:a16="http://schemas.microsoft.com/office/drawing/2014/main" id="{7968288F-2918-4CFC-A621-62778ACB950F}"/>
+                <a16:creationId xmlns:a16="http://schemas.microsoft.com/office/drawing/2014/main" id="{844F0536-D38E-4D2A-82A7-551C03D670C1}"/>
               </a:ext>
             </a:extLst>
           </p:cNvPr>
@@ -13160,7 +14263,7 @@
           <p:cNvPr id="4" name="ambient-glow">
             <a:extLst xmlns:a="http://schemas.openxmlformats.org/drawingml/2006/main">
               <a:ext uri="{FF2B5EF4-FFF2-40B4-BE49-F238E27FC236}">
-                <a16:creationId xmlns:a16="http://schemas.microsoft.com/office/drawing/2014/main" id="{9223BB37-8828-4C2C-AA90-DDF82425ABDD}"/>
+                <a16:creationId xmlns:a16="http://schemas.microsoft.com/office/drawing/2014/main" id="{637E0187-7D5A-4C09-ADB4-B089C84FAF52}"/>
               </a:ext>
             </a:extLst>
           </p:cNvPr>
@@ -13197,7 +14300,7 @@
           <p:cNvPr id="5" name="ambient-core">
             <a:extLst xmlns:a="http://schemas.openxmlformats.org/drawingml/2006/main">
               <a:ext uri="{FF2B5EF4-FFF2-40B4-BE49-F238E27FC236}">
-                <a16:creationId xmlns:a16="http://schemas.microsoft.com/office/drawing/2014/main" id="{EC82BC33-EED3-43B5-8B4C-982550A139DA}"/>
+                <a16:creationId xmlns:a16="http://schemas.microsoft.com/office/drawing/2014/main" id="{3E330D4E-70AB-4435-8BD5-83663A52E5FA}"/>
               </a:ext>
             </a:extLst>
           </p:cNvPr>
@@ -13234,7 +14337,7 @@
           <p:cNvPr id="6" name="section-number">
             <a:extLst xmlns:a="http://schemas.openxmlformats.org/drawingml/2006/main">
               <a:ext uri="{FF2B5EF4-FFF2-40B4-BE49-F238E27FC236}">
-                <a16:creationId xmlns:a16="http://schemas.microsoft.com/office/drawing/2014/main" id="{B68F5597-1995-44BF-8DD9-FFDD229E7A09}"/>
+                <a16:creationId xmlns:a16="http://schemas.microsoft.com/office/drawing/2014/main" id="{BAA66B18-A383-4A8E-905D-C14D4F7ADDA4}"/>
               </a:ext>
             </a:extLst>
           </p:cNvPr>
@@ -13285,7 +14388,7 @@
           <p:cNvPr id="7" name="eyebrow">
             <a:extLst xmlns:a="http://schemas.openxmlformats.org/drawingml/2006/main">
               <a:ext uri="{FF2B5EF4-FFF2-40B4-BE49-F238E27FC236}">
-                <a16:creationId xmlns:a16="http://schemas.microsoft.com/office/drawing/2014/main" id="{5E9EC6D1-DF56-4AEB-857A-FDA05665A67A}"/>
+                <a16:creationId xmlns:a16="http://schemas.microsoft.com/office/drawing/2014/main" id="{9AE04FE8-A464-48BC-A702-5E6FC3F4DF91}"/>
               </a:ext>
             </a:extLst>
           </p:cNvPr>
@@ -13333,10 +14436,69 @@
       </p:sp>
       <p:sp>
         <p:nvSpPr>
-          <p:cNvPr id="8" name="footer-rule">
-            <a:extLst xmlns:a="http://schemas.openxmlformats.org/drawingml/2006/main">
-              <a:ext uri="{FF2B5EF4-FFF2-40B4-BE49-F238E27FC236}">
-                <a16:creationId xmlns:a16="http://schemas.microsoft.com/office/drawing/2014/main" id="{ADF43933-2DF2-4ED2-9F00-201A7102BDDF}"/>
+          <p:cNvPr id="8" name="rescue-point-logo-background">
+            <a:extLst xmlns:a="http://schemas.openxmlformats.org/drawingml/2006/main">
+              <a:ext uri="{FF2B5EF4-FFF2-40B4-BE49-F238E27FC236}">
+                <a16:creationId xmlns:a16="http://schemas.microsoft.com/office/drawing/2014/main" id="{AB48DB4F-C035-4491-B3DA-A04E64FD482B}"/>
+              </a:ext>
+            </a:extLst>
+          </p:cNvPr>
+          <p:cNvSpPr>
+            <a:spLocks xmlns:a="http://schemas.openxmlformats.org/drawingml/2006/main" noGrp="1"/>
+          </p:cNvSpPr>
+          <p:nvPr/>
+        </p:nvSpPr>
+        <p:spPr>
+          <a:xfrm xmlns:a="http://schemas.openxmlformats.org/drawingml/2006/main">
+            <a:off x="9772650" y="133350"/>
+            <a:ext cx="1733550" cy="457200"/>
+          </a:xfrm>
+          <a:prstGeom xmlns:a="http://schemas.openxmlformats.org/drawingml/2006/main" prst="roundRect">
+            <a:avLst>
+              <a:gd name="adj" fmla="val 16667"/>
+            </a:avLst>
+          </a:prstGeom>
+          <a:solidFill xmlns:a="http://schemas.openxmlformats.org/drawingml/2006/main">
+            <a:srgbClr val="06142E"/>
+          </a:solidFill>
+          <a:ln xmlns:a="http://schemas.openxmlformats.org/drawingml/2006/main" w="9525">
+            <a:solidFill>
+              <a:srgbClr val="1EC5FF">
+                <a:alpha val="33333"/>
+              </a:srgbClr>
+            </a:solidFill>
+            <a:prstDash val="solid"/>
+          </a:ln>
+        </p:spPr>
+      </p:sp>
+      <p:pic>
+        <p:nvPicPr>
+          <p:cNvPr id="23" name="" descr="Figura oficial da documentação dbt usada para explicar: Tags e meta carregam política — Classificação só é útil quando seleção e validação a consomem.."/>
+          <p:cNvPicPr>
+            <a:picLocks xmlns:a="http://schemas.openxmlformats.org/drawingml/2006/main" noChangeAspect="1"/>
+          </p:cNvPicPr>
+          <p:nvPr/>
+        </p:nvPicPr>
+        <p:blipFill>
+          <a:blip xmlns:r="http://schemas.openxmlformats.org/officeDocument/2006/relationships" xmlns:a="http://schemas.openxmlformats.org/drawingml/2006/main" r:embed="R4334d41217bf49d1"/>
+          <a:stretch xmlns:a="http://schemas.openxmlformats.org/drawingml/2006/main"/>
+        </p:blipFill>
+        <p:spPr>
+          <a:xfrm xmlns:a="http://schemas.openxmlformats.org/drawingml/2006/main">
+            <a:off x="9893718" y="209550"/>
+            <a:ext cx="1491414" cy="323850"/>
+          </a:xfrm>
+          <a:prstGeom xmlns:a="http://schemas.openxmlformats.org/drawingml/2006/main" prst="rect">
+            <a:avLst/>
+          </a:prstGeom>
+        </p:spPr>
+      </p:pic>
+      <p:sp>
+        <p:nvSpPr>
+          <p:cNvPr id="10" name="footer-rule">
+            <a:extLst xmlns:a="http://schemas.openxmlformats.org/drawingml/2006/main">
+              <a:ext uri="{FF2B5EF4-FFF2-40B4-BE49-F238E27FC236}">
+                <a16:creationId xmlns:a16="http://schemas.microsoft.com/office/drawing/2014/main" id="{4EA3CB17-D792-4F17-8243-960D49A23DC6}"/>
               </a:ext>
             </a:extLst>
           </p:cNvPr>
@@ -13366,10 +14528,10 @@
       </p:sp>
       <p:sp>
         <p:nvSpPr>
-          <p:cNvPr id="9" name="footer">
-            <a:extLst xmlns:a="http://schemas.openxmlformats.org/drawingml/2006/main">
-              <a:ext uri="{FF2B5EF4-FFF2-40B4-BE49-F238E27FC236}">
-                <a16:creationId xmlns:a16="http://schemas.microsoft.com/office/drawing/2014/main" id="{8F8FBAD7-29DC-463D-8777-AD6578438F97}"/>
+          <p:cNvPr id="11" name="footer">
+            <a:extLst xmlns:a="http://schemas.openxmlformats.org/drawingml/2006/main">
+              <a:ext uri="{FF2B5EF4-FFF2-40B4-BE49-F238E27FC236}">
+                <a16:creationId xmlns:a16="http://schemas.microsoft.com/office/drawing/2014/main" id="{A343C108-1953-4B83-AF9A-E6450E04A8A5}"/>
               </a:ext>
             </a:extLst>
           </p:cNvPr>
@@ -13421,10 +14583,10 @@
       </p:sp>
       <p:sp>
         <p:nvSpPr>
-          <p:cNvPr id="10" name="page-number">
-            <a:extLst xmlns:a="http://schemas.openxmlformats.org/drawingml/2006/main">
-              <a:ext uri="{FF2B5EF4-FFF2-40B4-BE49-F238E27FC236}">
-                <a16:creationId xmlns:a16="http://schemas.microsoft.com/office/drawing/2014/main" id="{D5F32A2E-F13E-469B-8FE3-EBF19D8B27A7}"/>
+          <p:cNvPr id="12" name="page-number">
+            <a:extLst xmlns:a="http://schemas.openxmlformats.org/drawingml/2006/main">
+              <a:ext uri="{FF2B5EF4-FFF2-40B4-BE49-F238E27FC236}">
+                <a16:creationId xmlns:a16="http://schemas.microsoft.com/office/drawing/2014/main" id="{9CE2127C-B069-40EB-AE91-39325D9245DB}"/>
               </a:ext>
             </a:extLst>
           </p:cNvPr>
@@ -13477,7 +14639,7 @@
     </p:spTree>
     <p:extLst>
       <p:ext uri="{BB962C8B-B14F-4D97-AF65-F5344CB8AC3E}">
-        <p14:creationId xmlns:p14="http://schemas.microsoft.com/office/powerpoint/2010/main" val="1677401991"/>
+        <p14:creationId xmlns:p14="http://schemas.microsoft.com/office/powerpoint/2010/main" val="1549599567"/>
       </p:ext>
     </p:extLst>
   </p:cSld>
@@ -13505,10 +14667,10 @@
       </p:grpSpPr>
       <p:sp>
         <p:nvSpPr>
-          <p:cNvPr id="12" name="slide-title">
-            <a:extLst xmlns:a="http://schemas.openxmlformats.org/drawingml/2006/main">
-              <a:ext uri="{FF2B5EF4-FFF2-40B4-BE49-F238E27FC236}">
-                <a16:creationId xmlns:a16="http://schemas.microsoft.com/office/drawing/2014/main" id="{B8A34A4C-274A-425F-8E66-1E92AB459E06}"/>
+          <p:cNvPr id="14" name="slide-title">
+            <a:extLst xmlns:a="http://schemas.openxmlformats.org/drawingml/2006/main">
+              <a:ext uri="{FF2B5EF4-FFF2-40B4-BE49-F238E27FC236}">
+                <a16:creationId xmlns:a16="http://schemas.microsoft.com/office/drawing/2014/main" id="{4A5EA6EA-593D-447E-8D68-8EE96C645E37}"/>
               </a:ext>
             </a:extLst>
           </p:cNvPr>
@@ -13559,7 +14721,7 @@
           <p:cNvPr id="2" name="status-dot-1">
             <a:extLst xmlns:a="http://schemas.openxmlformats.org/drawingml/2006/main">
               <a:ext uri="{FF2B5EF4-FFF2-40B4-BE49-F238E27FC236}">
-                <a16:creationId xmlns:a16="http://schemas.microsoft.com/office/drawing/2014/main" id="{0B901510-B41E-42D7-8213-BEB7490BE4FA}"/>
+                <a16:creationId xmlns:a16="http://schemas.microsoft.com/office/drawing/2014/main" id="{3ABB2F67-A17B-4FEE-80B5-A33C60BC594B}"/>
               </a:ext>
             </a:extLst>
           </p:cNvPr>
@@ -13592,7 +14754,7 @@
           <p:cNvPr id="3" name="status-label-1">
             <a:extLst xmlns:a="http://schemas.openxmlformats.org/drawingml/2006/main">
               <a:ext uri="{FF2B5EF4-FFF2-40B4-BE49-F238E27FC236}">
-                <a16:creationId xmlns:a16="http://schemas.microsoft.com/office/drawing/2014/main" id="{98F45AAB-1E1D-4D03-A7B8-D89317628857}"/>
+                <a16:creationId xmlns:a16="http://schemas.microsoft.com/office/drawing/2014/main" id="{1ADC1CDD-873A-4F76-AC26-B8A41E55E1DE}"/>
               </a:ext>
             </a:extLst>
           </p:cNvPr>
@@ -13643,7 +14805,7 @@
           <p:cNvPr id="4" name="status-dot-2">
             <a:extLst xmlns:a="http://schemas.openxmlformats.org/drawingml/2006/main">
               <a:ext uri="{FF2B5EF4-FFF2-40B4-BE49-F238E27FC236}">
-                <a16:creationId xmlns:a16="http://schemas.microsoft.com/office/drawing/2014/main" id="{CA5C0725-C580-48D2-9D48-71153A0ECFE8}"/>
+                <a16:creationId xmlns:a16="http://schemas.microsoft.com/office/drawing/2014/main" id="{CAAD521C-4E45-4D06-95A4-9D56DC8C40DE}"/>
               </a:ext>
             </a:extLst>
           </p:cNvPr>
@@ -13676,7 +14838,7 @@
           <p:cNvPr id="5" name="status-label-2">
             <a:extLst xmlns:a="http://schemas.openxmlformats.org/drawingml/2006/main">
               <a:ext uri="{FF2B5EF4-FFF2-40B4-BE49-F238E27FC236}">
-                <a16:creationId xmlns:a16="http://schemas.microsoft.com/office/drawing/2014/main" id="{65ABC6B7-90C6-49B0-9671-4FB6EDBD58AE}"/>
+                <a16:creationId xmlns:a16="http://schemas.microsoft.com/office/drawing/2014/main" id="{45F8F73A-222E-4ED1-A63A-B8C0A5BC6554}"/>
               </a:ext>
             </a:extLst>
           </p:cNvPr>
@@ -13727,7 +14889,7 @@
           <p:cNvPr id="6" name="status-dot-3">
             <a:extLst xmlns:a="http://schemas.openxmlformats.org/drawingml/2006/main">
               <a:ext uri="{FF2B5EF4-FFF2-40B4-BE49-F238E27FC236}">
-                <a16:creationId xmlns:a16="http://schemas.microsoft.com/office/drawing/2014/main" id="{5CFD8D73-34A6-4856-AAB7-CDBCF4BA4FF6}"/>
+                <a16:creationId xmlns:a16="http://schemas.microsoft.com/office/drawing/2014/main" id="{D3C1578B-275B-456E-B3FD-DDEB3A9847A8}"/>
               </a:ext>
             </a:extLst>
           </p:cNvPr>
@@ -13760,7 +14922,7 @@
           <p:cNvPr id="7" name="status-label-3">
             <a:extLst xmlns:a="http://schemas.openxmlformats.org/drawingml/2006/main">
               <a:ext uri="{FF2B5EF4-FFF2-40B4-BE49-F238E27FC236}">
-                <a16:creationId xmlns:a16="http://schemas.microsoft.com/office/drawing/2014/main" id="{1786FF16-D86D-46F0-9A9C-1408B8D42A5F}"/>
+                <a16:creationId xmlns:a16="http://schemas.microsoft.com/office/drawing/2014/main" id="{13E79174-0664-4D8C-986E-ECED6BB19E63}"/>
               </a:ext>
             </a:extLst>
           </p:cNvPr>
@@ -13811,7 +14973,7 @@
           <p:cNvPr id="8" name="eyebrow">
             <a:extLst xmlns:a="http://schemas.openxmlformats.org/drawingml/2006/main">
               <a:ext uri="{FF2B5EF4-FFF2-40B4-BE49-F238E27FC236}">
-                <a16:creationId xmlns:a16="http://schemas.microsoft.com/office/drawing/2014/main" id="{D21E6FDF-E90D-480A-B0C3-32F344BE81FE}"/>
+                <a16:creationId xmlns:a16="http://schemas.microsoft.com/office/drawing/2014/main" id="{08151C41-CA78-4D94-B540-EE3E7AEA8421}"/>
               </a:ext>
             </a:extLst>
           </p:cNvPr>
@@ -13859,10 +15021,69 @@
       </p:sp>
       <p:sp>
         <p:nvSpPr>
-          <p:cNvPr id="9" name="footer-rule">
-            <a:extLst xmlns:a="http://schemas.openxmlformats.org/drawingml/2006/main">
-              <a:ext uri="{FF2B5EF4-FFF2-40B4-BE49-F238E27FC236}">
-                <a16:creationId xmlns:a16="http://schemas.microsoft.com/office/drawing/2014/main" id="{ECCDC0CB-D8D2-4D10-8AB2-F41AF8B73CD1}"/>
+          <p:cNvPr id="9" name="rescue-point-logo-background">
+            <a:extLst xmlns:a="http://schemas.openxmlformats.org/drawingml/2006/main">
+              <a:ext uri="{FF2B5EF4-FFF2-40B4-BE49-F238E27FC236}">
+                <a16:creationId xmlns:a16="http://schemas.microsoft.com/office/drawing/2014/main" id="{91F8AB57-F2CF-4CF4-8480-D05E7A70667C}"/>
+              </a:ext>
+            </a:extLst>
+          </p:cNvPr>
+          <p:cNvSpPr>
+            <a:spLocks xmlns:a="http://schemas.openxmlformats.org/drawingml/2006/main" noGrp="1"/>
+          </p:cNvSpPr>
+          <p:nvPr/>
+        </p:nvSpPr>
+        <p:spPr>
+          <a:xfrm xmlns:a="http://schemas.openxmlformats.org/drawingml/2006/main">
+            <a:off x="9772650" y="133350"/>
+            <a:ext cx="1733550" cy="457200"/>
+          </a:xfrm>
+          <a:prstGeom xmlns:a="http://schemas.openxmlformats.org/drawingml/2006/main" prst="roundRect">
+            <a:avLst>
+              <a:gd name="adj" fmla="val 16667"/>
+            </a:avLst>
+          </a:prstGeom>
+          <a:solidFill xmlns:a="http://schemas.openxmlformats.org/drawingml/2006/main">
+            <a:srgbClr val="06142E"/>
+          </a:solidFill>
+          <a:ln xmlns:a="http://schemas.openxmlformats.org/drawingml/2006/main" w="9525">
+            <a:solidFill>
+              <a:srgbClr val="1EC5FF">
+                <a:alpha val="33333"/>
+              </a:srgbClr>
+            </a:solidFill>
+            <a:prstDash val="solid"/>
+          </a:ln>
+        </p:spPr>
+      </p:sp>
+      <p:pic>
+        <p:nvPicPr>
+          <p:cNvPr id="25" name="" descr="Figura oficial da documentação dbt usada para explicar: Tags e meta carregam política — Classificar."/>
+          <p:cNvPicPr>
+            <a:picLocks xmlns:a="http://schemas.openxmlformats.org/drawingml/2006/main" noChangeAspect="1"/>
+          </p:cNvPicPr>
+          <p:nvPr/>
+        </p:nvPicPr>
+        <p:blipFill>
+          <a:blip xmlns:r="http://schemas.openxmlformats.org/officeDocument/2006/relationships" xmlns:a="http://schemas.openxmlformats.org/drawingml/2006/main" r:embed="R67ad8bcf78884dad"/>
+          <a:stretch xmlns:a="http://schemas.openxmlformats.org/drawingml/2006/main"/>
+        </p:blipFill>
+        <p:spPr>
+          <a:xfrm xmlns:a="http://schemas.openxmlformats.org/drawingml/2006/main">
+            <a:off x="9893718" y="209550"/>
+            <a:ext cx="1491414" cy="323850"/>
+          </a:xfrm>
+          <a:prstGeom xmlns:a="http://schemas.openxmlformats.org/drawingml/2006/main" prst="rect">
+            <a:avLst/>
+          </a:prstGeom>
+        </p:spPr>
+      </p:pic>
+      <p:sp>
+        <p:nvSpPr>
+          <p:cNvPr id="11" name="footer-rule">
+            <a:extLst xmlns:a="http://schemas.openxmlformats.org/drawingml/2006/main">
+              <a:ext uri="{FF2B5EF4-FFF2-40B4-BE49-F238E27FC236}">
+                <a16:creationId xmlns:a16="http://schemas.microsoft.com/office/drawing/2014/main" id="{9D179604-C7EB-49A3-9F95-D6360D41F14D}"/>
               </a:ext>
             </a:extLst>
           </p:cNvPr>
@@ -13892,10 +15113,10 @@
       </p:sp>
       <p:sp>
         <p:nvSpPr>
-          <p:cNvPr id="10" name="footer">
-            <a:extLst xmlns:a="http://schemas.openxmlformats.org/drawingml/2006/main">
-              <a:ext uri="{FF2B5EF4-FFF2-40B4-BE49-F238E27FC236}">
-                <a16:creationId xmlns:a16="http://schemas.microsoft.com/office/drawing/2014/main" id="{935CC317-19A4-4385-96B9-909B0B81AAE3}"/>
+          <p:cNvPr id="12" name="footer">
+            <a:extLst xmlns:a="http://schemas.openxmlformats.org/drawingml/2006/main">
+              <a:ext uri="{FF2B5EF4-FFF2-40B4-BE49-F238E27FC236}">
+                <a16:creationId xmlns:a16="http://schemas.microsoft.com/office/drawing/2014/main" id="{9ED9301A-3116-4F05-BA66-B89474437089}"/>
               </a:ext>
             </a:extLst>
           </p:cNvPr>
@@ -13947,10 +15168,10 @@
       </p:sp>
       <p:sp>
         <p:nvSpPr>
-          <p:cNvPr id="11" name="page-number">
-            <a:extLst xmlns:a="http://schemas.openxmlformats.org/drawingml/2006/main">
-              <a:ext uri="{FF2B5EF4-FFF2-40B4-BE49-F238E27FC236}">
-                <a16:creationId xmlns:a16="http://schemas.microsoft.com/office/drawing/2014/main" id="{F3629B69-5AA8-4912-8147-312509B731CB}"/>
+          <p:cNvPr id="13" name="page-number">
+            <a:extLst xmlns:a="http://schemas.openxmlformats.org/drawingml/2006/main">
+              <a:ext uri="{FF2B5EF4-FFF2-40B4-BE49-F238E27FC236}">
+                <a16:creationId xmlns:a16="http://schemas.microsoft.com/office/drawing/2014/main" id="{908E2E10-C7D8-4C4F-A80F-0A166A2D8DDD}"/>
               </a:ext>
             </a:extLst>
           </p:cNvPr>
@@ -14003,7 +15224,7 @@
     </p:spTree>
     <p:extLst>
       <p:ext uri="{BB962C8B-B14F-4D97-AF65-F5344CB8AC3E}">
-        <p14:creationId xmlns:p14="http://schemas.microsoft.com/office/powerpoint/2010/main" val="2111247986"/>
+        <p14:creationId xmlns:p14="http://schemas.microsoft.com/office/powerpoint/2010/main" val="1376899710"/>
       </p:ext>
     </p:extLst>
   </p:cSld>
@@ -14031,10 +15252,10 @@
       </p:grpSpPr>
       <p:sp>
         <p:nvSpPr>
-          <p:cNvPr id="11" name="slide-title">
-            <a:extLst xmlns:a="http://schemas.openxmlformats.org/drawingml/2006/main">
-              <a:ext uri="{FF2B5EF4-FFF2-40B4-BE49-F238E27FC236}">
-                <a16:creationId xmlns:a16="http://schemas.microsoft.com/office/drawing/2014/main" id="{13E9968C-D31E-4D84-B424-C5C7C59176CB}"/>
+          <p:cNvPr id="13" name="slide-title">
+            <a:extLst xmlns:a="http://schemas.openxmlformats.org/drawingml/2006/main">
+              <a:ext uri="{FF2B5EF4-FFF2-40B4-BE49-F238E27FC236}">
+                <a16:creationId xmlns:a16="http://schemas.microsoft.com/office/drawing/2014/main" id="{B223B2BA-7F15-4272-9347-B4FDCAD42BC8}"/>
               </a:ext>
             </a:extLst>
           </p:cNvPr>
@@ -14085,7 +15306,7 @@
           <p:cNvPr id="2" name="slide-subtitle">
             <a:extLst xmlns:a="http://schemas.openxmlformats.org/drawingml/2006/main">
               <a:ext uri="{FF2B5EF4-FFF2-40B4-BE49-F238E27FC236}">
-                <a16:creationId xmlns:a16="http://schemas.microsoft.com/office/drawing/2014/main" id="{5A1E8F11-BC00-4B79-B59C-0C995899699D}"/>
+                <a16:creationId xmlns:a16="http://schemas.microsoft.com/office/drawing/2014/main" id="{EF963815-0597-4540-8A88-D822DCFDEC90}"/>
               </a:ext>
             </a:extLst>
           </p:cNvPr>
@@ -14136,7 +15357,7 @@
           <p:cNvPr id="3" name="bullets">
             <a:extLst xmlns:a="http://schemas.openxmlformats.org/drawingml/2006/main">
               <a:ext uri="{FF2B5EF4-FFF2-40B4-BE49-F238E27FC236}">
-                <a16:creationId xmlns:a16="http://schemas.microsoft.com/office/drawing/2014/main" id="{5FB83E97-5674-4B47-9B2E-190D9E7EEF3A}"/>
+                <a16:creationId xmlns:a16="http://schemas.microsoft.com/office/drawing/2014/main" id="{1B4C80F6-8A5A-435D-82F3-3BA1063CF01E}"/>
               </a:ext>
             </a:extLst>
           </p:cNvPr>
@@ -14241,7 +15462,7 @@
           <p:cNvPr id="4" name="ambient-glow">
             <a:extLst xmlns:a="http://schemas.openxmlformats.org/drawingml/2006/main">
               <a:ext uri="{FF2B5EF4-FFF2-40B4-BE49-F238E27FC236}">
-                <a16:creationId xmlns:a16="http://schemas.microsoft.com/office/drawing/2014/main" id="{8AEC6D15-E25C-453A-86D9-B876DA7B93E7}"/>
+                <a16:creationId xmlns:a16="http://schemas.microsoft.com/office/drawing/2014/main" id="{F797D5BE-F644-4367-8744-3AF571C46337}"/>
               </a:ext>
             </a:extLst>
           </p:cNvPr>
@@ -14278,7 +15499,7 @@
           <p:cNvPr id="5" name="ambient-core">
             <a:extLst xmlns:a="http://schemas.openxmlformats.org/drawingml/2006/main">
               <a:ext uri="{FF2B5EF4-FFF2-40B4-BE49-F238E27FC236}">
-                <a16:creationId xmlns:a16="http://schemas.microsoft.com/office/drawing/2014/main" id="{E814531A-A3A9-44FF-89E2-6BBCA2D6344A}"/>
+                <a16:creationId xmlns:a16="http://schemas.microsoft.com/office/drawing/2014/main" id="{5FD2BAAD-2B40-42DC-A306-0B1594D0E11D}"/>
               </a:ext>
             </a:extLst>
           </p:cNvPr>
@@ -14315,7 +15536,7 @@
           <p:cNvPr id="6" name="section-number">
             <a:extLst xmlns:a="http://schemas.openxmlformats.org/drawingml/2006/main">
               <a:ext uri="{FF2B5EF4-FFF2-40B4-BE49-F238E27FC236}">
-                <a16:creationId xmlns:a16="http://schemas.microsoft.com/office/drawing/2014/main" id="{CEE2F61C-793E-4B99-9FE8-0353FBA157D9}"/>
+                <a16:creationId xmlns:a16="http://schemas.microsoft.com/office/drawing/2014/main" id="{239BDBBD-E88B-4041-BB9C-8D2951110330}"/>
               </a:ext>
             </a:extLst>
           </p:cNvPr>
@@ -14366,7 +15587,7 @@
           <p:cNvPr id="7" name="eyebrow">
             <a:extLst xmlns:a="http://schemas.openxmlformats.org/drawingml/2006/main">
               <a:ext uri="{FF2B5EF4-FFF2-40B4-BE49-F238E27FC236}">
-                <a16:creationId xmlns:a16="http://schemas.microsoft.com/office/drawing/2014/main" id="{CC8457C1-D3E7-4B36-A136-C8A2D1FBDDD8}"/>
+                <a16:creationId xmlns:a16="http://schemas.microsoft.com/office/drawing/2014/main" id="{252C6D2E-A543-47D7-A527-5324408912CB}"/>
               </a:ext>
             </a:extLst>
           </p:cNvPr>
@@ -14414,10 +15635,69 @@
       </p:sp>
       <p:sp>
         <p:nvSpPr>
-          <p:cNvPr id="8" name="footer-rule">
-            <a:extLst xmlns:a="http://schemas.openxmlformats.org/drawingml/2006/main">
-              <a:ext uri="{FF2B5EF4-FFF2-40B4-BE49-F238E27FC236}">
-                <a16:creationId xmlns:a16="http://schemas.microsoft.com/office/drawing/2014/main" id="{1D5721E0-62DA-46DE-8FD0-A591A64905B2}"/>
+          <p:cNvPr id="8" name="rescue-point-logo-background">
+            <a:extLst xmlns:a="http://schemas.openxmlformats.org/drawingml/2006/main">
+              <a:ext uri="{FF2B5EF4-FFF2-40B4-BE49-F238E27FC236}">
+                <a16:creationId xmlns:a16="http://schemas.microsoft.com/office/drawing/2014/main" id="{2FD6387A-CBE2-4FA4-8DFF-42536F452F43}"/>
+              </a:ext>
+            </a:extLst>
+          </p:cNvPr>
+          <p:cNvSpPr>
+            <a:spLocks xmlns:a="http://schemas.openxmlformats.org/drawingml/2006/main" noGrp="1"/>
+          </p:cNvSpPr>
+          <p:nvPr/>
+        </p:nvSpPr>
+        <p:spPr>
+          <a:xfrm xmlns:a="http://schemas.openxmlformats.org/drawingml/2006/main">
+            <a:off x="9772650" y="133350"/>
+            <a:ext cx="1733550" cy="457200"/>
+          </a:xfrm>
+          <a:prstGeom xmlns:a="http://schemas.openxmlformats.org/drawingml/2006/main" prst="roundRect">
+            <a:avLst>
+              <a:gd name="adj" fmla="val 16667"/>
+            </a:avLst>
+          </a:prstGeom>
+          <a:solidFill xmlns:a="http://schemas.openxmlformats.org/drawingml/2006/main">
+            <a:srgbClr val="06142E"/>
+          </a:solidFill>
+          <a:ln xmlns:a="http://schemas.openxmlformats.org/drawingml/2006/main" w="9525">
+            <a:solidFill>
+              <a:srgbClr val="1EC5FF">
+                <a:alpha val="33333"/>
+              </a:srgbClr>
+            </a:solidFill>
+            <a:prstDash val="solid"/>
+          </a:ln>
+        </p:spPr>
+      </p:sp>
+      <p:pic>
+        <p:nvPicPr>
+          <p:cNvPr id="23" name="" descr="Figura oficial da documentação dbt usada para explicar: Exposure coloca o consumidor no grafo — Dashboard e agente deixam de ser dependências invisíveis.."/>
+          <p:cNvPicPr>
+            <a:picLocks xmlns:a="http://schemas.openxmlformats.org/drawingml/2006/main" noChangeAspect="1"/>
+          </p:cNvPicPr>
+          <p:nvPr/>
+        </p:nvPicPr>
+        <p:blipFill>
+          <a:blip xmlns:r="http://schemas.openxmlformats.org/officeDocument/2006/relationships" xmlns:a="http://schemas.openxmlformats.org/drawingml/2006/main" r:embed="R7632b95dadd44ae7"/>
+          <a:stretch xmlns:a="http://schemas.openxmlformats.org/drawingml/2006/main"/>
+        </p:blipFill>
+        <p:spPr>
+          <a:xfrm xmlns:a="http://schemas.openxmlformats.org/drawingml/2006/main">
+            <a:off x="9893718" y="209550"/>
+            <a:ext cx="1491414" cy="323850"/>
+          </a:xfrm>
+          <a:prstGeom xmlns:a="http://schemas.openxmlformats.org/drawingml/2006/main" prst="rect">
+            <a:avLst/>
+          </a:prstGeom>
+        </p:spPr>
+      </p:pic>
+      <p:sp>
+        <p:nvSpPr>
+          <p:cNvPr id="10" name="footer-rule">
+            <a:extLst xmlns:a="http://schemas.openxmlformats.org/drawingml/2006/main">
+              <a:ext uri="{FF2B5EF4-FFF2-40B4-BE49-F238E27FC236}">
+                <a16:creationId xmlns:a16="http://schemas.microsoft.com/office/drawing/2014/main" id="{664F98D9-99B4-42CE-97F9-3BBD41BE0F90}"/>
               </a:ext>
             </a:extLst>
           </p:cNvPr>
@@ -14447,10 +15727,10 @@
       </p:sp>
       <p:sp>
         <p:nvSpPr>
-          <p:cNvPr id="9" name="footer">
-            <a:extLst xmlns:a="http://schemas.openxmlformats.org/drawingml/2006/main">
-              <a:ext uri="{FF2B5EF4-FFF2-40B4-BE49-F238E27FC236}">
-                <a16:creationId xmlns:a16="http://schemas.microsoft.com/office/drawing/2014/main" id="{6742F290-ADE8-4FED-9C74-C40768F3A89E}"/>
+          <p:cNvPr id="11" name="footer">
+            <a:extLst xmlns:a="http://schemas.openxmlformats.org/drawingml/2006/main">
+              <a:ext uri="{FF2B5EF4-FFF2-40B4-BE49-F238E27FC236}">
+                <a16:creationId xmlns:a16="http://schemas.microsoft.com/office/drawing/2014/main" id="{C5CF41E5-9B95-43EF-98AA-9D0FAD6F2E40}"/>
               </a:ext>
             </a:extLst>
           </p:cNvPr>
@@ -14502,10 +15782,10 @@
       </p:sp>
       <p:sp>
         <p:nvSpPr>
-          <p:cNvPr id="10" name="page-number">
-            <a:extLst xmlns:a="http://schemas.openxmlformats.org/drawingml/2006/main">
-              <a:ext uri="{FF2B5EF4-FFF2-40B4-BE49-F238E27FC236}">
-                <a16:creationId xmlns:a16="http://schemas.microsoft.com/office/drawing/2014/main" id="{AE94DD69-0AD5-4A96-AC87-DDE4C74580F7}"/>
+          <p:cNvPr id="12" name="page-number">
+            <a:extLst xmlns:a="http://schemas.openxmlformats.org/drawingml/2006/main">
+              <a:ext uri="{FF2B5EF4-FFF2-40B4-BE49-F238E27FC236}">
+                <a16:creationId xmlns:a16="http://schemas.microsoft.com/office/drawing/2014/main" id="{0FFF0FDF-FC56-4E51-A7FD-21428611B30B}"/>
               </a:ext>
             </a:extLst>
           </p:cNvPr>
@@ -14558,7 +15838,7 @@
     </p:spTree>
     <p:extLst>
       <p:ext uri="{BB962C8B-B14F-4D97-AF65-F5344CB8AC3E}">
-        <p14:creationId xmlns:p14="http://schemas.microsoft.com/office/powerpoint/2010/main" val="812320860"/>
+        <p14:creationId xmlns:p14="http://schemas.microsoft.com/office/powerpoint/2010/main" val="2091775204"/>
       </p:ext>
     </p:extLst>
   </p:cSld>
